--- a/FacialEmotionRecognition/ProjectPresentation/CapstoneProject_NEW_Veena.pptx
+++ b/FacialEmotionRecognition/ProjectPresentation/CapstoneProject_NEW_Veena.pptx
@@ -2,7 +2,7 @@
 <file path=ppt/presentation.xml><?xml version="1.0" encoding="utf-8"?>
 <p:presentation xmlns:a="http://schemas.openxmlformats.org/drawingml/2006/main" xmlns:r="http://schemas.openxmlformats.org/officeDocument/2006/relationships" xmlns:p="http://schemas.openxmlformats.org/presentationml/2006/main" saveSubsetFonts="1">
   <p:sldMasterIdLst>
-    <p:sldMasterId id="2147483690" r:id="rId1"/>
+    <p:sldMasterId id="2147483737" r:id="rId1"/>
   </p:sldMasterIdLst>
   <p:sldIdLst>
     <p:sldId id="256" r:id="rId2"/>
@@ -19,6 +19,7 @@
     <p:sldId id="271" r:id="rId13"/>
     <p:sldId id="267" r:id="rId14"/>
     <p:sldId id="268" r:id="rId15"/>
+    <p:sldId id="273" r:id="rId16"/>
   </p:sldIdLst>
   <p:sldSz cx="12192000" cy="6858000"/>
   <p:notesSz cx="6858000" cy="9144000"/>
@@ -136,6 +137,7 @@
             <p14:sldId id="271"/>
             <p14:sldId id="267"/>
             <p14:sldId id="268"/>
+            <p14:sldId id="273"/>
           </p14:sldIdLst>
         </p14:section>
       </p14:sectionLst>
@@ -148,7 +150,7 @@
 </file>
 
 <file path=ppt/slideLayouts/slideLayout1.xml><?xml version="1.0" encoding="utf-8"?>
-<p:sldLayout xmlns:a="http://schemas.openxmlformats.org/drawingml/2006/main" xmlns:r="http://schemas.openxmlformats.org/officeDocument/2006/relationships" xmlns:p="http://schemas.openxmlformats.org/presentationml/2006/main" showMasterSp="0" type="title" preserve="1">
+<p:sldLayout xmlns:a="http://schemas.openxmlformats.org/drawingml/2006/main" xmlns:r="http://schemas.openxmlformats.org/officeDocument/2006/relationships" xmlns:p="http://schemas.openxmlformats.org/presentationml/2006/main" type="title" preserve="1">
   <p:cSld name="Title Slide">
     <p:spTree>
       <p:nvGrpSpPr>
@@ -176,17 +178,32 @@
         </p:nvSpPr>
         <p:spPr>
           <a:xfrm>
-            <a:off x="457200" y="4960137"/>
-            <a:ext cx="7772400" cy="1463040"/>
+            <a:off x="1751012" y="609601"/>
+            <a:ext cx="8676222" cy="3200400"/>
           </a:xfrm>
         </p:spPr>
         <p:txBody>
-          <a:bodyPr anchor="ctr">
+          <a:bodyPr anchor="b">
             <a:normAutofit/>
           </a:bodyPr>
           <a:lstStyle>
-            <a:lvl1pPr algn="r">
-              <a:defRPr sz="5000" spc="200" baseline="0"/>
+            <a:lvl1pPr algn="ctr">
+              <a:defRPr sz="4800">
+                <a:effectLst>
+                  <a:glow rad="38100">
+                    <a:schemeClr val="bg1">
+                      <a:lumMod val="65000"/>
+                      <a:lumOff val="35000"/>
+                      <a:alpha val="50000"/>
+                    </a:schemeClr>
+                  </a:glow>
+                  <a:outerShdw blurRad="28575" dist="31750" dir="13200000" algn="tl" rotWithShape="0">
+                    <a:srgbClr val="000000">
+                      <a:alpha val="25000"/>
+                    </a:srgbClr>
+                  </a:outerShdw>
+                </a:effectLst>
+              </a:defRPr>
             </a:lvl1pPr>
           </a:lstStyle>
           <a:p>
@@ -210,63 +227,113 @@
         </p:nvSpPr>
         <p:spPr>
           <a:xfrm>
-            <a:off x="8610600" y="4960137"/>
-            <a:ext cx="3200400" cy="1463040"/>
+            <a:off x="1751012" y="3886200"/>
+            <a:ext cx="8676222" cy="1905000"/>
           </a:xfrm>
         </p:spPr>
         <p:txBody>
-          <a:bodyPr lIns="91440" rIns="91440" anchor="ctr">
+          <a:bodyPr anchor="t">
             <a:normAutofit/>
           </a:bodyPr>
           <a:lstStyle>
-            <a:lvl1pPr marL="0" indent="0" algn="l">
-              <a:lnSpc>
-                <a:spcPct val="100000"/>
-              </a:lnSpc>
-              <a:spcBef>
-                <a:spcPts val="0"/>
-              </a:spcBef>
-              <a:buNone/>
-              <a:defRPr sz="1800">
-                <a:solidFill>
-                  <a:schemeClr val="tx1">
-                    <a:lumMod val="95000"/>
-                    <a:lumOff val="5000"/>
-                  </a:schemeClr>
-                </a:solidFill>
+            <a:lvl1pPr marL="0" indent="0" algn="ctr">
+              <a:buNone/>
+              <a:defRPr sz="2100">
+                <a:gradFill flip="none" rotWithShape="1">
+                  <a:gsLst>
+                    <a:gs pos="0">
+                      <a:schemeClr val="tx1"/>
+                    </a:gs>
+                    <a:gs pos="100000">
+                      <a:schemeClr val="tx1">
+                        <a:lumMod val="75000"/>
+                      </a:schemeClr>
+                    </a:gs>
+                  </a:gsLst>
+                  <a:lin ang="5400000" scaled="0"/>
+                  <a:tileRect/>
+                </a:gradFill>
               </a:defRPr>
             </a:lvl1pPr>
             <a:lvl2pPr marL="457200" indent="0" algn="ctr">
               <a:buNone/>
-              <a:defRPr sz="1800"/>
+              <a:defRPr>
+                <a:solidFill>
+                  <a:schemeClr val="tx1">
+                    <a:tint val="75000"/>
+                  </a:schemeClr>
+                </a:solidFill>
+              </a:defRPr>
             </a:lvl2pPr>
             <a:lvl3pPr marL="914400" indent="0" algn="ctr">
               <a:buNone/>
-              <a:defRPr sz="1800"/>
+              <a:defRPr>
+                <a:solidFill>
+                  <a:schemeClr val="tx1">
+                    <a:tint val="75000"/>
+                  </a:schemeClr>
+                </a:solidFill>
+              </a:defRPr>
             </a:lvl3pPr>
             <a:lvl4pPr marL="1371600" indent="0" algn="ctr">
               <a:buNone/>
-              <a:defRPr sz="1800"/>
+              <a:defRPr>
+                <a:solidFill>
+                  <a:schemeClr val="tx1">
+                    <a:tint val="75000"/>
+                  </a:schemeClr>
+                </a:solidFill>
+              </a:defRPr>
             </a:lvl4pPr>
             <a:lvl5pPr marL="1828800" indent="0" algn="ctr">
               <a:buNone/>
-              <a:defRPr sz="1800"/>
+              <a:defRPr>
+                <a:solidFill>
+                  <a:schemeClr val="tx1">
+                    <a:tint val="75000"/>
+                  </a:schemeClr>
+                </a:solidFill>
+              </a:defRPr>
             </a:lvl5pPr>
             <a:lvl6pPr marL="2286000" indent="0" algn="ctr">
               <a:buNone/>
-              <a:defRPr sz="1800"/>
+              <a:defRPr>
+                <a:solidFill>
+                  <a:schemeClr val="tx1">
+                    <a:tint val="75000"/>
+                  </a:schemeClr>
+                </a:solidFill>
+              </a:defRPr>
             </a:lvl6pPr>
             <a:lvl7pPr marL="2743200" indent="0" algn="ctr">
               <a:buNone/>
-              <a:defRPr sz="1800"/>
+              <a:defRPr>
+                <a:solidFill>
+                  <a:schemeClr val="tx1">
+                    <a:tint val="75000"/>
+                  </a:schemeClr>
+                </a:solidFill>
+              </a:defRPr>
             </a:lvl7pPr>
             <a:lvl8pPr marL="3200400" indent="0" algn="ctr">
               <a:buNone/>
-              <a:defRPr sz="1800"/>
+              <a:defRPr>
+                <a:solidFill>
+                  <a:schemeClr val="tx1">
+                    <a:tint val="75000"/>
+                  </a:schemeClr>
+                </a:solidFill>
+              </a:defRPr>
             </a:lvl8pPr>
             <a:lvl9pPr marL="3657600" indent="0" algn="ctr">
               <a:buNone/>
-              <a:defRPr sz="1800"/>
+              <a:defRPr>
+                <a:solidFill>
+                  <a:schemeClr val="tx1">
+                    <a:tint val="75000"/>
+                  </a:schemeClr>
+                </a:solidFill>
+              </a:defRPr>
             </a:lvl9pPr>
           </a:lstStyle>
           <a:p>
@@ -291,15 +358,11 @@
         <p:spPr/>
         <p:txBody>
           <a:bodyPr/>
-          <a:lstStyle>
-            <a:lvl1pPr algn="l">
-              <a:defRPr/>
-            </a:lvl1pPr>
-          </a:lstStyle>
+          <a:lstStyle/>
           <a:p>
             <a:fld id="{375FFD08-F7C0-48E6-986B-C0D568938D4A}" type="datetimeFigureOut">
               <a:rPr lang="en-IN" smtClean="0"/>
-              <a:t>24-04-2025</a:t>
+              <a:t>26-04-2025</a:t>
             </a:fld>
             <a:endParaRPr lang="en-IN"/>
           </a:p>
@@ -347,83 +410,10 @@
           </a:p>
         </p:txBody>
       </p:sp>
-      <p:cxnSp>
-        <p:nvCxnSpPr>
-          <p:cNvPr id="13" name="Straight Connector 12"/>
-          <p:cNvCxnSpPr/>
-          <p:nvPr/>
-        </p:nvCxnSpPr>
-        <p:spPr>
-          <a:xfrm flipV="1">
-            <a:off x="8386842" y="5264106"/>
-            <a:ext cx="0" cy="914400"/>
-          </a:xfrm>
-          <a:prstGeom prst="line">
-            <a:avLst/>
-          </a:prstGeom>
-          <a:ln w="19050">
-            <a:solidFill>
-              <a:schemeClr val="accent2"/>
-            </a:solidFill>
-          </a:ln>
-        </p:spPr>
-        <p:style>
-          <a:lnRef idx="1">
-            <a:schemeClr val="accent1"/>
-          </a:lnRef>
-          <a:fillRef idx="0">
-            <a:schemeClr val="accent1"/>
-          </a:fillRef>
-          <a:effectRef idx="0">
-            <a:schemeClr val="accent1"/>
-          </a:effectRef>
-          <a:fontRef idx="minor">
-            <a:schemeClr val="tx1"/>
-          </a:fontRef>
-        </p:style>
-      </p:cxnSp>
-      <p:sp>
-        <p:nvSpPr>
-          <p:cNvPr id="10" name="Rectangle 9"/>
-          <p:cNvSpPr/>
-          <p:nvPr/>
-        </p:nvSpPr>
-        <p:spPr>
-          <a:xfrm>
-            <a:off x="0" y="-1"/>
-            <a:ext cx="12192000" cy="4572001"/>
-          </a:xfrm>
-          <a:prstGeom prst="rect">
-            <a:avLst/>
-          </a:prstGeom>
-          <a:solidFill>
-            <a:schemeClr val="accent2"/>
-          </a:solidFill>
-          <a:ln>
-            <a:noFill/>
-          </a:ln>
-        </p:spPr>
-        <p:style>
-          <a:lnRef idx="2">
-            <a:schemeClr val="accent1">
-              <a:shade val="50000"/>
-            </a:schemeClr>
-          </a:lnRef>
-          <a:fillRef idx="1">
-            <a:schemeClr val="accent1"/>
-          </a:fillRef>
-          <a:effectRef idx="0">
-            <a:schemeClr val="accent1"/>
-          </a:effectRef>
-          <a:fontRef idx="minor">
-            <a:schemeClr val="lt1"/>
-          </a:fontRef>
-        </p:style>
-      </p:sp>
     </p:spTree>
     <p:extLst>
       <p:ext uri="{BB962C8B-B14F-4D97-AF65-F5344CB8AC3E}">
-        <p14:creationId xmlns:p14="http://schemas.microsoft.com/office/powerpoint/2010/main" val="1974550968"/>
+        <p14:creationId xmlns:p14="http://schemas.microsoft.com/office/powerpoint/2010/main" val="785192071"/>
       </p:ext>
     </p:extLst>
   </p:cSld>
@@ -434,6 +424,2113 @@
 </file>
 
 <file path=ppt/slideLayouts/slideLayout10.xml><?xml version="1.0" encoding="utf-8"?>
+<p:sldLayout xmlns:a="http://schemas.openxmlformats.org/drawingml/2006/main" xmlns:r="http://schemas.openxmlformats.org/officeDocument/2006/relationships" xmlns:p="http://schemas.openxmlformats.org/presentationml/2006/main" preserve="1">
+  <p:cSld name="Panoramic Picture with Caption">
+    <p:spTree>
+      <p:nvGrpSpPr>
+        <p:cNvPr id="1" name=""/>
+        <p:cNvGrpSpPr/>
+        <p:nvPr/>
+      </p:nvGrpSpPr>
+      <p:grpSpPr>
+        <a:xfrm>
+          <a:off x="0" y="0"/>
+          <a:ext cx="0" cy="0"/>
+          <a:chOff x="0" y="0"/>
+          <a:chExt cx="0" cy="0"/>
+        </a:xfrm>
+      </p:grpSpPr>
+      <p:sp>
+        <p:nvSpPr>
+          <p:cNvPr id="2" name="Title 1"/>
+          <p:cNvSpPr>
+            <a:spLocks noGrp="1"/>
+          </p:cNvSpPr>
+          <p:nvPr>
+            <p:ph type="title"/>
+          </p:nvPr>
+        </p:nvSpPr>
+        <p:spPr>
+          <a:xfrm>
+            <a:off x="1141413" y="4732865"/>
+            <a:ext cx="9906000" cy="566738"/>
+          </a:xfrm>
+        </p:spPr>
+        <p:txBody>
+          <a:bodyPr anchor="b">
+            <a:normAutofit/>
+          </a:bodyPr>
+          <a:lstStyle>
+            <a:lvl1pPr algn="l">
+              <a:defRPr sz="2400" b="0"/>
+            </a:lvl1pPr>
+          </a:lstStyle>
+          <a:p>
+            <a:r>
+              <a:rPr lang="en-US"/>
+              <a:t>Click to edit Master title style</a:t>
+            </a:r>
+            <a:endParaRPr lang="en-US" dirty="0"/>
+          </a:p>
+        </p:txBody>
+      </p:sp>
+      <p:sp>
+        <p:nvSpPr>
+          <p:cNvPr id="3" name="Picture Placeholder 2"/>
+          <p:cNvSpPr>
+            <a:spLocks noGrp="1" noChangeAspect="1"/>
+          </p:cNvSpPr>
+          <p:nvPr>
+            <p:ph type="pic" idx="1"/>
+          </p:nvPr>
+        </p:nvSpPr>
+        <p:spPr>
+          <a:xfrm>
+            <a:off x="1979612" y="932112"/>
+            <a:ext cx="8225944" cy="3164976"/>
+          </a:xfrm>
+          <a:prstGeom prst="roundRect">
+            <a:avLst>
+              <a:gd name="adj" fmla="val 4380"/>
+            </a:avLst>
+          </a:prstGeom>
+          <a:ln w="38100">
+            <a:gradFill flip="none" rotWithShape="1">
+              <a:gsLst>
+                <a:gs pos="0">
+                  <a:schemeClr val="bg2"/>
+                </a:gs>
+                <a:gs pos="100000">
+                  <a:schemeClr val="bg2">
+                    <a:lumMod val="75000"/>
+                  </a:schemeClr>
+                </a:gs>
+              </a:gsLst>
+              <a:lin ang="5400000" scaled="0"/>
+              <a:tileRect/>
+            </a:gradFill>
+          </a:ln>
+          <a:effectLst>
+            <a:innerShdw blurRad="57150" dist="38100" dir="14460000">
+              <a:srgbClr val="000000">
+                <a:alpha val="70000"/>
+              </a:srgbClr>
+            </a:innerShdw>
+          </a:effectLst>
+        </p:spPr>
+        <p:txBody>
+          <a:bodyPr anchor="t">
+            <a:normAutofit/>
+          </a:bodyPr>
+          <a:lstStyle>
+            <a:lvl1pPr marL="0" indent="0" algn="ctr">
+              <a:buNone/>
+              <a:defRPr sz="1600"/>
+            </a:lvl1pPr>
+            <a:lvl2pPr marL="457200" indent="0">
+              <a:buNone/>
+              <a:defRPr sz="1600"/>
+            </a:lvl2pPr>
+            <a:lvl3pPr marL="914400" indent="0">
+              <a:buNone/>
+              <a:defRPr sz="1600"/>
+            </a:lvl3pPr>
+            <a:lvl4pPr marL="1371600" indent="0">
+              <a:buNone/>
+              <a:defRPr sz="1600"/>
+            </a:lvl4pPr>
+            <a:lvl5pPr marL="1828800" indent="0">
+              <a:buNone/>
+              <a:defRPr sz="1600"/>
+            </a:lvl5pPr>
+            <a:lvl6pPr marL="2286000" indent="0">
+              <a:buNone/>
+              <a:defRPr sz="1600"/>
+            </a:lvl6pPr>
+            <a:lvl7pPr marL="2743200" indent="0">
+              <a:buNone/>
+              <a:defRPr sz="1600"/>
+            </a:lvl7pPr>
+            <a:lvl8pPr marL="3200400" indent="0">
+              <a:buNone/>
+              <a:defRPr sz="1600"/>
+            </a:lvl8pPr>
+            <a:lvl9pPr marL="3657600" indent="0">
+              <a:buNone/>
+              <a:defRPr sz="1600"/>
+            </a:lvl9pPr>
+          </a:lstStyle>
+          <a:p>
+            <a:r>
+              <a:rPr lang="en-US"/>
+              <a:t>Click icon to add picture</a:t>
+            </a:r>
+            <a:endParaRPr lang="en-US" dirty="0"/>
+          </a:p>
+        </p:txBody>
+      </p:sp>
+      <p:sp>
+        <p:nvSpPr>
+          <p:cNvPr id="4" name="Text Placeholder 3"/>
+          <p:cNvSpPr>
+            <a:spLocks noGrp="1"/>
+          </p:cNvSpPr>
+          <p:nvPr>
+            <p:ph type="body" sz="half" idx="2"/>
+          </p:nvPr>
+        </p:nvSpPr>
+        <p:spPr>
+          <a:xfrm>
+            <a:off x="1141413" y="5299603"/>
+            <a:ext cx="9906000" cy="493712"/>
+          </a:xfrm>
+        </p:spPr>
+        <p:txBody>
+          <a:bodyPr>
+            <a:normAutofit/>
+          </a:bodyPr>
+          <a:lstStyle>
+            <a:lvl1pPr marL="0" indent="0">
+              <a:buNone/>
+              <a:defRPr sz="1400"/>
+            </a:lvl1pPr>
+            <a:lvl2pPr marL="457200" indent="0">
+              <a:buNone/>
+              <a:defRPr sz="1200"/>
+            </a:lvl2pPr>
+            <a:lvl3pPr marL="914400" indent="0">
+              <a:buNone/>
+              <a:defRPr sz="1000"/>
+            </a:lvl3pPr>
+            <a:lvl4pPr marL="1371600" indent="0">
+              <a:buNone/>
+              <a:defRPr sz="900"/>
+            </a:lvl4pPr>
+            <a:lvl5pPr marL="1828800" indent="0">
+              <a:buNone/>
+              <a:defRPr sz="900"/>
+            </a:lvl5pPr>
+            <a:lvl6pPr marL="2286000" indent="0">
+              <a:buNone/>
+              <a:defRPr sz="900"/>
+            </a:lvl6pPr>
+            <a:lvl7pPr marL="2743200" indent="0">
+              <a:buNone/>
+              <a:defRPr sz="900"/>
+            </a:lvl7pPr>
+            <a:lvl8pPr marL="3200400" indent="0">
+              <a:buNone/>
+              <a:defRPr sz="900"/>
+            </a:lvl8pPr>
+            <a:lvl9pPr marL="3657600" indent="0">
+              <a:buNone/>
+              <a:defRPr sz="900"/>
+            </a:lvl9pPr>
+          </a:lstStyle>
+          <a:p>
+            <a:pPr lvl="0"/>
+            <a:r>
+              <a:rPr lang="en-US"/>
+              <a:t>Click to edit Master text styles</a:t>
+            </a:r>
+          </a:p>
+        </p:txBody>
+      </p:sp>
+      <p:sp>
+        <p:nvSpPr>
+          <p:cNvPr id="5" name="Date Placeholder 4"/>
+          <p:cNvSpPr>
+            <a:spLocks noGrp="1"/>
+          </p:cNvSpPr>
+          <p:nvPr>
+            <p:ph type="dt" sz="half" idx="10"/>
+          </p:nvPr>
+        </p:nvSpPr>
+        <p:spPr/>
+        <p:txBody>
+          <a:bodyPr/>
+          <a:lstStyle/>
+          <a:p>
+            <a:fld id="{375FFD08-F7C0-48E6-986B-C0D568938D4A}" type="datetimeFigureOut">
+              <a:rPr lang="en-IN" smtClean="0"/>
+              <a:t>26-04-2025</a:t>
+            </a:fld>
+            <a:endParaRPr lang="en-IN"/>
+          </a:p>
+        </p:txBody>
+      </p:sp>
+      <p:sp>
+        <p:nvSpPr>
+          <p:cNvPr id="6" name="Footer Placeholder 5"/>
+          <p:cNvSpPr>
+            <a:spLocks noGrp="1"/>
+          </p:cNvSpPr>
+          <p:nvPr>
+            <p:ph type="ftr" sz="quarter" idx="11"/>
+          </p:nvPr>
+        </p:nvSpPr>
+        <p:spPr/>
+        <p:txBody>
+          <a:bodyPr/>
+          <a:lstStyle/>
+          <a:p>
+            <a:endParaRPr lang="en-IN"/>
+          </a:p>
+        </p:txBody>
+      </p:sp>
+      <p:sp>
+        <p:nvSpPr>
+          <p:cNvPr id="7" name="Slide Number Placeholder 6"/>
+          <p:cNvSpPr>
+            <a:spLocks noGrp="1"/>
+          </p:cNvSpPr>
+          <p:nvPr>
+            <p:ph type="sldNum" sz="quarter" idx="12"/>
+          </p:nvPr>
+        </p:nvSpPr>
+        <p:spPr/>
+        <p:txBody>
+          <a:bodyPr/>
+          <a:lstStyle/>
+          <a:p>
+            <a:fld id="{9E7F237C-1634-4045-B940-CAF030BB862A}" type="slidenum">
+              <a:rPr lang="en-IN" smtClean="0"/>
+              <a:t>‹#›</a:t>
+            </a:fld>
+            <a:endParaRPr lang="en-IN"/>
+          </a:p>
+        </p:txBody>
+      </p:sp>
+    </p:spTree>
+    <p:extLst>
+      <p:ext uri="{BB962C8B-B14F-4D97-AF65-F5344CB8AC3E}">
+        <p14:creationId xmlns:p14="http://schemas.microsoft.com/office/powerpoint/2010/main" val="1938183183"/>
+      </p:ext>
+    </p:extLst>
+  </p:cSld>
+  <p:clrMapOvr>
+    <a:masterClrMapping/>
+  </p:clrMapOvr>
+</p:sldLayout>
+</file>
+
+<file path=ppt/slideLayouts/slideLayout11.xml><?xml version="1.0" encoding="utf-8"?>
+<p:sldLayout xmlns:a="http://schemas.openxmlformats.org/drawingml/2006/main" xmlns:r="http://schemas.openxmlformats.org/officeDocument/2006/relationships" xmlns:p="http://schemas.openxmlformats.org/presentationml/2006/main" preserve="1">
+  <p:cSld name="Title and Caption">
+    <p:spTree>
+      <p:nvGrpSpPr>
+        <p:cNvPr id="1" name=""/>
+        <p:cNvGrpSpPr/>
+        <p:nvPr/>
+      </p:nvGrpSpPr>
+      <p:grpSpPr>
+        <a:xfrm>
+          <a:off x="0" y="0"/>
+          <a:ext cx="0" cy="0"/>
+          <a:chOff x="0" y="0"/>
+          <a:chExt cx="0" cy="0"/>
+        </a:xfrm>
+      </p:grpSpPr>
+      <p:sp>
+        <p:nvSpPr>
+          <p:cNvPr id="2" name="Title 1"/>
+          <p:cNvSpPr>
+            <a:spLocks noGrp="1"/>
+          </p:cNvSpPr>
+          <p:nvPr>
+            <p:ph type="title"/>
+          </p:nvPr>
+        </p:nvSpPr>
+        <p:spPr>
+          <a:xfrm>
+            <a:off x="1141412" y="609601"/>
+            <a:ext cx="9905999" cy="3124199"/>
+          </a:xfrm>
+        </p:spPr>
+        <p:txBody>
+          <a:bodyPr anchor="ctr">
+            <a:normAutofit/>
+          </a:bodyPr>
+          <a:lstStyle>
+            <a:lvl1pPr algn="l">
+              <a:defRPr sz="3200" b="0" cap="all"/>
+            </a:lvl1pPr>
+          </a:lstStyle>
+          <a:p>
+            <a:r>
+              <a:rPr lang="en-US"/>
+              <a:t>Click to edit Master title style</a:t>
+            </a:r>
+            <a:endParaRPr lang="en-US" dirty="0"/>
+          </a:p>
+        </p:txBody>
+      </p:sp>
+      <p:sp>
+        <p:nvSpPr>
+          <p:cNvPr id="3" name="Text Placeholder 2"/>
+          <p:cNvSpPr>
+            <a:spLocks noGrp="1"/>
+          </p:cNvSpPr>
+          <p:nvPr>
+            <p:ph type="body" idx="1"/>
+          </p:nvPr>
+        </p:nvSpPr>
+        <p:spPr>
+          <a:xfrm>
+            <a:off x="1141411" y="4343400"/>
+            <a:ext cx="9906000" cy="1447800"/>
+          </a:xfrm>
+        </p:spPr>
+        <p:txBody>
+          <a:bodyPr anchor="ctr">
+            <a:normAutofit/>
+          </a:bodyPr>
+          <a:lstStyle>
+            <a:lvl1pPr marL="0" indent="0" algn="l">
+              <a:buNone/>
+              <a:defRPr sz="2000">
+                <a:gradFill flip="none" rotWithShape="1">
+                  <a:gsLst>
+                    <a:gs pos="0">
+                      <a:schemeClr val="tx1"/>
+                    </a:gs>
+                    <a:gs pos="100000">
+                      <a:schemeClr val="tx1">
+                        <a:lumMod val="75000"/>
+                      </a:schemeClr>
+                    </a:gs>
+                  </a:gsLst>
+                  <a:lin ang="5400000" scaled="0"/>
+                  <a:tileRect/>
+                </a:gradFill>
+              </a:defRPr>
+            </a:lvl1pPr>
+            <a:lvl2pPr marL="457200" indent="0">
+              <a:buNone/>
+              <a:defRPr sz="1800">
+                <a:solidFill>
+                  <a:schemeClr val="tx1">
+                    <a:tint val="75000"/>
+                  </a:schemeClr>
+                </a:solidFill>
+              </a:defRPr>
+            </a:lvl2pPr>
+            <a:lvl3pPr marL="914400" indent="0">
+              <a:buNone/>
+              <a:defRPr sz="1600">
+                <a:solidFill>
+                  <a:schemeClr val="tx1">
+                    <a:tint val="75000"/>
+                  </a:schemeClr>
+                </a:solidFill>
+              </a:defRPr>
+            </a:lvl3pPr>
+            <a:lvl4pPr marL="1371600" indent="0">
+              <a:buNone/>
+              <a:defRPr sz="1400">
+                <a:solidFill>
+                  <a:schemeClr val="tx1">
+                    <a:tint val="75000"/>
+                  </a:schemeClr>
+                </a:solidFill>
+              </a:defRPr>
+            </a:lvl4pPr>
+            <a:lvl5pPr marL="1828800" indent="0">
+              <a:buNone/>
+              <a:defRPr sz="1400">
+                <a:solidFill>
+                  <a:schemeClr val="tx1">
+                    <a:tint val="75000"/>
+                  </a:schemeClr>
+                </a:solidFill>
+              </a:defRPr>
+            </a:lvl5pPr>
+            <a:lvl6pPr marL="2286000" indent="0">
+              <a:buNone/>
+              <a:defRPr sz="1400">
+                <a:solidFill>
+                  <a:schemeClr val="tx1">
+                    <a:tint val="75000"/>
+                  </a:schemeClr>
+                </a:solidFill>
+              </a:defRPr>
+            </a:lvl6pPr>
+            <a:lvl7pPr marL="2743200" indent="0">
+              <a:buNone/>
+              <a:defRPr sz="1400">
+                <a:solidFill>
+                  <a:schemeClr val="tx1">
+                    <a:tint val="75000"/>
+                  </a:schemeClr>
+                </a:solidFill>
+              </a:defRPr>
+            </a:lvl7pPr>
+            <a:lvl8pPr marL="3200400" indent="0">
+              <a:buNone/>
+              <a:defRPr sz="1400">
+                <a:solidFill>
+                  <a:schemeClr val="tx1">
+                    <a:tint val="75000"/>
+                  </a:schemeClr>
+                </a:solidFill>
+              </a:defRPr>
+            </a:lvl8pPr>
+            <a:lvl9pPr marL="3657600" indent="0">
+              <a:buNone/>
+              <a:defRPr sz="1400">
+                <a:solidFill>
+                  <a:schemeClr val="tx1">
+                    <a:tint val="75000"/>
+                  </a:schemeClr>
+                </a:solidFill>
+              </a:defRPr>
+            </a:lvl9pPr>
+          </a:lstStyle>
+          <a:p>
+            <a:pPr lvl="0"/>
+            <a:r>
+              <a:rPr lang="en-US"/>
+              <a:t>Click to edit Master text styles</a:t>
+            </a:r>
+          </a:p>
+        </p:txBody>
+      </p:sp>
+      <p:sp>
+        <p:nvSpPr>
+          <p:cNvPr id="4" name="Date Placeholder 3"/>
+          <p:cNvSpPr>
+            <a:spLocks noGrp="1"/>
+          </p:cNvSpPr>
+          <p:nvPr>
+            <p:ph type="dt" sz="half" idx="10"/>
+          </p:nvPr>
+        </p:nvSpPr>
+        <p:spPr/>
+        <p:txBody>
+          <a:bodyPr/>
+          <a:lstStyle/>
+          <a:p>
+            <a:fld id="{375FFD08-F7C0-48E6-986B-C0D568938D4A}" type="datetimeFigureOut">
+              <a:rPr lang="en-IN" smtClean="0"/>
+              <a:t>26-04-2025</a:t>
+            </a:fld>
+            <a:endParaRPr lang="en-IN"/>
+          </a:p>
+        </p:txBody>
+      </p:sp>
+      <p:sp>
+        <p:nvSpPr>
+          <p:cNvPr id="5" name="Footer Placeholder 4"/>
+          <p:cNvSpPr>
+            <a:spLocks noGrp="1"/>
+          </p:cNvSpPr>
+          <p:nvPr>
+            <p:ph type="ftr" sz="quarter" idx="11"/>
+          </p:nvPr>
+        </p:nvSpPr>
+        <p:spPr/>
+        <p:txBody>
+          <a:bodyPr/>
+          <a:lstStyle/>
+          <a:p>
+            <a:endParaRPr lang="en-IN"/>
+          </a:p>
+        </p:txBody>
+      </p:sp>
+      <p:sp>
+        <p:nvSpPr>
+          <p:cNvPr id="6" name="Slide Number Placeholder 5"/>
+          <p:cNvSpPr>
+            <a:spLocks noGrp="1"/>
+          </p:cNvSpPr>
+          <p:nvPr>
+            <p:ph type="sldNum" sz="quarter" idx="12"/>
+          </p:nvPr>
+        </p:nvSpPr>
+        <p:spPr/>
+        <p:txBody>
+          <a:bodyPr/>
+          <a:lstStyle/>
+          <a:p>
+            <a:fld id="{9E7F237C-1634-4045-B940-CAF030BB862A}" type="slidenum">
+              <a:rPr lang="en-IN" smtClean="0"/>
+              <a:t>‹#›</a:t>
+            </a:fld>
+            <a:endParaRPr lang="en-IN"/>
+          </a:p>
+        </p:txBody>
+      </p:sp>
+    </p:spTree>
+    <p:extLst>
+      <p:ext uri="{BB962C8B-B14F-4D97-AF65-F5344CB8AC3E}">
+        <p14:creationId xmlns:p14="http://schemas.microsoft.com/office/powerpoint/2010/main" val="2243081816"/>
+      </p:ext>
+    </p:extLst>
+  </p:cSld>
+  <p:clrMapOvr>
+    <a:masterClrMapping/>
+  </p:clrMapOvr>
+</p:sldLayout>
+</file>
+
+<file path=ppt/slideLayouts/slideLayout12.xml><?xml version="1.0" encoding="utf-8"?>
+<p:sldLayout xmlns:a="http://schemas.openxmlformats.org/drawingml/2006/main" xmlns:r="http://schemas.openxmlformats.org/officeDocument/2006/relationships" xmlns:p="http://schemas.openxmlformats.org/presentationml/2006/main" preserve="1">
+  <p:cSld name="Quote with Caption">
+    <p:spTree>
+      <p:nvGrpSpPr>
+        <p:cNvPr id="1" name=""/>
+        <p:cNvGrpSpPr/>
+        <p:nvPr/>
+      </p:nvGrpSpPr>
+      <p:grpSpPr>
+        <a:xfrm>
+          <a:off x="0" y="0"/>
+          <a:ext cx="0" cy="0"/>
+          <a:chOff x="0" y="0"/>
+          <a:chExt cx="0" cy="0"/>
+        </a:xfrm>
+      </p:grpSpPr>
+      <p:sp>
+        <p:nvSpPr>
+          <p:cNvPr id="14" name="TextBox 13"/>
+          <p:cNvSpPr txBox="1"/>
+          <p:nvPr/>
+        </p:nvSpPr>
+        <p:spPr>
+          <a:xfrm>
+            <a:off x="836612" y="786824"/>
+            <a:ext cx="609600" cy="584776"/>
+          </a:xfrm>
+          <a:prstGeom prst="rect">
+            <a:avLst/>
+          </a:prstGeom>
+        </p:spPr>
+        <p:txBody>
+          <a:bodyPr vert="horz" lIns="91440" tIns="45720" rIns="91440" bIns="45720" rtlCol="0" anchor="ctr">
+            <a:noAutofit/>
+          </a:bodyPr>
+          <a:lstStyle>
+            <a:lvl1pPr>
+              <a:spcBef>
+                <a:spcPct val="0"/>
+              </a:spcBef>
+              <a:buNone/>
+              <a:defRPr sz="3200" b="0" cap="all">
+                <a:ln w="3175" cmpd="sng">
+                  <a:noFill/>
+                </a:ln>
+                <a:effectLst>
+                  <a:glow rad="38100">
+                    <a:schemeClr val="bg1">
+                      <a:lumMod val="65000"/>
+                      <a:lumOff val="35000"/>
+                      <a:alpha val="40000"/>
+                    </a:schemeClr>
+                  </a:glow>
+                  <a:outerShdw blurRad="28575" dist="38100" dir="14040000" algn="tl" rotWithShape="0">
+                    <a:srgbClr val="000000">
+                      <a:alpha val="25000"/>
+                    </a:srgbClr>
+                  </a:outerShdw>
+                </a:effectLst>
+              </a:defRPr>
+            </a:lvl1pPr>
+            <a:lvl2pPr>
+              <a:defRPr>
+                <a:solidFill>
+                  <a:schemeClr val="tx2"/>
+                </a:solidFill>
+              </a:defRPr>
+            </a:lvl2pPr>
+            <a:lvl3pPr>
+              <a:defRPr>
+                <a:solidFill>
+                  <a:schemeClr val="tx2"/>
+                </a:solidFill>
+              </a:defRPr>
+            </a:lvl3pPr>
+            <a:lvl4pPr>
+              <a:defRPr>
+                <a:solidFill>
+                  <a:schemeClr val="tx2"/>
+                </a:solidFill>
+              </a:defRPr>
+            </a:lvl4pPr>
+            <a:lvl5pPr>
+              <a:defRPr>
+                <a:solidFill>
+                  <a:schemeClr val="tx2"/>
+                </a:solidFill>
+              </a:defRPr>
+            </a:lvl5pPr>
+            <a:lvl6pPr>
+              <a:defRPr>
+                <a:solidFill>
+                  <a:schemeClr val="tx2"/>
+                </a:solidFill>
+              </a:defRPr>
+            </a:lvl6pPr>
+            <a:lvl7pPr>
+              <a:defRPr>
+                <a:solidFill>
+                  <a:schemeClr val="tx2"/>
+                </a:solidFill>
+              </a:defRPr>
+            </a:lvl7pPr>
+            <a:lvl8pPr>
+              <a:defRPr>
+                <a:solidFill>
+                  <a:schemeClr val="tx2"/>
+                </a:solidFill>
+              </a:defRPr>
+            </a:lvl8pPr>
+            <a:lvl9pPr>
+              <a:defRPr>
+                <a:solidFill>
+                  <a:schemeClr val="tx2"/>
+                </a:solidFill>
+              </a:defRPr>
+            </a:lvl9pPr>
+          </a:lstStyle>
+          <a:p>
+            <a:pPr lvl="0"/>
+            <a:r>
+              <a:rPr lang="en-US" sz="8000" dirty="0">
+                <a:solidFill>
+                  <a:schemeClr val="accent1"/>
+                </a:solidFill>
+              </a:rPr>
+              <a:t>“</a:t>
+            </a:r>
+          </a:p>
+        </p:txBody>
+      </p:sp>
+      <p:sp>
+        <p:nvSpPr>
+          <p:cNvPr id="15" name="TextBox 14"/>
+          <p:cNvSpPr txBox="1"/>
+          <p:nvPr/>
+        </p:nvSpPr>
+        <p:spPr>
+          <a:xfrm>
+            <a:off x="10437812" y="2743200"/>
+            <a:ext cx="609600" cy="584776"/>
+          </a:xfrm>
+          <a:prstGeom prst="rect">
+            <a:avLst/>
+          </a:prstGeom>
+        </p:spPr>
+        <p:txBody>
+          <a:bodyPr vert="horz" lIns="91440" tIns="45720" rIns="91440" bIns="45720" rtlCol="0" anchor="ctr">
+            <a:noAutofit/>
+          </a:bodyPr>
+          <a:lstStyle>
+            <a:lvl1pPr>
+              <a:spcBef>
+                <a:spcPct val="0"/>
+              </a:spcBef>
+              <a:buNone/>
+              <a:defRPr sz="3200" b="0" cap="all">
+                <a:ln w="3175" cmpd="sng">
+                  <a:noFill/>
+                </a:ln>
+                <a:effectLst>
+                  <a:glow rad="38100">
+                    <a:schemeClr val="bg1">
+                      <a:lumMod val="65000"/>
+                      <a:lumOff val="35000"/>
+                      <a:alpha val="40000"/>
+                    </a:schemeClr>
+                  </a:glow>
+                  <a:outerShdw blurRad="28575" dist="38100" dir="14040000" algn="tl" rotWithShape="0">
+                    <a:srgbClr val="000000">
+                      <a:alpha val="25000"/>
+                    </a:srgbClr>
+                  </a:outerShdw>
+                </a:effectLst>
+              </a:defRPr>
+            </a:lvl1pPr>
+            <a:lvl2pPr>
+              <a:defRPr>
+                <a:solidFill>
+                  <a:schemeClr val="tx2"/>
+                </a:solidFill>
+              </a:defRPr>
+            </a:lvl2pPr>
+            <a:lvl3pPr>
+              <a:defRPr>
+                <a:solidFill>
+                  <a:schemeClr val="tx2"/>
+                </a:solidFill>
+              </a:defRPr>
+            </a:lvl3pPr>
+            <a:lvl4pPr>
+              <a:defRPr>
+                <a:solidFill>
+                  <a:schemeClr val="tx2"/>
+                </a:solidFill>
+              </a:defRPr>
+            </a:lvl4pPr>
+            <a:lvl5pPr>
+              <a:defRPr>
+                <a:solidFill>
+                  <a:schemeClr val="tx2"/>
+                </a:solidFill>
+              </a:defRPr>
+            </a:lvl5pPr>
+            <a:lvl6pPr>
+              <a:defRPr>
+                <a:solidFill>
+                  <a:schemeClr val="tx2"/>
+                </a:solidFill>
+              </a:defRPr>
+            </a:lvl6pPr>
+            <a:lvl7pPr>
+              <a:defRPr>
+                <a:solidFill>
+                  <a:schemeClr val="tx2"/>
+                </a:solidFill>
+              </a:defRPr>
+            </a:lvl7pPr>
+            <a:lvl8pPr>
+              <a:defRPr>
+                <a:solidFill>
+                  <a:schemeClr val="tx2"/>
+                </a:solidFill>
+              </a:defRPr>
+            </a:lvl8pPr>
+            <a:lvl9pPr>
+              <a:defRPr>
+                <a:solidFill>
+                  <a:schemeClr val="tx2"/>
+                </a:solidFill>
+              </a:defRPr>
+            </a:lvl9pPr>
+          </a:lstStyle>
+          <a:p>
+            <a:pPr lvl="0" algn="r"/>
+            <a:r>
+              <a:rPr lang="en-US" sz="8000" dirty="0">
+                <a:solidFill>
+                  <a:schemeClr val="accent1"/>
+                </a:solidFill>
+              </a:rPr>
+              <a:t>”</a:t>
+            </a:r>
+          </a:p>
+        </p:txBody>
+      </p:sp>
+      <p:sp>
+        <p:nvSpPr>
+          <p:cNvPr id="2" name="Title 1"/>
+          <p:cNvSpPr>
+            <a:spLocks noGrp="1"/>
+          </p:cNvSpPr>
+          <p:nvPr>
+            <p:ph type="title"/>
+          </p:nvPr>
+        </p:nvSpPr>
+        <p:spPr>
+          <a:xfrm>
+            <a:off x="1446213" y="609601"/>
+            <a:ext cx="9296398" cy="2743199"/>
+          </a:xfrm>
+        </p:spPr>
+        <p:txBody>
+          <a:bodyPr anchor="ctr">
+            <a:normAutofit/>
+          </a:bodyPr>
+          <a:lstStyle>
+            <a:lvl1pPr algn="l">
+              <a:defRPr sz="3200" b="0" cap="all">
+                <a:solidFill>
+                  <a:schemeClr val="tx1"/>
+                </a:solidFill>
+              </a:defRPr>
+            </a:lvl1pPr>
+          </a:lstStyle>
+          <a:p>
+            <a:r>
+              <a:rPr lang="en-US"/>
+              <a:t>Click to edit Master title style</a:t>
+            </a:r>
+            <a:endParaRPr lang="en-US" dirty="0"/>
+          </a:p>
+        </p:txBody>
+      </p:sp>
+      <p:sp>
+        <p:nvSpPr>
+          <p:cNvPr id="10" name="Text Placeholder 9"/>
+          <p:cNvSpPr>
+            <a:spLocks noGrp="1"/>
+          </p:cNvSpPr>
+          <p:nvPr>
+            <p:ph type="body" sz="quarter" idx="13"/>
+          </p:nvPr>
+        </p:nvSpPr>
+        <p:spPr>
+          <a:xfrm>
+            <a:off x="1674812" y="3352800"/>
+            <a:ext cx="8839202" cy="381000"/>
+          </a:xfrm>
+        </p:spPr>
+        <p:txBody>
+          <a:bodyPr anchor="ctr"/>
+          <a:lstStyle>
+            <a:lvl1pPr marL="0" indent="0">
+              <a:buFontTx/>
+              <a:buNone/>
+              <a:defRPr/>
+            </a:lvl1pPr>
+            <a:lvl2pPr marL="457200" indent="0">
+              <a:buFontTx/>
+              <a:buNone/>
+              <a:defRPr/>
+            </a:lvl2pPr>
+            <a:lvl3pPr marL="914400" indent="0">
+              <a:buFontTx/>
+              <a:buNone/>
+              <a:defRPr/>
+            </a:lvl3pPr>
+            <a:lvl4pPr marL="1371600" indent="0">
+              <a:buFontTx/>
+              <a:buNone/>
+              <a:defRPr/>
+            </a:lvl4pPr>
+            <a:lvl5pPr marL="1828800" indent="0">
+              <a:buFontTx/>
+              <a:buNone/>
+              <a:defRPr/>
+            </a:lvl5pPr>
+          </a:lstStyle>
+          <a:p>
+            <a:pPr lvl="0"/>
+            <a:r>
+              <a:rPr lang="en-US"/>
+              <a:t>Click to edit Master text styles</a:t>
+            </a:r>
+          </a:p>
+        </p:txBody>
+      </p:sp>
+      <p:sp>
+        <p:nvSpPr>
+          <p:cNvPr id="3" name="Text Placeholder 2"/>
+          <p:cNvSpPr>
+            <a:spLocks noGrp="1"/>
+          </p:cNvSpPr>
+          <p:nvPr>
+            <p:ph type="body" idx="1"/>
+          </p:nvPr>
+        </p:nvSpPr>
+        <p:spPr>
+          <a:xfrm>
+            <a:off x="1141411" y="4343400"/>
+            <a:ext cx="9906000" cy="1447800"/>
+          </a:xfrm>
+        </p:spPr>
+        <p:txBody>
+          <a:bodyPr vert="horz" lIns="91440" tIns="45720" rIns="91440" bIns="45720" rtlCol="0" anchor="ctr">
+            <a:normAutofit/>
+          </a:bodyPr>
+          <a:lstStyle>
+            <a:lvl1pPr>
+              <a:buNone/>
+              <a:defRPr lang="en-US" sz="2000">
+                <a:gradFill flip="none" rotWithShape="1">
+                  <a:gsLst>
+                    <a:gs pos="0">
+                      <a:schemeClr val="tx1"/>
+                    </a:gs>
+                    <a:gs pos="100000">
+                      <a:schemeClr val="tx1">
+                        <a:lumMod val="75000"/>
+                      </a:schemeClr>
+                    </a:gs>
+                  </a:gsLst>
+                  <a:lin ang="5400000" scaled="0"/>
+                  <a:tileRect/>
+                </a:gradFill>
+              </a:defRPr>
+            </a:lvl1pPr>
+          </a:lstStyle>
+          <a:p>
+            <a:pPr marL="0" lvl="0" indent="0">
+              <a:buNone/>
+            </a:pPr>
+            <a:r>
+              <a:rPr lang="en-US"/>
+              <a:t>Click to edit Master text styles</a:t>
+            </a:r>
+          </a:p>
+        </p:txBody>
+      </p:sp>
+      <p:sp>
+        <p:nvSpPr>
+          <p:cNvPr id="4" name="Date Placeholder 3"/>
+          <p:cNvSpPr>
+            <a:spLocks noGrp="1"/>
+          </p:cNvSpPr>
+          <p:nvPr>
+            <p:ph type="dt" sz="half" idx="10"/>
+          </p:nvPr>
+        </p:nvSpPr>
+        <p:spPr/>
+        <p:txBody>
+          <a:bodyPr/>
+          <a:lstStyle/>
+          <a:p>
+            <a:fld id="{375FFD08-F7C0-48E6-986B-C0D568938D4A}" type="datetimeFigureOut">
+              <a:rPr lang="en-IN" smtClean="0"/>
+              <a:t>26-04-2025</a:t>
+            </a:fld>
+            <a:endParaRPr lang="en-IN"/>
+          </a:p>
+        </p:txBody>
+      </p:sp>
+      <p:sp>
+        <p:nvSpPr>
+          <p:cNvPr id="5" name="Footer Placeholder 4"/>
+          <p:cNvSpPr>
+            <a:spLocks noGrp="1"/>
+          </p:cNvSpPr>
+          <p:nvPr>
+            <p:ph type="ftr" sz="quarter" idx="11"/>
+          </p:nvPr>
+        </p:nvSpPr>
+        <p:spPr/>
+        <p:txBody>
+          <a:bodyPr/>
+          <a:lstStyle/>
+          <a:p>
+            <a:endParaRPr lang="en-IN"/>
+          </a:p>
+        </p:txBody>
+      </p:sp>
+      <p:sp>
+        <p:nvSpPr>
+          <p:cNvPr id="6" name="Slide Number Placeholder 5"/>
+          <p:cNvSpPr>
+            <a:spLocks noGrp="1"/>
+          </p:cNvSpPr>
+          <p:nvPr>
+            <p:ph type="sldNum" sz="quarter" idx="12"/>
+          </p:nvPr>
+        </p:nvSpPr>
+        <p:spPr/>
+        <p:txBody>
+          <a:bodyPr/>
+          <a:lstStyle/>
+          <a:p>
+            <a:fld id="{9E7F237C-1634-4045-B940-CAF030BB862A}" type="slidenum">
+              <a:rPr lang="en-IN" smtClean="0"/>
+              <a:t>‹#›</a:t>
+            </a:fld>
+            <a:endParaRPr lang="en-IN"/>
+          </a:p>
+        </p:txBody>
+      </p:sp>
+    </p:spTree>
+    <p:extLst>
+      <p:ext uri="{BB962C8B-B14F-4D97-AF65-F5344CB8AC3E}">
+        <p14:creationId xmlns:p14="http://schemas.microsoft.com/office/powerpoint/2010/main" val="1084576762"/>
+      </p:ext>
+    </p:extLst>
+  </p:cSld>
+  <p:clrMapOvr>
+    <a:masterClrMapping/>
+  </p:clrMapOvr>
+</p:sldLayout>
+</file>
+
+<file path=ppt/slideLayouts/slideLayout13.xml><?xml version="1.0" encoding="utf-8"?>
+<p:sldLayout xmlns:a="http://schemas.openxmlformats.org/drawingml/2006/main" xmlns:r="http://schemas.openxmlformats.org/officeDocument/2006/relationships" xmlns:p="http://schemas.openxmlformats.org/presentationml/2006/main" preserve="1">
+  <p:cSld name="Name Card">
+    <p:spTree>
+      <p:nvGrpSpPr>
+        <p:cNvPr id="1" name=""/>
+        <p:cNvGrpSpPr/>
+        <p:nvPr/>
+      </p:nvGrpSpPr>
+      <p:grpSpPr>
+        <a:xfrm>
+          <a:off x="0" y="0"/>
+          <a:ext cx="0" cy="0"/>
+          <a:chOff x="0" y="0"/>
+          <a:chExt cx="0" cy="0"/>
+        </a:xfrm>
+      </p:grpSpPr>
+      <p:sp>
+        <p:nvSpPr>
+          <p:cNvPr id="2" name="Title 1"/>
+          <p:cNvSpPr>
+            <a:spLocks noGrp="1"/>
+          </p:cNvSpPr>
+          <p:nvPr>
+            <p:ph type="title"/>
+          </p:nvPr>
+        </p:nvSpPr>
+        <p:spPr>
+          <a:xfrm>
+            <a:off x="1141412" y="3308581"/>
+            <a:ext cx="9906000" cy="1468800"/>
+          </a:xfrm>
+        </p:spPr>
+        <p:txBody>
+          <a:bodyPr anchor="b">
+            <a:normAutofit/>
+          </a:bodyPr>
+          <a:lstStyle>
+            <a:lvl1pPr algn="l">
+              <a:defRPr sz="3200" b="0" cap="all"/>
+            </a:lvl1pPr>
+          </a:lstStyle>
+          <a:p>
+            <a:r>
+              <a:rPr lang="en-US"/>
+              <a:t>Click to edit Master title style</a:t>
+            </a:r>
+            <a:endParaRPr lang="en-US" dirty="0"/>
+          </a:p>
+        </p:txBody>
+      </p:sp>
+      <p:sp>
+        <p:nvSpPr>
+          <p:cNvPr id="3" name="Text Placeholder 2"/>
+          <p:cNvSpPr>
+            <a:spLocks noGrp="1"/>
+          </p:cNvSpPr>
+          <p:nvPr>
+            <p:ph type="body" idx="1"/>
+          </p:nvPr>
+        </p:nvSpPr>
+        <p:spPr>
+          <a:xfrm>
+            <a:off x="1141410" y="4777381"/>
+            <a:ext cx="9906001" cy="860400"/>
+          </a:xfrm>
+        </p:spPr>
+        <p:txBody>
+          <a:bodyPr vert="horz" lIns="91440" tIns="45720" rIns="91440" bIns="45720" rtlCol="0" anchor="t">
+            <a:normAutofit/>
+          </a:bodyPr>
+          <a:lstStyle>
+            <a:lvl1pPr>
+              <a:defRPr lang="en-US" sz="2000">
+                <a:gradFill flip="none" rotWithShape="1">
+                  <a:gsLst>
+                    <a:gs pos="0">
+                      <a:schemeClr val="tx1"/>
+                    </a:gs>
+                    <a:gs pos="100000">
+                      <a:schemeClr val="tx1">
+                        <a:lumMod val="75000"/>
+                      </a:schemeClr>
+                    </a:gs>
+                  </a:gsLst>
+                  <a:lin ang="5400000" scaled="0"/>
+                  <a:tileRect/>
+                </a:gradFill>
+              </a:defRPr>
+            </a:lvl1pPr>
+          </a:lstStyle>
+          <a:p>
+            <a:pPr marL="0" lvl="0" indent="0">
+              <a:buNone/>
+            </a:pPr>
+            <a:r>
+              <a:rPr lang="en-US"/>
+              <a:t>Click to edit Master text styles</a:t>
+            </a:r>
+          </a:p>
+        </p:txBody>
+      </p:sp>
+      <p:sp>
+        <p:nvSpPr>
+          <p:cNvPr id="4" name="Date Placeholder 3"/>
+          <p:cNvSpPr>
+            <a:spLocks noGrp="1"/>
+          </p:cNvSpPr>
+          <p:nvPr>
+            <p:ph type="dt" sz="half" idx="10"/>
+          </p:nvPr>
+        </p:nvSpPr>
+        <p:spPr/>
+        <p:txBody>
+          <a:bodyPr/>
+          <a:lstStyle/>
+          <a:p>
+            <a:fld id="{375FFD08-F7C0-48E6-986B-C0D568938D4A}" type="datetimeFigureOut">
+              <a:rPr lang="en-IN" smtClean="0"/>
+              <a:t>26-04-2025</a:t>
+            </a:fld>
+            <a:endParaRPr lang="en-IN"/>
+          </a:p>
+        </p:txBody>
+      </p:sp>
+      <p:sp>
+        <p:nvSpPr>
+          <p:cNvPr id="5" name="Footer Placeholder 4"/>
+          <p:cNvSpPr>
+            <a:spLocks noGrp="1"/>
+          </p:cNvSpPr>
+          <p:nvPr>
+            <p:ph type="ftr" sz="quarter" idx="11"/>
+          </p:nvPr>
+        </p:nvSpPr>
+        <p:spPr/>
+        <p:txBody>
+          <a:bodyPr/>
+          <a:lstStyle/>
+          <a:p>
+            <a:endParaRPr lang="en-IN"/>
+          </a:p>
+        </p:txBody>
+      </p:sp>
+      <p:sp>
+        <p:nvSpPr>
+          <p:cNvPr id="6" name="Slide Number Placeholder 5"/>
+          <p:cNvSpPr>
+            <a:spLocks noGrp="1"/>
+          </p:cNvSpPr>
+          <p:nvPr>
+            <p:ph type="sldNum" sz="quarter" idx="12"/>
+          </p:nvPr>
+        </p:nvSpPr>
+        <p:spPr/>
+        <p:txBody>
+          <a:bodyPr/>
+          <a:lstStyle/>
+          <a:p>
+            <a:fld id="{9E7F237C-1634-4045-B940-CAF030BB862A}" type="slidenum">
+              <a:rPr lang="en-IN" smtClean="0"/>
+              <a:t>‹#›</a:t>
+            </a:fld>
+            <a:endParaRPr lang="en-IN"/>
+          </a:p>
+        </p:txBody>
+      </p:sp>
+    </p:spTree>
+    <p:extLst>
+      <p:ext uri="{BB962C8B-B14F-4D97-AF65-F5344CB8AC3E}">
+        <p14:creationId xmlns:p14="http://schemas.microsoft.com/office/powerpoint/2010/main" val="1321458297"/>
+      </p:ext>
+    </p:extLst>
+  </p:cSld>
+  <p:clrMapOvr>
+    <a:masterClrMapping/>
+  </p:clrMapOvr>
+</p:sldLayout>
+</file>
+
+<file path=ppt/slideLayouts/slideLayout14.xml><?xml version="1.0" encoding="utf-8"?>
+<p:sldLayout xmlns:a="http://schemas.openxmlformats.org/drawingml/2006/main" xmlns:r="http://schemas.openxmlformats.org/officeDocument/2006/relationships" xmlns:p="http://schemas.openxmlformats.org/presentationml/2006/main" preserve="1">
+  <p:cSld name="Quote Name Card">
+    <p:spTree>
+      <p:nvGrpSpPr>
+        <p:cNvPr id="1" name=""/>
+        <p:cNvGrpSpPr/>
+        <p:nvPr/>
+      </p:nvGrpSpPr>
+      <p:grpSpPr>
+        <a:xfrm>
+          <a:off x="0" y="0"/>
+          <a:ext cx="0" cy="0"/>
+          <a:chOff x="0" y="0"/>
+          <a:chExt cx="0" cy="0"/>
+        </a:xfrm>
+      </p:grpSpPr>
+      <p:sp>
+        <p:nvSpPr>
+          <p:cNvPr id="14" name="TextBox 13"/>
+          <p:cNvSpPr txBox="1"/>
+          <p:nvPr/>
+        </p:nvSpPr>
+        <p:spPr>
+          <a:xfrm>
+            <a:off x="836612" y="786824"/>
+            <a:ext cx="609600" cy="584776"/>
+          </a:xfrm>
+          <a:prstGeom prst="rect">
+            <a:avLst/>
+          </a:prstGeom>
+        </p:spPr>
+        <p:txBody>
+          <a:bodyPr vert="horz" lIns="91440" tIns="45720" rIns="91440" bIns="45720" rtlCol="0" anchor="ctr">
+            <a:noAutofit/>
+          </a:bodyPr>
+          <a:lstStyle>
+            <a:lvl1pPr>
+              <a:spcBef>
+                <a:spcPct val="0"/>
+              </a:spcBef>
+              <a:buNone/>
+              <a:defRPr sz="3200" b="0" cap="all">
+                <a:ln w="3175" cmpd="sng">
+                  <a:noFill/>
+                </a:ln>
+                <a:effectLst>
+                  <a:glow rad="38100">
+                    <a:schemeClr val="bg1">
+                      <a:lumMod val="65000"/>
+                      <a:lumOff val="35000"/>
+                      <a:alpha val="40000"/>
+                    </a:schemeClr>
+                  </a:glow>
+                  <a:outerShdw blurRad="28575" dist="38100" dir="14040000" algn="tl" rotWithShape="0">
+                    <a:srgbClr val="000000">
+                      <a:alpha val="25000"/>
+                    </a:srgbClr>
+                  </a:outerShdw>
+                </a:effectLst>
+              </a:defRPr>
+            </a:lvl1pPr>
+            <a:lvl2pPr>
+              <a:defRPr>
+                <a:solidFill>
+                  <a:schemeClr val="tx2"/>
+                </a:solidFill>
+              </a:defRPr>
+            </a:lvl2pPr>
+            <a:lvl3pPr>
+              <a:defRPr>
+                <a:solidFill>
+                  <a:schemeClr val="tx2"/>
+                </a:solidFill>
+              </a:defRPr>
+            </a:lvl3pPr>
+            <a:lvl4pPr>
+              <a:defRPr>
+                <a:solidFill>
+                  <a:schemeClr val="tx2"/>
+                </a:solidFill>
+              </a:defRPr>
+            </a:lvl4pPr>
+            <a:lvl5pPr>
+              <a:defRPr>
+                <a:solidFill>
+                  <a:schemeClr val="tx2"/>
+                </a:solidFill>
+              </a:defRPr>
+            </a:lvl5pPr>
+            <a:lvl6pPr>
+              <a:defRPr>
+                <a:solidFill>
+                  <a:schemeClr val="tx2"/>
+                </a:solidFill>
+              </a:defRPr>
+            </a:lvl6pPr>
+            <a:lvl7pPr>
+              <a:defRPr>
+                <a:solidFill>
+                  <a:schemeClr val="tx2"/>
+                </a:solidFill>
+              </a:defRPr>
+            </a:lvl7pPr>
+            <a:lvl8pPr>
+              <a:defRPr>
+                <a:solidFill>
+                  <a:schemeClr val="tx2"/>
+                </a:solidFill>
+              </a:defRPr>
+            </a:lvl8pPr>
+            <a:lvl9pPr>
+              <a:defRPr>
+                <a:solidFill>
+                  <a:schemeClr val="tx2"/>
+                </a:solidFill>
+              </a:defRPr>
+            </a:lvl9pPr>
+          </a:lstStyle>
+          <a:p>
+            <a:pPr lvl="0"/>
+            <a:r>
+              <a:rPr lang="en-US" sz="8000" dirty="0">
+                <a:solidFill>
+                  <a:schemeClr val="accent1"/>
+                </a:solidFill>
+              </a:rPr>
+              <a:t>“</a:t>
+            </a:r>
+          </a:p>
+        </p:txBody>
+      </p:sp>
+      <p:sp>
+        <p:nvSpPr>
+          <p:cNvPr id="15" name="TextBox 14"/>
+          <p:cNvSpPr txBox="1"/>
+          <p:nvPr/>
+        </p:nvSpPr>
+        <p:spPr>
+          <a:xfrm>
+            <a:off x="10437812" y="2743200"/>
+            <a:ext cx="609600" cy="584776"/>
+          </a:xfrm>
+          <a:prstGeom prst="rect">
+            <a:avLst/>
+          </a:prstGeom>
+        </p:spPr>
+        <p:txBody>
+          <a:bodyPr vert="horz" lIns="91440" tIns="45720" rIns="91440" bIns="45720" rtlCol="0" anchor="ctr">
+            <a:noAutofit/>
+          </a:bodyPr>
+          <a:lstStyle>
+            <a:lvl1pPr>
+              <a:spcBef>
+                <a:spcPct val="0"/>
+              </a:spcBef>
+              <a:buNone/>
+              <a:defRPr sz="3200" b="0" cap="all">
+                <a:ln w="3175" cmpd="sng">
+                  <a:noFill/>
+                </a:ln>
+                <a:effectLst>
+                  <a:glow rad="38100">
+                    <a:schemeClr val="bg1">
+                      <a:lumMod val="65000"/>
+                      <a:lumOff val="35000"/>
+                      <a:alpha val="40000"/>
+                    </a:schemeClr>
+                  </a:glow>
+                  <a:outerShdw blurRad="28575" dist="38100" dir="14040000" algn="tl" rotWithShape="0">
+                    <a:srgbClr val="000000">
+                      <a:alpha val="25000"/>
+                    </a:srgbClr>
+                  </a:outerShdw>
+                </a:effectLst>
+              </a:defRPr>
+            </a:lvl1pPr>
+            <a:lvl2pPr>
+              <a:defRPr>
+                <a:solidFill>
+                  <a:schemeClr val="tx2"/>
+                </a:solidFill>
+              </a:defRPr>
+            </a:lvl2pPr>
+            <a:lvl3pPr>
+              <a:defRPr>
+                <a:solidFill>
+                  <a:schemeClr val="tx2"/>
+                </a:solidFill>
+              </a:defRPr>
+            </a:lvl3pPr>
+            <a:lvl4pPr>
+              <a:defRPr>
+                <a:solidFill>
+                  <a:schemeClr val="tx2"/>
+                </a:solidFill>
+              </a:defRPr>
+            </a:lvl4pPr>
+            <a:lvl5pPr>
+              <a:defRPr>
+                <a:solidFill>
+                  <a:schemeClr val="tx2"/>
+                </a:solidFill>
+              </a:defRPr>
+            </a:lvl5pPr>
+            <a:lvl6pPr>
+              <a:defRPr>
+                <a:solidFill>
+                  <a:schemeClr val="tx2"/>
+                </a:solidFill>
+              </a:defRPr>
+            </a:lvl6pPr>
+            <a:lvl7pPr>
+              <a:defRPr>
+                <a:solidFill>
+                  <a:schemeClr val="tx2"/>
+                </a:solidFill>
+              </a:defRPr>
+            </a:lvl7pPr>
+            <a:lvl8pPr>
+              <a:defRPr>
+                <a:solidFill>
+                  <a:schemeClr val="tx2"/>
+                </a:solidFill>
+              </a:defRPr>
+            </a:lvl8pPr>
+            <a:lvl9pPr>
+              <a:defRPr>
+                <a:solidFill>
+                  <a:schemeClr val="tx2"/>
+                </a:solidFill>
+              </a:defRPr>
+            </a:lvl9pPr>
+          </a:lstStyle>
+          <a:p>
+            <a:pPr lvl="0" algn="r"/>
+            <a:r>
+              <a:rPr lang="en-US" sz="8000" dirty="0">
+                <a:solidFill>
+                  <a:schemeClr val="accent1"/>
+                </a:solidFill>
+              </a:rPr>
+              <a:t>”</a:t>
+            </a:r>
+          </a:p>
+        </p:txBody>
+      </p:sp>
+      <p:sp>
+        <p:nvSpPr>
+          <p:cNvPr id="2" name="Title 1"/>
+          <p:cNvSpPr>
+            <a:spLocks noGrp="1"/>
+          </p:cNvSpPr>
+          <p:nvPr>
+            <p:ph type="title"/>
+          </p:nvPr>
+        </p:nvSpPr>
+        <p:spPr>
+          <a:xfrm>
+            <a:off x="1446213" y="609601"/>
+            <a:ext cx="9296398" cy="2743199"/>
+          </a:xfrm>
+        </p:spPr>
+        <p:txBody>
+          <a:bodyPr anchor="ctr">
+            <a:normAutofit/>
+          </a:bodyPr>
+          <a:lstStyle>
+            <a:lvl1pPr algn="l">
+              <a:defRPr sz="3200" b="0" cap="all">
+                <a:gradFill flip="none" rotWithShape="1">
+                  <a:gsLst>
+                    <a:gs pos="0">
+                      <a:schemeClr val="tx1"/>
+                    </a:gs>
+                    <a:gs pos="100000">
+                      <a:schemeClr val="tx1">
+                        <a:lumMod val="75000"/>
+                      </a:schemeClr>
+                    </a:gs>
+                  </a:gsLst>
+                  <a:lin ang="5400000" scaled="0"/>
+                  <a:tileRect/>
+                </a:gradFill>
+              </a:defRPr>
+            </a:lvl1pPr>
+          </a:lstStyle>
+          <a:p>
+            <a:r>
+              <a:rPr lang="en-US"/>
+              <a:t>Click to edit Master title style</a:t>
+            </a:r>
+            <a:endParaRPr lang="en-US" dirty="0"/>
+          </a:p>
+        </p:txBody>
+      </p:sp>
+      <p:sp>
+        <p:nvSpPr>
+          <p:cNvPr id="10" name="Text Placeholder 9"/>
+          <p:cNvSpPr>
+            <a:spLocks noGrp="1"/>
+          </p:cNvSpPr>
+          <p:nvPr>
+            <p:ph type="body" sz="quarter" idx="13"/>
+          </p:nvPr>
+        </p:nvSpPr>
+        <p:spPr>
+          <a:xfrm>
+            <a:off x="1141412" y="3886200"/>
+            <a:ext cx="9906000" cy="889000"/>
+          </a:xfrm>
+        </p:spPr>
+        <p:txBody>
+          <a:bodyPr vert="horz" lIns="91440" tIns="45720" rIns="91440" bIns="45720" rtlCol="0" anchor="b">
+            <a:normAutofit/>
+          </a:bodyPr>
+          <a:lstStyle>
+            <a:lvl1pPr>
+              <a:buNone/>
+              <a:defRPr lang="en-US" sz="2400" b="0" cap="all" dirty="0">
+                <a:ln w="3175" cmpd="sng">
+                  <a:noFill/>
+                </a:ln>
+                <a:gradFill flip="none" rotWithShape="1">
+                  <a:gsLst>
+                    <a:gs pos="0">
+                      <a:schemeClr val="tx1"/>
+                    </a:gs>
+                    <a:gs pos="100000">
+                      <a:schemeClr val="tx1">
+                        <a:lumMod val="75000"/>
+                      </a:schemeClr>
+                    </a:gs>
+                  </a:gsLst>
+                  <a:lin ang="5400000" scaled="0"/>
+                  <a:tileRect/>
+                </a:gradFill>
+                <a:effectLst>
+                  <a:glow rad="38100">
+                    <a:schemeClr val="bg1">
+                      <a:lumMod val="65000"/>
+                      <a:lumOff val="35000"/>
+                      <a:alpha val="40000"/>
+                    </a:schemeClr>
+                  </a:glow>
+                  <a:outerShdw blurRad="28575" dist="38100" dir="14040000" algn="tl" rotWithShape="0">
+                    <a:srgbClr val="000000">
+                      <a:alpha val="25000"/>
+                    </a:srgbClr>
+                  </a:outerShdw>
+                </a:effectLst>
+              </a:defRPr>
+            </a:lvl1pPr>
+          </a:lstStyle>
+          <a:p>
+            <a:pPr marL="0" lvl="0">
+              <a:spcBef>
+                <a:spcPct val="0"/>
+              </a:spcBef>
+              <a:buNone/>
+            </a:pPr>
+            <a:r>
+              <a:rPr lang="en-US"/>
+              <a:t>Click to edit Master text styles</a:t>
+            </a:r>
+          </a:p>
+        </p:txBody>
+      </p:sp>
+      <p:sp>
+        <p:nvSpPr>
+          <p:cNvPr id="3" name="Text Placeholder 2"/>
+          <p:cNvSpPr>
+            <a:spLocks noGrp="1"/>
+          </p:cNvSpPr>
+          <p:nvPr>
+            <p:ph type="body" idx="1"/>
+          </p:nvPr>
+        </p:nvSpPr>
+        <p:spPr>
+          <a:xfrm>
+            <a:off x="1141411" y="4775200"/>
+            <a:ext cx="9906000" cy="1016000"/>
+          </a:xfrm>
+        </p:spPr>
+        <p:txBody>
+          <a:bodyPr anchor="t">
+            <a:normAutofit/>
+          </a:bodyPr>
+          <a:lstStyle>
+            <a:lvl1pPr marL="0" indent="0" algn="l">
+              <a:buNone/>
+              <a:defRPr sz="1800">
+                <a:gradFill flip="none" rotWithShape="1">
+                  <a:gsLst>
+                    <a:gs pos="0">
+                      <a:schemeClr val="tx1"/>
+                    </a:gs>
+                    <a:gs pos="100000">
+                      <a:schemeClr val="tx1">
+                        <a:lumMod val="75000"/>
+                      </a:schemeClr>
+                    </a:gs>
+                  </a:gsLst>
+                  <a:lin ang="5400000" scaled="0"/>
+                  <a:tileRect/>
+                </a:gradFill>
+              </a:defRPr>
+            </a:lvl1pPr>
+            <a:lvl2pPr marL="457200" indent="0">
+              <a:buNone/>
+              <a:defRPr sz="1800">
+                <a:solidFill>
+                  <a:schemeClr val="tx1">
+                    <a:tint val="75000"/>
+                  </a:schemeClr>
+                </a:solidFill>
+              </a:defRPr>
+            </a:lvl2pPr>
+            <a:lvl3pPr marL="914400" indent="0">
+              <a:buNone/>
+              <a:defRPr sz="1600">
+                <a:solidFill>
+                  <a:schemeClr val="tx1">
+                    <a:tint val="75000"/>
+                  </a:schemeClr>
+                </a:solidFill>
+              </a:defRPr>
+            </a:lvl3pPr>
+            <a:lvl4pPr marL="1371600" indent="0">
+              <a:buNone/>
+              <a:defRPr sz="1400">
+                <a:solidFill>
+                  <a:schemeClr val="tx1">
+                    <a:tint val="75000"/>
+                  </a:schemeClr>
+                </a:solidFill>
+              </a:defRPr>
+            </a:lvl4pPr>
+            <a:lvl5pPr marL="1828800" indent="0">
+              <a:buNone/>
+              <a:defRPr sz="1400">
+                <a:solidFill>
+                  <a:schemeClr val="tx1">
+                    <a:tint val="75000"/>
+                  </a:schemeClr>
+                </a:solidFill>
+              </a:defRPr>
+            </a:lvl5pPr>
+            <a:lvl6pPr marL="2286000" indent="0">
+              <a:buNone/>
+              <a:defRPr sz="1400">
+                <a:solidFill>
+                  <a:schemeClr val="tx1">
+                    <a:tint val="75000"/>
+                  </a:schemeClr>
+                </a:solidFill>
+              </a:defRPr>
+            </a:lvl6pPr>
+            <a:lvl7pPr marL="2743200" indent="0">
+              <a:buNone/>
+              <a:defRPr sz="1400">
+                <a:solidFill>
+                  <a:schemeClr val="tx1">
+                    <a:tint val="75000"/>
+                  </a:schemeClr>
+                </a:solidFill>
+              </a:defRPr>
+            </a:lvl7pPr>
+            <a:lvl8pPr marL="3200400" indent="0">
+              <a:buNone/>
+              <a:defRPr sz="1400">
+                <a:solidFill>
+                  <a:schemeClr val="tx1">
+                    <a:tint val="75000"/>
+                  </a:schemeClr>
+                </a:solidFill>
+              </a:defRPr>
+            </a:lvl8pPr>
+            <a:lvl9pPr marL="3657600" indent="0">
+              <a:buNone/>
+              <a:defRPr sz="1400">
+                <a:solidFill>
+                  <a:schemeClr val="tx1">
+                    <a:tint val="75000"/>
+                  </a:schemeClr>
+                </a:solidFill>
+              </a:defRPr>
+            </a:lvl9pPr>
+          </a:lstStyle>
+          <a:p>
+            <a:pPr lvl="0"/>
+            <a:r>
+              <a:rPr lang="en-US"/>
+              <a:t>Click to edit Master text styles</a:t>
+            </a:r>
+          </a:p>
+        </p:txBody>
+      </p:sp>
+      <p:sp>
+        <p:nvSpPr>
+          <p:cNvPr id="4" name="Date Placeholder 3"/>
+          <p:cNvSpPr>
+            <a:spLocks noGrp="1"/>
+          </p:cNvSpPr>
+          <p:nvPr>
+            <p:ph type="dt" sz="half" idx="10"/>
+          </p:nvPr>
+        </p:nvSpPr>
+        <p:spPr/>
+        <p:txBody>
+          <a:bodyPr/>
+          <a:lstStyle/>
+          <a:p>
+            <a:fld id="{375FFD08-F7C0-48E6-986B-C0D568938D4A}" type="datetimeFigureOut">
+              <a:rPr lang="en-IN" smtClean="0"/>
+              <a:t>26-04-2025</a:t>
+            </a:fld>
+            <a:endParaRPr lang="en-IN"/>
+          </a:p>
+        </p:txBody>
+      </p:sp>
+      <p:sp>
+        <p:nvSpPr>
+          <p:cNvPr id="5" name="Footer Placeholder 4"/>
+          <p:cNvSpPr>
+            <a:spLocks noGrp="1"/>
+          </p:cNvSpPr>
+          <p:nvPr>
+            <p:ph type="ftr" sz="quarter" idx="11"/>
+          </p:nvPr>
+        </p:nvSpPr>
+        <p:spPr/>
+        <p:txBody>
+          <a:bodyPr/>
+          <a:lstStyle/>
+          <a:p>
+            <a:endParaRPr lang="en-IN"/>
+          </a:p>
+        </p:txBody>
+      </p:sp>
+      <p:sp>
+        <p:nvSpPr>
+          <p:cNvPr id="6" name="Slide Number Placeholder 5"/>
+          <p:cNvSpPr>
+            <a:spLocks noGrp="1"/>
+          </p:cNvSpPr>
+          <p:nvPr>
+            <p:ph type="sldNum" sz="quarter" idx="12"/>
+          </p:nvPr>
+        </p:nvSpPr>
+        <p:spPr/>
+        <p:txBody>
+          <a:bodyPr/>
+          <a:lstStyle/>
+          <a:p>
+            <a:fld id="{9E7F237C-1634-4045-B940-CAF030BB862A}" type="slidenum">
+              <a:rPr lang="en-IN" smtClean="0"/>
+              <a:t>‹#›</a:t>
+            </a:fld>
+            <a:endParaRPr lang="en-IN"/>
+          </a:p>
+        </p:txBody>
+      </p:sp>
+    </p:spTree>
+    <p:extLst>
+      <p:ext uri="{BB962C8B-B14F-4D97-AF65-F5344CB8AC3E}">
+        <p14:creationId xmlns:p14="http://schemas.microsoft.com/office/powerpoint/2010/main" val="1933501709"/>
+      </p:ext>
+    </p:extLst>
+  </p:cSld>
+  <p:clrMapOvr>
+    <a:masterClrMapping/>
+  </p:clrMapOvr>
+</p:sldLayout>
+</file>
+
+<file path=ppt/slideLayouts/slideLayout15.xml><?xml version="1.0" encoding="utf-8"?>
+<p:sldLayout xmlns:a="http://schemas.openxmlformats.org/drawingml/2006/main" xmlns:r="http://schemas.openxmlformats.org/officeDocument/2006/relationships" xmlns:p="http://schemas.openxmlformats.org/presentationml/2006/main" preserve="1">
+  <p:cSld name="True or False">
+    <p:spTree>
+      <p:nvGrpSpPr>
+        <p:cNvPr id="1" name=""/>
+        <p:cNvGrpSpPr/>
+        <p:nvPr/>
+      </p:nvGrpSpPr>
+      <p:grpSpPr>
+        <a:xfrm>
+          <a:off x="0" y="0"/>
+          <a:ext cx="0" cy="0"/>
+          <a:chOff x="0" y="0"/>
+          <a:chExt cx="0" cy="0"/>
+        </a:xfrm>
+      </p:grpSpPr>
+      <p:sp>
+        <p:nvSpPr>
+          <p:cNvPr id="2" name="Title 1"/>
+          <p:cNvSpPr>
+            <a:spLocks noGrp="1"/>
+          </p:cNvSpPr>
+          <p:nvPr>
+            <p:ph type="title"/>
+          </p:nvPr>
+        </p:nvSpPr>
+        <p:spPr>
+          <a:xfrm>
+            <a:off x="1141412" y="609601"/>
+            <a:ext cx="9905999" cy="2743199"/>
+          </a:xfrm>
+        </p:spPr>
+        <p:txBody>
+          <a:bodyPr vert="horz" lIns="91440" tIns="45720" rIns="91440" bIns="45720" rtlCol="0" anchor="ctr">
+            <a:normAutofit/>
+          </a:bodyPr>
+          <a:lstStyle>
+            <a:lvl1pPr>
+              <a:defRPr lang="en-US" b="0" dirty="0"/>
+            </a:lvl1pPr>
+          </a:lstStyle>
+          <a:p>
+            <a:pPr marL="0" lvl="0"/>
+            <a:r>
+              <a:rPr lang="en-US"/>
+              <a:t>Click to edit Master title style</a:t>
+            </a:r>
+            <a:endParaRPr lang="en-US" dirty="0"/>
+          </a:p>
+        </p:txBody>
+      </p:sp>
+      <p:sp>
+        <p:nvSpPr>
+          <p:cNvPr id="10" name="Text Placeholder 9"/>
+          <p:cNvSpPr>
+            <a:spLocks noGrp="1"/>
+          </p:cNvSpPr>
+          <p:nvPr>
+            <p:ph type="body" sz="quarter" idx="13"/>
+          </p:nvPr>
+        </p:nvSpPr>
+        <p:spPr>
+          <a:xfrm>
+            <a:off x="1141412" y="3505200"/>
+            <a:ext cx="9906000" cy="838200"/>
+          </a:xfrm>
+        </p:spPr>
+        <p:txBody>
+          <a:bodyPr vert="horz" lIns="91440" tIns="45720" rIns="91440" bIns="45720" rtlCol="0" anchor="b">
+            <a:normAutofit/>
+          </a:bodyPr>
+          <a:lstStyle>
+            <a:lvl1pPr>
+              <a:buNone/>
+              <a:defRPr lang="en-US" sz="2800" b="0" cap="all" dirty="0">
+                <a:ln w="3175" cmpd="sng">
+                  <a:noFill/>
+                </a:ln>
+                <a:gradFill flip="none" rotWithShape="1">
+                  <a:gsLst>
+                    <a:gs pos="0">
+                      <a:schemeClr val="tx1"/>
+                    </a:gs>
+                    <a:gs pos="100000">
+                      <a:schemeClr val="tx1">
+                        <a:lumMod val="75000"/>
+                      </a:schemeClr>
+                    </a:gs>
+                  </a:gsLst>
+                  <a:lin ang="5400000" scaled="0"/>
+                  <a:tileRect/>
+                </a:gradFill>
+                <a:effectLst>
+                  <a:glow rad="38100">
+                    <a:schemeClr val="bg1">
+                      <a:lumMod val="65000"/>
+                      <a:lumOff val="35000"/>
+                      <a:alpha val="40000"/>
+                    </a:schemeClr>
+                  </a:glow>
+                  <a:outerShdw blurRad="28575" dist="38100" dir="14040000" algn="tl" rotWithShape="0">
+                    <a:srgbClr val="000000">
+                      <a:alpha val="25000"/>
+                    </a:srgbClr>
+                  </a:outerShdw>
+                </a:effectLst>
+              </a:defRPr>
+            </a:lvl1pPr>
+          </a:lstStyle>
+          <a:p>
+            <a:pPr marL="0" lvl="0">
+              <a:spcBef>
+                <a:spcPct val="0"/>
+              </a:spcBef>
+              <a:buNone/>
+            </a:pPr>
+            <a:r>
+              <a:rPr lang="en-US"/>
+              <a:t>Click to edit Master text styles</a:t>
+            </a:r>
+          </a:p>
+        </p:txBody>
+      </p:sp>
+      <p:sp>
+        <p:nvSpPr>
+          <p:cNvPr id="3" name="Text Placeholder 2"/>
+          <p:cNvSpPr>
+            <a:spLocks noGrp="1"/>
+          </p:cNvSpPr>
+          <p:nvPr>
+            <p:ph type="body" idx="1"/>
+          </p:nvPr>
+        </p:nvSpPr>
+        <p:spPr>
+          <a:xfrm>
+            <a:off x="1141411" y="4343400"/>
+            <a:ext cx="9906000" cy="1447800"/>
+          </a:xfrm>
+        </p:spPr>
+        <p:txBody>
+          <a:bodyPr anchor="t">
+            <a:normAutofit/>
+          </a:bodyPr>
+          <a:lstStyle>
+            <a:lvl1pPr marL="0" indent="0" algn="l">
+              <a:buNone/>
+              <a:defRPr sz="1800">
+                <a:gradFill flip="none" rotWithShape="1">
+                  <a:gsLst>
+                    <a:gs pos="0">
+                      <a:schemeClr val="tx1"/>
+                    </a:gs>
+                    <a:gs pos="100000">
+                      <a:schemeClr val="tx1">
+                        <a:lumMod val="75000"/>
+                      </a:schemeClr>
+                    </a:gs>
+                  </a:gsLst>
+                  <a:lin ang="5400000" scaled="0"/>
+                  <a:tileRect/>
+                </a:gradFill>
+              </a:defRPr>
+            </a:lvl1pPr>
+            <a:lvl2pPr marL="457200" indent="0">
+              <a:buNone/>
+              <a:defRPr sz="1800">
+                <a:solidFill>
+                  <a:schemeClr val="tx1">
+                    <a:tint val="75000"/>
+                  </a:schemeClr>
+                </a:solidFill>
+              </a:defRPr>
+            </a:lvl2pPr>
+            <a:lvl3pPr marL="914400" indent="0">
+              <a:buNone/>
+              <a:defRPr sz="1600">
+                <a:solidFill>
+                  <a:schemeClr val="tx1">
+                    <a:tint val="75000"/>
+                  </a:schemeClr>
+                </a:solidFill>
+              </a:defRPr>
+            </a:lvl3pPr>
+            <a:lvl4pPr marL="1371600" indent="0">
+              <a:buNone/>
+              <a:defRPr sz="1400">
+                <a:solidFill>
+                  <a:schemeClr val="tx1">
+                    <a:tint val="75000"/>
+                  </a:schemeClr>
+                </a:solidFill>
+              </a:defRPr>
+            </a:lvl4pPr>
+            <a:lvl5pPr marL="1828800" indent="0">
+              <a:buNone/>
+              <a:defRPr sz="1400">
+                <a:solidFill>
+                  <a:schemeClr val="tx1">
+                    <a:tint val="75000"/>
+                  </a:schemeClr>
+                </a:solidFill>
+              </a:defRPr>
+            </a:lvl5pPr>
+            <a:lvl6pPr marL="2286000" indent="0">
+              <a:buNone/>
+              <a:defRPr sz="1400">
+                <a:solidFill>
+                  <a:schemeClr val="tx1">
+                    <a:tint val="75000"/>
+                  </a:schemeClr>
+                </a:solidFill>
+              </a:defRPr>
+            </a:lvl6pPr>
+            <a:lvl7pPr marL="2743200" indent="0">
+              <a:buNone/>
+              <a:defRPr sz="1400">
+                <a:solidFill>
+                  <a:schemeClr val="tx1">
+                    <a:tint val="75000"/>
+                  </a:schemeClr>
+                </a:solidFill>
+              </a:defRPr>
+            </a:lvl7pPr>
+            <a:lvl8pPr marL="3200400" indent="0">
+              <a:buNone/>
+              <a:defRPr sz="1400">
+                <a:solidFill>
+                  <a:schemeClr val="tx1">
+                    <a:tint val="75000"/>
+                  </a:schemeClr>
+                </a:solidFill>
+              </a:defRPr>
+            </a:lvl8pPr>
+            <a:lvl9pPr marL="3657600" indent="0">
+              <a:buNone/>
+              <a:defRPr sz="1400">
+                <a:solidFill>
+                  <a:schemeClr val="tx1">
+                    <a:tint val="75000"/>
+                  </a:schemeClr>
+                </a:solidFill>
+              </a:defRPr>
+            </a:lvl9pPr>
+          </a:lstStyle>
+          <a:p>
+            <a:pPr lvl="0"/>
+            <a:r>
+              <a:rPr lang="en-US"/>
+              <a:t>Click to edit Master text styles</a:t>
+            </a:r>
+          </a:p>
+        </p:txBody>
+      </p:sp>
+      <p:sp>
+        <p:nvSpPr>
+          <p:cNvPr id="4" name="Date Placeholder 3"/>
+          <p:cNvSpPr>
+            <a:spLocks noGrp="1"/>
+          </p:cNvSpPr>
+          <p:nvPr>
+            <p:ph type="dt" sz="half" idx="10"/>
+          </p:nvPr>
+        </p:nvSpPr>
+        <p:spPr/>
+        <p:txBody>
+          <a:bodyPr/>
+          <a:lstStyle/>
+          <a:p>
+            <a:fld id="{375FFD08-F7C0-48E6-986B-C0D568938D4A}" type="datetimeFigureOut">
+              <a:rPr lang="en-IN" smtClean="0"/>
+              <a:t>26-04-2025</a:t>
+            </a:fld>
+            <a:endParaRPr lang="en-IN"/>
+          </a:p>
+        </p:txBody>
+      </p:sp>
+      <p:sp>
+        <p:nvSpPr>
+          <p:cNvPr id="5" name="Footer Placeholder 4"/>
+          <p:cNvSpPr>
+            <a:spLocks noGrp="1"/>
+          </p:cNvSpPr>
+          <p:nvPr>
+            <p:ph type="ftr" sz="quarter" idx="11"/>
+          </p:nvPr>
+        </p:nvSpPr>
+        <p:spPr/>
+        <p:txBody>
+          <a:bodyPr/>
+          <a:lstStyle/>
+          <a:p>
+            <a:endParaRPr lang="en-IN"/>
+          </a:p>
+        </p:txBody>
+      </p:sp>
+      <p:sp>
+        <p:nvSpPr>
+          <p:cNvPr id="6" name="Slide Number Placeholder 5"/>
+          <p:cNvSpPr>
+            <a:spLocks noGrp="1"/>
+          </p:cNvSpPr>
+          <p:nvPr>
+            <p:ph type="sldNum" sz="quarter" idx="12"/>
+          </p:nvPr>
+        </p:nvSpPr>
+        <p:spPr/>
+        <p:txBody>
+          <a:bodyPr/>
+          <a:lstStyle/>
+          <a:p>
+            <a:fld id="{9E7F237C-1634-4045-B940-CAF030BB862A}" type="slidenum">
+              <a:rPr lang="en-IN" smtClean="0"/>
+              <a:t>‹#›</a:t>
+            </a:fld>
+            <a:endParaRPr lang="en-IN"/>
+          </a:p>
+        </p:txBody>
+      </p:sp>
+    </p:spTree>
+    <p:extLst>
+      <p:ext uri="{BB962C8B-B14F-4D97-AF65-F5344CB8AC3E}">
+        <p14:creationId xmlns:p14="http://schemas.microsoft.com/office/powerpoint/2010/main" val="3963238244"/>
+      </p:ext>
+    </p:extLst>
+  </p:cSld>
+  <p:clrMapOvr>
+    <a:masterClrMapping/>
+  </p:clrMapOvr>
+</p:sldLayout>
+</file>
+
+<file path=ppt/slideLayouts/slideLayout16.xml><?xml version="1.0" encoding="utf-8"?>
 <p:sldLayout xmlns:a="http://schemas.openxmlformats.org/drawingml/2006/main" xmlns:r="http://schemas.openxmlformats.org/officeDocument/2006/relationships" xmlns:p="http://schemas.openxmlformats.org/presentationml/2006/main" type="vertTx" preserve="1">
   <p:cSld name="Title and Vertical Text">
     <p:spTree>
@@ -452,7 +2549,7 @@
       </p:grpSpPr>
       <p:sp>
         <p:nvSpPr>
-          <p:cNvPr id="2" name="Title 1"/>
+          <p:cNvPr id="7" name="Title 1"/>
           <p:cNvSpPr>
             <a:spLocks noGrp="1"/>
           </p:cNvSpPr>
@@ -460,7 +2557,12 @@
             <p:ph type="title"/>
           </p:nvPr>
         </p:nvSpPr>
-        <p:spPr/>
+        <p:spPr>
+          <a:xfrm>
+            <a:off x="1141413" y="609600"/>
+            <a:ext cx="9905998" cy="1905000"/>
+          </a:xfrm>
+        </p:spPr>
         <p:txBody>
           <a:bodyPr/>
           <a:lstStyle/>
@@ -485,7 +2587,7 @@
         </p:nvSpPr>
         <p:spPr/>
         <p:txBody>
-          <a:bodyPr vert="eaVert"/>
+          <a:bodyPr vert="eaVert" anchor="t"/>
           <a:lstStyle/>
           <a:p>
             <a:pPr lvl="0"/>
@@ -542,7 +2644,7 @@
           <a:p>
             <a:fld id="{375FFD08-F7C0-48E6-986B-C0D568938D4A}" type="datetimeFigureOut">
               <a:rPr lang="en-IN" smtClean="0"/>
-              <a:t>24-04-2025</a:t>
+              <a:t>26-04-2025</a:t>
             </a:fld>
             <a:endParaRPr lang="en-IN"/>
           </a:p>
@@ -593,7 +2695,7 @@
     </p:spTree>
     <p:extLst>
       <p:ext uri="{BB962C8B-B14F-4D97-AF65-F5344CB8AC3E}">
-        <p14:creationId xmlns:p14="http://schemas.microsoft.com/office/powerpoint/2010/main" val="3691195644"/>
+        <p14:creationId xmlns:p14="http://schemas.microsoft.com/office/powerpoint/2010/main" val="773555513"/>
       </p:ext>
     </p:extLst>
   </p:cSld>
@@ -603,8 +2705,8 @@
 </p:sldLayout>
 </file>
 
-<file path=ppt/slideLayouts/slideLayout11.xml><?xml version="1.0" encoding="utf-8"?>
-<p:sldLayout xmlns:a="http://schemas.openxmlformats.org/drawingml/2006/main" xmlns:r="http://schemas.openxmlformats.org/officeDocument/2006/relationships" xmlns:p="http://schemas.openxmlformats.org/presentationml/2006/main" showMasterSp="0" type="vertTitleAndTx" preserve="1">
+<file path=ppt/slideLayouts/slideLayout17.xml><?xml version="1.0" encoding="utf-8"?>
+<p:sldLayout xmlns:a="http://schemas.openxmlformats.org/drawingml/2006/main" xmlns:r="http://schemas.openxmlformats.org/officeDocument/2006/relationships" xmlns:p="http://schemas.openxmlformats.org/presentationml/2006/main" type="vertTitleAndTx" preserve="1">
   <p:cSld name="Vertical Title and Text">
     <p:spTree>
       <p:nvGrpSpPr>
@@ -632,12 +2734,12 @@
         </p:nvSpPr>
         <p:spPr>
           <a:xfrm>
-            <a:off x="8724901" y="762000"/>
-            <a:ext cx="2628900" cy="5410200"/>
+            <a:off x="8836898" y="609599"/>
+            <a:ext cx="2210514" cy="5181601"/>
           </a:xfrm>
         </p:spPr>
         <p:txBody>
-          <a:bodyPr vert="eaVert" lIns="45720" tIns="91440" rIns="45720" bIns="91440"/>
+          <a:bodyPr vert="eaVert"/>
           <a:lstStyle/>
           <a:p>
             <a:r>
@@ -660,12 +2762,12 @@
         </p:nvSpPr>
         <p:spPr>
           <a:xfrm>
-            <a:off x="990601" y="762000"/>
-            <a:ext cx="7581900" cy="5410200"/>
+            <a:off x="1141412" y="609600"/>
+            <a:ext cx="7543800" cy="5181600"/>
           </a:xfrm>
         </p:spPr>
         <p:txBody>
-          <a:bodyPr vert="eaVert"/>
+          <a:bodyPr vert="eaVert" anchor="t"/>
           <a:lstStyle/>
           <a:p>
             <a:pPr lvl="0"/>
@@ -722,7 +2824,7 @@
           <a:p>
             <a:fld id="{375FFD08-F7C0-48E6-986B-C0D568938D4A}" type="datetimeFigureOut">
               <a:rPr lang="en-IN" smtClean="0"/>
-              <a:t>24-04-2025</a:t>
+              <a:t>26-04-2025</a:t>
             </a:fld>
             <a:endParaRPr lang="en-IN"/>
           </a:p>
@@ -770,45 +2872,10 @@
           </a:p>
         </p:txBody>
       </p:sp>
-      <p:cxnSp>
-        <p:nvCxnSpPr>
-          <p:cNvPr id="8" name="Straight Connector 7"/>
-          <p:cNvCxnSpPr/>
-          <p:nvPr/>
-        </p:nvCxnSpPr>
-        <p:spPr>
-          <a:xfrm rot="5400000" flipV="1">
-            <a:off x="10058400" y="59263"/>
-            <a:ext cx="0" cy="914400"/>
-          </a:xfrm>
-          <a:prstGeom prst="line">
-            <a:avLst/>
-          </a:prstGeom>
-          <a:ln w="19050">
-            <a:solidFill>
-              <a:schemeClr val="accent2"/>
-            </a:solidFill>
-          </a:ln>
-        </p:spPr>
-        <p:style>
-          <a:lnRef idx="1">
-            <a:schemeClr val="accent1"/>
-          </a:lnRef>
-          <a:fillRef idx="0">
-            <a:schemeClr val="accent1"/>
-          </a:fillRef>
-          <a:effectRef idx="0">
-            <a:schemeClr val="accent1"/>
-          </a:effectRef>
-          <a:fontRef idx="minor">
-            <a:schemeClr val="tx1"/>
-          </a:fontRef>
-        </p:style>
-      </p:cxnSp>
     </p:spTree>
     <p:extLst>
       <p:ext uri="{BB962C8B-B14F-4D97-AF65-F5344CB8AC3E}">
-        <p14:creationId xmlns:p14="http://schemas.microsoft.com/office/powerpoint/2010/main" val="1013779945"/>
+        <p14:creationId xmlns:p14="http://schemas.microsoft.com/office/powerpoint/2010/main" val="3636950796"/>
       </p:ext>
     </p:extLst>
   </p:cSld>
@@ -870,64 +2937,64 @@
         </p:nvSpPr>
         <p:spPr/>
         <p:txBody>
+          <a:bodyPr anchor="ctr"/>
+          <a:lstStyle/>
+          <a:p>
+            <a:pPr lvl="0"/>
+            <a:r>
+              <a:rPr lang="en-US"/>
+              <a:t>Click to edit Master text styles</a:t>
+            </a:r>
+          </a:p>
+          <a:p>
+            <a:pPr lvl="1"/>
+            <a:r>
+              <a:rPr lang="en-US"/>
+              <a:t>Second level</a:t>
+            </a:r>
+          </a:p>
+          <a:p>
+            <a:pPr lvl="2"/>
+            <a:r>
+              <a:rPr lang="en-US"/>
+              <a:t>Third level</a:t>
+            </a:r>
+          </a:p>
+          <a:p>
+            <a:pPr lvl="3"/>
+            <a:r>
+              <a:rPr lang="en-US"/>
+              <a:t>Fourth level</a:t>
+            </a:r>
+          </a:p>
+          <a:p>
+            <a:pPr lvl="4"/>
+            <a:r>
+              <a:rPr lang="en-US"/>
+              <a:t>Fifth level</a:t>
+            </a:r>
+            <a:endParaRPr lang="en-US" dirty="0"/>
+          </a:p>
+        </p:txBody>
+      </p:sp>
+      <p:sp>
+        <p:nvSpPr>
+          <p:cNvPr id="4" name="Date Placeholder 3"/>
+          <p:cNvSpPr>
+            <a:spLocks noGrp="1"/>
+          </p:cNvSpPr>
+          <p:nvPr>
+            <p:ph type="dt" sz="half" idx="10"/>
+          </p:nvPr>
+        </p:nvSpPr>
+        <p:spPr/>
+        <p:txBody>
           <a:bodyPr/>
           <a:lstStyle/>
           <a:p>
-            <a:pPr lvl="0"/>
-            <a:r>
-              <a:rPr lang="en-US"/>
-              <a:t>Click to edit Master text styles</a:t>
-            </a:r>
-          </a:p>
-          <a:p>
-            <a:pPr lvl="1"/>
-            <a:r>
-              <a:rPr lang="en-US"/>
-              <a:t>Second level</a:t>
-            </a:r>
-          </a:p>
-          <a:p>
-            <a:pPr lvl="2"/>
-            <a:r>
-              <a:rPr lang="en-US"/>
-              <a:t>Third level</a:t>
-            </a:r>
-          </a:p>
-          <a:p>
-            <a:pPr lvl="3"/>
-            <a:r>
-              <a:rPr lang="en-US"/>
-              <a:t>Fourth level</a:t>
-            </a:r>
-          </a:p>
-          <a:p>
-            <a:pPr lvl="4"/>
-            <a:r>
-              <a:rPr lang="en-US"/>
-              <a:t>Fifth level</a:t>
-            </a:r>
-            <a:endParaRPr lang="en-US" dirty="0"/>
-          </a:p>
-        </p:txBody>
-      </p:sp>
-      <p:sp>
-        <p:nvSpPr>
-          <p:cNvPr id="4" name="Date Placeholder 3"/>
-          <p:cNvSpPr>
-            <a:spLocks noGrp="1"/>
-          </p:cNvSpPr>
-          <p:nvPr>
-            <p:ph type="dt" sz="half" idx="10"/>
-          </p:nvPr>
-        </p:nvSpPr>
-        <p:spPr/>
-        <p:txBody>
-          <a:bodyPr/>
-          <a:lstStyle/>
-          <a:p>
             <a:fld id="{375FFD08-F7C0-48E6-986B-C0D568938D4A}" type="datetimeFigureOut">
               <a:rPr lang="en-IN" smtClean="0"/>
-              <a:t>24-04-2025</a:t>
+              <a:t>26-04-2025</a:t>
             </a:fld>
             <a:endParaRPr lang="en-IN"/>
           </a:p>
@@ -978,7 +3045,7 @@
     </p:spTree>
     <p:extLst>
       <p:ext uri="{BB962C8B-B14F-4D97-AF65-F5344CB8AC3E}">
-        <p14:creationId xmlns:p14="http://schemas.microsoft.com/office/powerpoint/2010/main" val="3696474387"/>
+        <p14:creationId xmlns:p14="http://schemas.microsoft.com/office/powerpoint/2010/main" val="2237480659"/>
       </p:ext>
     </p:extLst>
   </p:cSld>
@@ -989,7 +3056,7 @@
 </file>
 
 <file path=ppt/slideLayouts/slideLayout3.xml><?xml version="1.0" encoding="utf-8"?>
-<p:sldLayout xmlns:a="http://schemas.openxmlformats.org/drawingml/2006/main" xmlns:r="http://schemas.openxmlformats.org/officeDocument/2006/relationships" xmlns:p="http://schemas.openxmlformats.org/presentationml/2006/main" showMasterSp="0" type="secHead" preserve="1">
+<p:sldLayout xmlns:a="http://schemas.openxmlformats.org/drawingml/2006/main" xmlns:r="http://schemas.openxmlformats.org/officeDocument/2006/relationships" xmlns:p="http://schemas.openxmlformats.org/presentationml/2006/main" type="secHead" preserve="1">
   <p:cSld name="Section Header">
     <p:spTree>
       <p:nvGrpSpPr>
@@ -1017,64 +3084,64 @@
         </p:nvSpPr>
         <p:spPr>
           <a:xfrm>
-            <a:off x="457200" y="4960137"/>
-            <a:ext cx="7772400" cy="1463040"/>
+            <a:off x="1751013" y="3308581"/>
+            <a:ext cx="8686800" cy="1468800"/>
           </a:xfrm>
         </p:spPr>
         <p:txBody>
-          <a:bodyPr anchor="ctr">
+          <a:bodyPr anchor="b"/>
+          <a:lstStyle>
+            <a:lvl1pPr algn="r">
+              <a:defRPr sz="4000" b="0" cap="all"/>
+            </a:lvl1pPr>
+          </a:lstStyle>
+          <a:p>
+            <a:r>
+              <a:rPr lang="en-US"/>
+              <a:t>Click to edit Master title style</a:t>
+            </a:r>
+            <a:endParaRPr lang="en-US" dirty="0"/>
+          </a:p>
+        </p:txBody>
+      </p:sp>
+      <p:sp>
+        <p:nvSpPr>
+          <p:cNvPr id="3" name="Text Placeholder 2"/>
+          <p:cNvSpPr>
+            <a:spLocks noGrp="1"/>
+          </p:cNvSpPr>
+          <p:nvPr>
+            <p:ph type="body" idx="1"/>
+          </p:nvPr>
+        </p:nvSpPr>
+        <p:spPr>
+          <a:xfrm>
+            <a:off x="1751011" y="4777381"/>
+            <a:ext cx="8686801" cy="860400"/>
+          </a:xfrm>
+        </p:spPr>
+        <p:txBody>
+          <a:bodyPr anchor="t">
             <a:normAutofit/>
           </a:bodyPr>
           <a:lstStyle>
-            <a:lvl1pPr algn="r">
-              <a:defRPr sz="5000" b="0" spc="200" baseline="0"/>
-            </a:lvl1pPr>
-          </a:lstStyle>
-          <a:p>
-            <a:r>
-              <a:rPr lang="en-US"/>
-              <a:t>Click to edit Master title style</a:t>
-            </a:r>
-            <a:endParaRPr lang="en-US" dirty="0"/>
-          </a:p>
-        </p:txBody>
-      </p:sp>
-      <p:sp>
-        <p:nvSpPr>
-          <p:cNvPr id="3" name="Text Placeholder 2"/>
-          <p:cNvSpPr>
-            <a:spLocks noGrp="1"/>
-          </p:cNvSpPr>
-          <p:nvPr>
-            <p:ph type="body" idx="1"/>
-          </p:nvPr>
-        </p:nvSpPr>
-        <p:spPr>
-          <a:xfrm>
-            <a:off x="8610600" y="4960137"/>
-            <a:ext cx="3200400" cy="1463040"/>
-          </a:xfrm>
-        </p:spPr>
-        <p:txBody>
-          <a:bodyPr lIns="91440" rIns="91440" anchor="ctr">
-            <a:normAutofit/>
-          </a:bodyPr>
-          <a:lstStyle>
-            <a:lvl1pPr marL="0" indent="0">
-              <a:lnSpc>
-                <a:spcPct val="100000"/>
-              </a:lnSpc>
-              <a:spcBef>
-                <a:spcPts val="0"/>
-              </a:spcBef>
-              <a:buNone/>
-              <a:defRPr sz="1800">
-                <a:solidFill>
-                  <a:schemeClr val="tx1">
-                    <a:lumMod val="95000"/>
-                    <a:lumOff val="5000"/>
-                  </a:schemeClr>
-                </a:solidFill>
+            <a:lvl1pPr marL="0" indent="0" algn="r">
+              <a:buNone/>
+              <a:defRPr sz="2000">
+                <a:gradFill flip="none" rotWithShape="1">
+                  <a:gsLst>
+                    <a:gs pos="0">
+                      <a:schemeClr val="tx1"/>
+                    </a:gs>
+                    <a:gs pos="100000">
+                      <a:schemeClr val="tx1">
+                        <a:lumMod val="75000"/>
+                      </a:schemeClr>
+                    </a:gs>
+                  </a:gsLst>
+                  <a:lin ang="5400000" scaled="0"/>
+                  <a:tileRect/>
+                </a:gradFill>
               </a:defRPr>
             </a:lvl1pPr>
             <a:lvl2pPr marL="457200" indent="0">
@@ -1184,7 +3251,7 @@
           <a:p>
             <a:fld id="{375FFD08-F7C0-48E6-986B-C0D568938D4A}" type="datetimeFigureOut">
               <a:rPr lang="en-IN" smtClean="0"/>
-              <a:t>24-04-2025</a:t>
+              <a:t>26-04-2025</a:t>
             </a:fld>
             <a:endParaRPr lang="en-IN"/>
           </a:p>
@@ -1232,120 +3299,10 @@
           </a:p>
         </p:txBody>
       </p:sp>
-      <p:cxnSp>
-        <p:nvCxnSpPr>
-          <p:cNvPr id="8" name="Straight Connector 7"/>
-          <p:cNvCxnSpPr/>
-          <p:nvPr/>
-        </p:nvCxnSpPr>
-        <p:spPr>
-          <a:xfrm flipV="1">
-            <a:off x="8386843" y="5264106"/>
-            <a:ext cx="0" cy="914400"/>
-          </a:xfrm>
-          <a:prstGeom prst="line">
-            <a:avLst/>
-          </a:prstGeom>
-          <a:ln w="19050">
-            <a:solidFill>
-              <a:schemeClr val="accent1">
-                <a:lumMod val="75000"/>
-              </a:schemeClr>
-            </a:solidFill>
-          </a:ln>
-        </p:spPr>
-        <p:style>
-          <a:lnRef idx="1">
-            <a:schemeClr val="accent1"/>
-          </a:lnRef>
-          <a:fillRef idx="0">
-            <a:schemeClr val="accent1"/>
-          </a:fillRef>
-          <a:effectRef idx="0">
-            <a:schemeClr val="accent1"/>
-          </a:effectRef>
-          <a:fontRef idx="minor">
-            <a:schemeClr val="tx1"/>
-          </a:fontRef>
-        </p:style>
-      </p:cxnSp>
-      <p:cxnSp>
-        <p:nvCxnSpPr>
-          <p:cNvPr id="12" name="Straight Connector 11"/>
-          <p:cNvCxnSpPr/>
-          <p:nvPr/>
-        </p:nvCxnSpPr>
-        <p:spPr>
-          <a:xfrm flipV="1">
-            <a:off x="8386842" y="5264106"/>
-            <a:ext cx="0" cy="914400"/>
-          </a:xfrm>
-          <a:prstGeom prst="line">
-            <a:avLst/>
-          </a:prstGeom>
-          <a:ln w="19050">
-            <a:solidFill>
-              <a:schemeClr val="accent3"/>
-            </a:solidFill>
-          </a:ln>
-        </p:spPr>
-        <p:style>
-          <a:lnRef idx="1">
-            <a:schemeClr val="accent1"/>
-          </a:lnRef>
-          <a:fillRef idx="0">
-            <a:schemeClr val="accent1"/>
-          </a:fillRef>
-          <a:effectRef idx="0">
-            <a:schemeClr val="accent1"/>
-          </a:effectRef>
-          <a:fontRef idx="minor">
-            <a:schemeClr val="tx1"/>
-          </a:fontRef>
-        </p:style>
-      </p:cxnSp>
-      <p:sp>
-        <p:nvSpPr>
-          <p:cNvPr id="13" name="Rectangle 12"/>
-          <p:cNvSpPr/>
-          <p:nvPr/>
-        </p:nvSpPr>
-        <p:spPr>
-          <a:xfrm>
-            <a:off x="0" y="-1"/>
-            <a:ext cx="12192000" cy="4572000"/>
-          </a:xfrm>
-          <a:prstGeom prst="rect">
-            <a:avLst/>
-          </a:prstGeom>
-          <a:solidFill>
-            <a:schemeClr val="accent3"/>
-          </a:solidFill>
-          <a:ln>
-            <a:noFill/>
-          </a:ln>
-        </p:spPr>
-        <p:style>
-          <a:lnRef idx="2">
-            <a:schemeClr val="accent1">
-              <a:shade val="50000"/>
-            </a:schemeClr>
-          </a:lnRef>
-          <a:fillRef idx="1">
-            <a:schemeClr val="accent1"/>
-          </a:fillRef>
-          <a:effectRef idx="0">
-            <a:schemeClr val="accent1"/>
-          </a:effectRef>
-          <a:fontRef idx="minor">
-            <a:schemeClr val="lt1"/>
-          </a:fontRef>
-        </p:style>
-      </p:sp>
     </p:spTree>
     <p:extLst>
       <p:ext uri="{BB962C8B-B14F-4D97-AF65-F5344CB8AC3E}">
-        <p14:creationId xmlns:p14="http://schemas.microsoft.com/office/powerpoint/2010/main" val="979046453"/>
+        <p14:creationId xmlns:p14="http://schemas.microsoft.com/office/powerpoint/2010/main" val="3205274553"/>
       </p:ext>
     </p:extLst>
   </p:cSld>
@@ -1382,156 +3339,211 @@
             <p:ph type="title"/>
           </p:nvPr>
         </p:nvSpPr>
+        <p:spPr/>
+        <p:txBody>
+          <a:bodyPr/>
+          <a:lstStyle/>
+          <a:p>
+            <a:r>
+              <a:rPr lang="en-US"/>
+              <a:t>Click to edit Master title style</a:t>
+            </a:r>
+            <a:endParaRPr lang="en-US" dirty="0"/>
+          </a:p>
+        </p:txBody>
+      </p:sp>
+      <p:sp>
+        <p:nvSpPr>
+          <p:cNvPr id="3" name="Content Placeholder 2"/>
+          <p:cNvSpPr>
+            <a:spLocks noGrp="1"/>
+          </p:cNvSpPr>
+          <p:nvPr>
+            <p:ph sz="half" idx="1"/>
+          </p:nvPr>
+        </p:nvSpPr>
         <p:spPr>
           <a:xfrm>
-            <a:off x="1024128" y="585216"/>
-            <a:ext cx="9720072" cy="1499616"/>
+            <a:off x="1141412" y="2666999"/>
+            <a:ext cx="4876800" cy="3124201"/>
           </a:xfrm>
         </p:spPr>
         <p:txBody>
+          <a:bodyPr>
+            <a:normAutofit/>
+          </a:bodyPr>
+          <a:lstStyle>
+            <a:lvl1pPr>
+              <a:defRPr sz="1800"/>
+            </a:lvl1pPr>
+            <a:lvl2pPr>
+              <a:defRPr sz="1600"/>
+            </a:lvl2pPr>
+            <a:lvl3pPr>
+              <a:defRPr sz="1400"/>
+            </a:lvl3pPr>
+            <a:lvl4pPr>
+              <a:defRPr sz="1200"/>
+            </a:lvl4pPr>
+            <a:lvl5pPr>
+              <a:defRPr sz="1200"/>
+            </a:lvl5pPr>
+            <a:lvl6pPr>
+              <a:defRPr sz="1200"/>
+            </a:lvl6pPr>
+            <a:lvl7pPr>
+              <a:defRPr sz="1200"/>
+            </a:lvl7pPr>
+            <a:lvl8pPr>
+              <a:defRPr sz="1200"/>
+            </a:lvl8pPr>
+            <a:lvl9pPr>
+              <a:defRPr sz="1200"/>
+            </a:lvl9pPr>
+          </a:lstStyle>
+          <a:p>
+            <a:pPr lvl="0"/>
+            <a:r>
+              <a:rPr lang="en-US"/>
+              <a:t>Click to edit Master text styles</a:t>
+            </a:r>
+          </a:p>
+          <a:p>
+            <a:pPr lvl="1"/>
+            <a:r>
+              <a:rPr lang="en-US"/>
+              <a:t>Second level</a:t>
+            </a:r>
+          </a:p>
+          <a:p>
+            <a:pPr lvl="2"/>
+            <a:r>
+              <a:rPr lang="en-US"/>
+              <a:t>Third level</a:t>
+            </a:r>
+          </a:p>
+          <a:p>
+            <a:pPr lvl="3"/>
+            <a:r>
+              <a:rPr lang="en-US"/>
+              <a:t>Fourth level</a:t>
+            </a:r>
+          </a:p>
+          <a:p>
+            <a:pPr lvl="4"/>
+            <a:r>
+              <a:rPr lang="en-US"/>
+              <a:t>Fifth level</a:t>
+            </a:r>
+            <a:endParaRPr lang="en-US" dirty="0"/>
+          </a:p>
+        </p:txBody>
+      </p:sp>
+      <p:sp>
+        <p:nvSpPr>
+          <p:cNvPr id="4" name="Content Placeholder 3"/>
+          <p:cNvSpPr>
+            <a:spLocks noGrp="1"/>
+          </p:cNvSpPr>
+          <p:nvPr>
+            <p:ph sz="half" idx="2"/>
+          </p:nvPr>
+        </p:nvSpPr>
+        <p:spPr>
+          <a:xfrm>
+            <a:off x="6170612" y="2667000"/>
+            <a:ext cx="4876800" cy="3124200"/>
+          </a:xfrm>
+        </p:spPr>
+        <p:txBody>
+          <a:bodyPr>
+            <a:normAutofit/>
+          </a:bodyPr>
+          <a:lstStyle>
+            <a:lvl1pPr>
+              <a:defRPr sz="1800"/>
+            </a:lvl1pPr>
+            <a:lvl2pPr>
+              <a:defRPr sz="1600"/>
+            </a:lvl2pPr>
+            <a:lvl3pPr>
+              <a:defRPr sz="1400"/>
+            </a:lvl3pPr>
+            <a:lvl4pPr>
+              <a:defRPr sz="1200"/>
+            </a:lvl4pPr>
+            <a:lvl5pPr>
+              <a:defRPr sz="1200"/>
+            </a:lvl5pPr>
+            <a:lvl6pPr>
+              <a:defRPr sz="1200"/>
+            </a:lvl6pPr>
+            <a:lvl7pPr>
+              <a:defRPr sz="1200"/>
+            </a:lvl7pPr>
+            <a:lvl8pPr>
+              <a:defRPr sz="1200"/>
+            </a:lvl8pPr>
+            <a:lvl9pPr>
+              <a:defRPr sz="1200"/>
+            </a:lvl9pPr>
+          </a:lstStyle>
+          <a:p>
+            <a:pPr lvl="0"/>
+            <a:r>
+              <a:rPr lang="en-US"/>
+              <a:t>Click to edit Master text styles</a:t>
+            </a:r>
+          </a:p>
+          <a:p>
+            <a:pPr lvl="1"/>
+            <a:r>
+              <a:rPr lang="en-US"/>
+              <a:t>Second level</a:t>
+            </a:r>
+          </a:p>
+          <a:p>
+            <a:pPr lvl="2"/>
+            <a:r>
+              <a:rPr lang="en-US"/>
+              <a:t>Third level</a:t>
+            </a:r>
+          </a:p>
+          <a:p>
+            <a:pPr lvl="3"/>
+            <a:r>
+              <a:rPr lang="en-US"/>
+              <a:t>Fourth level</a:t>
+            </a:r>
+          </a:p>
+          <a:p>
+            <a:pPr lvl="4"/>
+            <a:r>
+              <a:rPr lang="en-US"/>
+              <a:t>Fifth level</a:t>
+            </a:r>
+            <a:endParaRPr lang="en-US" dirty="0"/>
+          </a:p>
+        </p:txBody>
+      </p:sp>
+      <p:sp>
+        <p:nvSpPr>
+          <p:cNvPr id="5" name="Date Placeholder 4"/>
+          <p:cNvSpPr>
+            <a:spLocks noGrp="1"/>
+          </p:cNvSpPr>
+          <p:nvPr>
+            <p:ph type="dt" sz="half" idx="10"/>
+          </p:nvPr>
+        </p:nvSpPr>
+        <p:spPr/>
+        <p:txBody>
           <a:bodyPr/>
           <a:lstStyle/>
           <a:p>
-            <a:r>
-              <a:rPr lang="en-US"/>
-              <a:t>Click to edit Master title style</a:t>
-            </a:r>
-            <a:endParaRPr lang="en-US" dirty="0"/>
-          </a:p>
-        </p:txBody>
-      </p:sp>
-      <p:sp>
-        <p:nvSpPr>
-          <p:cNvPr id="3" name="Content Placeholder 2"/>
-          <p:cNvSpPr>
-            <a:spLocks noGrp="1"/>
-          </p:cNvSpPr>
-          <p:nvPr>
-            <p:ph sz="half" idx="1"/>
-          </p:nvPr>
-        </p:nvSpPr>
-        <p:spPr>
-          <a:xfrm>
-            <a:off x="1024127" y="2286000"/>
-            <a:ext cx="4754880" cy="4023360"/>
-          </a:xfrm>
-        </p:spPr>
-        <p:txBody>
-          <a:bodyPr/>
-          <a:lstStyle/>
-          <a:p>
-            <a:pPr lvl="0"/>
-            <a:r>
-              <a:rPr lang="en-US"/>
-              <a:t>Click to edit Master text styles</a:t>
-            </a:r>
-          </a:p>
-          <a:p>
-            <a:pPr lvl="1"/>
-            <a:r>
-              <a:rPr lang="en-US"/>
-              <a:t>Second level</a:t>
-            </a:r>
-          </a:p>
-          <a:p>
-            <a:pPr lvl="2"/>
-            <a:r>
-              <a:rPr lang="en-US"/>
-              <a:t>Third level</a:t>
-            </a:r>
-          </a:p>
-          <a:p>
-            <a:pPr lvl="3"/>
-            <a:r>
-              <a:rPr lang="en-US"/>
-              <a:t>Fourth level</a:t>
-            </a:r>
-          </a:p>
-          <a:p>
-            <a:pPr lvl="4"/>
-            <a:r>
-              <a:rPr lang="en-US"/>
-              <a:t>Fifth level</a:t>
-            </a:r>
-            <a:endParaRPr lang="en-US" dirty="0"/>
-          </a:p>
-        </p:txBody>
-      </p:sp>
-      <p:sp>
-        <p:nvSpPr>
-          <p:cNvPr id="4" name="Content Placeholder 3"/>
-          <p:cNvSpPr>
-            <a:spLocks noGrp="1"/>
-          </p:cNvSpPr>
-          <p:nvPr>
-            <p:ph sz="half" idx="2"/>
-          </p:nvPr>
-        </p:nvSpPr>
-        <p:spPr>
-          <a:xfrm>
-            <a:off x="5989320" y="2286000"/>
-            <a:ext cx="4754880" cy="4023360"/>
-          </a:xfrm>
-        </p:spPr>
-        <p:txBody>
-          <a:bodyPr/>
-          <a:lstStyle/>
-          <a:p>
-            <a:pPr lvl="0"/>
-            <a:r>
-              <a:rPr lang="en-US"/>
-              <a:t>Click to edit Master text styles</a:t>
-            </a:r>
-          </a:p>
-          <a:p>
-            <a:pPr lvl="1"/>
-            <a:r>
-              <a:rPr lang="en-US"/>
-              <a:t>Second level</a:t>
-            </a:r>
-          </a:p>
-          <a:p>
-            <a:pPr lvl="2"/>
-            <a:r>
-              <a:rPr lang="en-US"/>
-              <a:t>Third level</a:t>
-            </a:r>
-          </a:p>
-          <a:p>
-            <a:pPr lvl="3"/>
-            <a:r>
-              <a:rPr lang="en-US"/>
-              <a:t>Fourth level</a:t>
-            </a:r>
-          </a:p>
-          <a:p>
-            <a:pPr lvl="4"/>
-            <a:r>
-              <a:rPr lang="en-US"/>
-              <a:t>Fifth level</a:t>
-            </a:r>
-            <a:endParaRPr lang="en-US" dirty="0"/>
-          </a:p>
-        </p:txBody>
-      </p:sp>
-      <p:sp>
-        <p:nvSpPr>
-          <p:cNvPr id="5" name="Date Placeholder 4"/>
-          <p:cNvSpPr>
-            <a:spLocks noGrp="1"/>
-          </p:cNvSpPr>
-          <p:nvPr>
-            <p:ph type="dt" sz="half" idx="10"/>
-          </p:nvPr>
-        </p:nvSpPr>
-        <p:spPr/>
-        <p:txBody>
-          <a:bodyPr/>
-          <a:lstStyle/>
-          <a:p>
             <a:fld id="{375FFD08-F7C0-48E6-986B-C0D568938D4A}" type="datetimeFigureOut">
               <a:rPr lang="en-IN" smtClean="0"/>
-              <a:t>24-04-2025</a:t>
+              <a:t>26-04-2025</a:t>
             </a:fld>
             <a:endParaRPr lang="en-IN"/>
           </a:p>
@@ -1582,7 +3594,7 @@
     </p:spTree>
     <p:extLst>
       <p:ext uri="{BB962C8B-B14F-4D97-AF65-F5344CB8AC3E}">
-        <p14:creationId xmlns:p14="http://schemas.microsoft.com/office/powerpoint/2010/main" val="2417778720"/>
+        <p14:creationId xmlns:p14="http://schemas.microsoft.com/office/powerpoint/2010/main" val="1106117867"/>
       </p:ext>
     </p:extLst>
   </p:cSld>
@@ -1611,7 +3623,7 @@
       </p:grpSpPr>
       <p:sp>
         <p:nvSpPr>
-          <p:cNvPr id="10" name="Title 9"/>
+          <p:cNvPr id="2" name="Title 1"/>
           <p:cNvSpPr>
             <a:spLocks noGrp="1"/>
           </p:cNvSpPr>
@@ -1622,7 +3634,11 @@
         <p:spPr/>
         <p:txBody>
           <a:bodyPr/>
-          <a:lstStyle/>
+          <a:lstStyle>
+            <a:lvl1pPr>
+              <a:defRPr/>
+            </a:lvl1pPr>
+          </a:lstStyle>
           <a:p>
             <a:r>
               <a:rPr lang="en-US"/>
@@ -1644,31 +3660,172 @@
         </p:nvSpPr>
         <p:spPr>
           <a:xfrm>
-            <a:off x="1024128" y="2179636"/>
-            <a:ext cx="4754880" cy="822960"/>
+            <a:off x="1429280" y="2658533"/>
+            <a:ext cx="4588931" cy="576262"/>
           </a:xfrm>
         </p:spPr>
         <p:txBody>
-          <a:bodyPr lIns="137160" rIns="137160" anchor="ctr">
+          <a:bodyPr anchor="b">
+            <a:noAutofit/>
+          </a:bodyPr>
+          <a:lstStyle>
+            <a:lvl1pPr marL="0" indent="0">
+              <a:buNone/>
+              <a:defRPr sz="2800" b="0"/>
+            </a:lvl1pPr>
+            <a:lvl2pPr marL="457200" indent="0">
+              <a:buNone/>
+              <a:defRPr sz="2000" b="1"/>
+            </a:lvl2pPr>
+            <a:lvl3pPr marL="914400" indent="0">
+              <a:buNone/>
+              <a:defRPr sz="1800" b="1"/>
+            </a:lvl3pPr>
+            <a:lvl4pPr marL="1371600" indent="0">
+              <a:buNone/>
+              <a:defRPr sz="1600" b="1"/>
+            </a:lvl4pPr>
+            <a:lvl5pPr marL="1828800" indent="0">
+              <a:buNone/>
+              <a:defRPr sz="1600" b="1"/>
+            </a:lvl5pPr>
+            <a:lvl6pPr marL="2286000" indent="0">
+              <a:buNone/>
+              <a:defRPr sz="1600" b="1"/>
+            </a:lvl6pPr>
+            <a:lvl7pPr marL="2743200" indent="0">
+              <a:buNone/>
+              <a:defRPr sz="1600" b="1"/>
+            </a:lvl7pPr>
+            <a:lvl8pPr marL="3200400" indent="0">
+              <a:buNone/>
+              <a:defRPr sz="1600" b="1"/>
+            </a:lvl8pPr>
+            <a:lvl9pPr marL="3657600" indent="0">
+              <a:buNone/>
+              <a:defRPr sz="1600" b="1"/>
+            </a:lvl9pPr>
+          </a:lstStyle>
+          <a:p>
+            <a:pPr lvl="0"/>
+            <a:r>
+              <a:rPr lang="en-US"/>
+              <a:t>Click to edit Master text styles</a:t>
+            </a:r>
+          </a:p>
+        </p:txBody>
+      </p:sp>
+      <p:sp>
+        <p:nvSpPr>
+          <p:cNvPr id="4" name="Content Placeholder 3"/>
+          <p:cNvSpPr>
+            <a:spLocks noGrp="1"/>
+          </p:cNvSpPr>
+          <p:nvPr>
+            <p:ph sz="half" idx="2"/>
+          </p:nvPr>
+        </p:nvSpPr>
+        <p:spPr>
+          <a:xfrm>
+            <a:off x="1141412" y="3243262"/>
+            <a:ext cx="4876800" cy="2547937"/>
+          </a:xfrm>
+        </p:spPr>
+        <p:txBody>
+          <a:bodyPr anchor="t">
             <a:normAutofit/>
           </a:bodyPr>
           <a:lstStyle>
+            <a:lvl1pPr>
+              <a:defRPr sz="1800"/>
+            </a:lvl1pPr>
+            <a:lvl2pPr>
+              <a:defRPr sz="1600"/>
+            </a:lvl2pPr>
+            <a:lvl3pPr>
+              <a:defRPr sz="1400"/>
+            </a:lvl3pPr>
+            <a:lvl4pPr>
+              <a:defRPr sz="1200"/>
+            </a:lvl4pPr>
+            <a:lvl5pPr>
+              <a:defRPr sz="1200"/>
+            </a:lvl5pPr>
+            <a:lvl6pPr>
+              <a:defRPr sz="1200"/>
+            </a:lvl6pPr>
+            <a:lvl7pPr>
+              <a:defRPr sz="1200"/>
+            </a:lvl7pPr>
+            <a:lvl8pPr>
+              <a:defRPr sz="1200"/>
+            </a:lvl8pPr>
+            <a:lvl9pPr>
+              <a:defRPr sz="1200"/>
+            </a:lvl9pPr>
+          </a:lstStyle>
+          <a:p>
+            <a:pPr lvl="0"/>
+            <a:r>
+              <a:rPr lang="en-US"/>
+              <a:t>Click to edit Master text styles</a:t>
+            </a:r>
+          </a:p>
+          <a:p>
+            <a:pPr lvl="1"/>
+            <a:r>
+              <a:rPr lang="en-US"/>
+              <a:t>Second level</a:t>
+            </a:r>
+          </a:p>
+          <a:p>
+            <a:pPr lvl="2"/>
+            <a:r>
+              <a:rPr lang="en-US"/>
+              <a:t>Third level</a:t>
+            </a:r>
+          </a:p>
+          <a:p>
+            <a:pPr lvl="3"/>
+            <a:r>
+              <a:rPr lang="en-US"/>
+              <a:t>Fourth level</a:t>
+            </a:r>
+          </a:p>
+          <a:p>
+            <a:pPr lvl="4"/>
+            <a:r>
+              <a:rPr lang="en-US"/>
+              <a:t>Fifth level</a:t>
+            </a:r>
+            <a:endParaRPr lang="en-US" dirty="0"/>
+          </a:p>
+        </p:txBody>
+      </p:sp>
+      <p:sp>
+        <p:nvSpPr>
+          <p:cNvPr id="5" name="Text Placeholder 4"/>
+          <p:cNvSpPr>
+            <a:spLocks noGrp="1"/>
+          </p:cNvSpPr>
+          <p:nvPr>
+            <p:ph type="body" sz="quarter" idx="3"/>
+          </p:nvPr>
+        </p:nvSpPr>
+        <p:spPr>
+          <a:xfrm>
+            <a:off x="6443133" y="2667000"/>
+            <a:ext cx="4604280" cy="576262"/>
+          </a:xfrm>
+        </p:spPr>
+        <p:txBody>
+          <a:bodyPr anchor="b">
+            <a:noAutofit/>
+          </a:bodyPr>
+          <a:lstStyle>
             <a:lvl1pPr marL="0" indent="0">
-              <a:spcBef>
-                <a:spcPts val="0"/>
-              </a:spcBef>
-              <a:spcAft>
-                <a:spcPts val="0"/>
-              </a:spcAft>
-              <a:buNone/>
-              <a:defRPr sz="2300" b="0" cap="none" baseline="0">
-                <a:solidFill>
-                  <a:schemeClr val="accent2">
-                    <a:lumMod val="75000"/>
-                  </a:schemeClr>
-                </a:solidFill>
-                <a:latin typeface="+mn-lt"/>
-              </a:defRPr>
+              <a:buNone/>
+              <a:defRPr sz="2800" b="0"/>
             </a:lvl1pPr>
             <a:lvl2pPr marL="457200" indent="0">
               <a:buNone/>
@@ -1714,226 +3871,109 @@
       </p:sp>
       <p:sp>
         <p:nvSpPr>
-          <p:cNvPr id="4" name="Content Placeholder 3"/>
-          <p:cNvSpPr>
-            <a:spLocks noGrp="1"/>
-          </p:cNvSpPr>
-          <p:nvPr>
-            <p:ph sz="half" idx="2"/>
+          <p:cNvPr id="6" name="Content Placeholder 5"/>
+          <p:cNvSpPr>
+            <a:spLocks noGrp="1"/>
+          </p:cNvSpPr>
+          <p:nvPr>
+            <p:ph sz="quarter" idx="4"/>
           </p:nvPr>
         </p:nvSpPr>
         <p:spPr>
           <a:xfrm>
-            <a:off x="1024128" y="2967788"/>
-            <a:ext cx="4754880" cy="3341572"/>
+            <a:off x="6170612" y="3243262"/>
+            <a:ext cx="4876801" cy="2547937"/>
           </a:xfrm>
         </p:spPr>
         <p:txBody>
-          <a:bodyPr/>
-          <a:lstStyle/>
-          <a:p>
-            <a:pPr lvl="0"/>
-            <a:r>
-              <a:rPr lang="en-US"/>
-              <a:t>Click to edit Master text styles</a:t>
-            </a:r>
-          </a:p>
-          <a:p>
-            <a:pPr lvl="1"/>
-            <a:r>
-              <a:rPr lang="en-US"/>
-              <a:t>Second level</a:t>
-            </a:r>
-          </a:p>
-          <a:p>
-            <a:pPr lvl="2"/>
-            <a:r>
-              <a:rPr lang="en-US"/>
-              <a:t>Third level</a:t>
-            </a:r>
-          </a:p>
-          <a:p>
-            <a:pPr lvl="3"/>
-            <a:r>
-              <a:rPr lang="en-US"/>
-              <a:t>Fourth level</a:t>
-            </a:r>
-          </a:p>
-          <a:p>
-            <a:pPr lvl="4"/>
-            <a:r>
-              <a:rPr lang="en-US"/>
-              <a:t>Fifth level</a:t>
-            </a:r>
-            <a:endParaRPr lang="en-US" dirty="0"/>
-          </a:p>
-        </p:txBody>
-      </p:sp>
-      <p:sp>
-        <p:nvSpPr>
-          <p:cNvPr id="5" name="Text Placeholder 4"/>
-          <p:cNvSpPr>
-            <a:spLocks noGrp="1"/>
-          </p:cNvSpPr>
-          <p:nvPr>
-            <p:ph type="body" sz="quarter" idx="3"/>
-          </p:nvPr>
-        </p:nvSpPr>
-        <p:spPr>
-          <a:xfrm>
-            <a:off x="5990888" y="2179636"/>
-            <a:ext cx="4754880" cy="822960"/>
-          </a:xfrm>
-        </p:spPr>
-        <p:txBody>
-          <a:bodyPr lIns="137160" rIns="137160" anchor="ctr">
+          <a:bodyPr anchor="t">
             <a:normAutofit/>
           </a:bodyPr>
           <a:lstStyle>
-            <a:lvl1pPr marL="0" indent="0">
-              <a:spcBef>
-                <a:spcPts val="0"/>
-              </a:spcBef>
-              <a:spcAft>
-                <a:spcPts val="0"/>
-              </a:spcAft>
-              <a:buNone/>
-              <a:defRPr lang="en-US" sz="2300" b="0" kern="1200" cap="none" baseline="0" dirty="0">
-                <a:solidFill>
-                  <a:schemeClr val="accent2">
-                    <a:lumMod val="75000"/>
-                  </a:schemeClr>
-                </a:solidFill>
-                <a:latin typeface="+mn-lt"/>
-                <a:ea typeface="+mn-ea"/>
-                <a:cs typeface="+mn-cs"/>
-              </a:defRPr>
+            <a:lvl1pPr>
+              <a:defRPr sz="1800"/>
             </a:lvl1pPr>
-            <a:lvl2pPr marL="457200" indent="0">
-              <a:buNone/>
-              <a:defRPr sz="2000" b="1"/>
+            <a:lvl2pPr>
+              <a:defRPr sz="1600"/>
             </a:lvl2pPr>
-            <a:lvl3pPr marL="914400" indent="0">
-              <a:buNone/>
-              <a:defRPr sz="1800" b="1"/>
+            <a:lvl3pPr>
+              <a:defRPr sz="1400"/>
             </a:lvl3pPr>
-            <a:lvl4pPr marL="1371600" indent="0">
-              <a:buNone/>
-              <a:defRPr sz="1600" b="1"/>
+            <a:lvl4pPr>
+              <a:defRPr sz="1200"/>
             </a:lvl4pPr>
-            <a:lvl5pPr marL="1828800" indent="0">
-              <a:buNone/>
-              <a:defRPr sz="1600" b="1"/>
+            <a:lvl5pPr>
+              <a:defRPr sz="1200"/>
             </a:lvl5pPr>
-            <a:lvl6pPr marL="2286000" indent="0">
-              <a:buNone/>
-              <a:defRPr sz="1600" b="1"/>
+            <a:lvl6pPr>
+              <a:defRPr sz="1200"/>
             </a:lvl6pPr>
-            <a:lvl7pPr marL="2743200" indent="0">
-              <a:buNone/>
-              <a:defRPr sz="1600" b="1"/>
+            <a:lvl7pPr>
+              <a:defRPr sz="1200"/>
             </a:lvl7pPr>
-            <a:lvl8pPr marL="3200400" indent="0">
-              <a:buNone/>
-              <a:defRPr sz="1600" b="1"/>
+            <a:lvl8pPr>
+              <a:defRPr sz="1200"/>
             </a:lvl8pPr>
-            <a:lvl9pPr marL="3657600" indent="0">
-              <a:buNone/>
-              <a:defRPr sz="1600" b="1"/>
+            <a:lvl9pPr>
+              <a:defRPr sz="1200"/>
             </a:lvl9pPr>
           </a:lstStyle>
           <a:p>
-            <a:pPr marL="0" lvl="0" indent="0" algn="l" defTabSz="914400" rtl="0" eaLnBrk="1" latinLnBrk="0" hangingPunct="1">
-              <a:lnSpc>
-                <a:spcPct val="90000"/>
-              </a:lnSpc>
-              <a:spcBef>
-                <a:spcPts val="1800"/>
-              </a:spcBef>
-              <a:buNone/>
-            </a:pPr>
+            <a:pPr lvl="0"/>
             <a:r>
               <a:rPr lang="en-US"/>
               <a:t>Click to edit Master text styles</a:t>
             </a:r>
           </a:p>
-        </p:txBody>
-      </p:sp>
-      <p:sp>
-        <p:nvSpPr>
-          <p:cNvPr id="6" name="Content Placeholder 5"/>
-          <p:cNvSpPr>
-            <a:spLocks noGrp="1"/>
-          </p:cNvSpPr>
-          <p:nvPr>
-            <p:ph sz="quarter" idx="4"/>
-          </p:nvPr>
-        </p:nvSpPr>
-        <p:spPr>
-          <a:xfrm>
-            <a:off x="5990888" y="2967788"/>
-            <a:ext cx="4754880" cy="3341572"/>
-          </a:xfrm>
-        </p:spPr>
+          <a:p>
+            <a:pPr lvl="1"/>
+            <a:r>
+              <a:rPr lang="en-US"/>
+              <a:t>Second level</a:t>
+            </a:r>
+          </a:p>
+          <a:p>
+            <a:pPr lvl="2"/>
+            <a:r>
+              <a:rPr lang="en-US"/>
+              <a:t>Third level</a:t>
+            </a:r>
+          </a:p>
+          <a:p>
+            <a:pPr lvl="3"/>
+            <a:r>
+              <a:rPr lang="en-US"/>
+              <a:t>Fourth level</a:t>
+            </a:r>
+          </a:p>
+          <a:p>
+            <a:pPr lvl="4"/>
+            <a:r>
+              <a:rPr lang="en-US"/>
+              <a:t>Fifth level</a:t>
+            </a:r>
+            <a:endParaRPr lang="en-US" dirty="0"/>
+          </a:p>
+        </p:txBody>
+      </p:sp>
+      <p:sp>
+        <p:nvSpPr>
+          <p:cNvPr id="7" name="Date Placeholder 6"/>
+          <p:cNvSpPr>
+            <a:spLocks noGrp="1"/>
+          </p:cNvSpPr>
+          <p:nvPr>
+            <p:ph type="dt" sz="half" idx="10"/>
+          </p:nvPr>
+        </p:nvSpPr>
+        <p:spPr/>
         <p:txBody>
           <a:bodyPr/>
           <a:lstStyle/>
           <a:p>
-            <a:pPr lvl="0"/>
-            <a:r>
-              <a:rPr lang="en-US"/>
-              <a:t>Click to edit Master text styles</a:t>
-            </a:r>
-          </a:p>
-          <a:p>
-            <a:pPr lvl="1"/>
-            <a:r>
-              <a:rPr lang="en-US"/>
-              <a:t>Second level</a:t>
-            </a:r>
-          </a:p>
-          <a:p>
-            <a:pPr lvl="2"/>
-            <a:r>
-              <a:rPr lang="en-US"/>
-              <a:t>Third level</a:t>
-            </a:r>
-          </a:p>
-          <a:p>
-            <a:pPr lvl="3"/>
-            <a:r>
-              <a:rPr lang="en-US"/>
-              <a:t>Fourth level</a:t>
-            </a:r>
-          </a:p>
-          <a:p>
-            <a:pPr lvl="4"/>
-            <a:r>
-              <a:rPr lang="en-US"/>
-              <a:t>Fifth level</a:t>
-            </a:r>
-            <a:endParaRPr lang="en-US" dirty="0"/>
-          </a:p>
-        </p:txBody>
-      </p:sp>
-      <p:sp>
-        <p:nvSpPr>
-          <p:cNvPr id="7" name="Date Placeholder 6"/>
-          <p:cNvSpPr>
-            <a:spLocks noGrp="1"/>
-          </p:cNvSpPr>
-          <p:nvPr>
-            <p:ph type="dt" sz="half" idx="10"/>
-          </p:nvPr>
-        </p:nvSpPr>
-        <p:spPr/>
-        <p:txBody>
-          <a:bodyPr/>
-          <a:lstStyle/>
-          <a:p>
             <a:fld id="{375FFD08-F7C0-48E6-986B-C0D568938D4A}" type="datetimeFigureOut">
               <a:rPr lang="en-IN" smtClean="0"/>
-              <a:t>24-04-2025</a:t>
+              <a:t>26-04-2025</a:t>
             </a:fld>
             <a:endParaRPr lang="en-IN"/>
           </a:p>
@@ -1984,7 +4024,7 @@
     </p:spTree>
     <p:extLst>
       <p:ext uri="{BB962C8B-B14F-4D97-AF65-F5344CB8AC3E}">
-        <p14:creationId xmlns:p14="http://schemas.microsoft.com/office/powerpoint/2010/main" val="2249623397"/>
+        <p14:creationId xmlns:p14="http://schemas.microsoft.com/office/powerpoint/2010/main" val="1476726889"/>
       </p:ext>
     </p:extLst>
   </p:cSld>
@@ -2051,7 +4091,7 @@
           <a:p>
             <a:fld id="{375FFD08-F7C0-48E6-986B-C0D568938D4A}" type="datetimeFigureOut">
               <a:rPr lang="en-IN" smtClean="0"/>
-              <a:t>24-04-2025</a:t>
+              <a:t>26-04-2025</a:t>
             </a:fld>
             <a:endParaRPr lang="en-IN"/>
           </a:p>
@@ -2102,7 +4142,7 @@
     </p:spTree>
     <p:extLst>
       <p:ext uri="{BB962C8B-B14F-4D97-AF65-F5344CB8AC3E}">
-        <p14:creationId xmlns:p14="http://schemas.microsoft.com/office/powerpoint/2010/main" val="4006253696"/>
+        <p14:creationId xmlns:p14="http://schemas.microsoft.com/office/powerpoint/2010/main" val="641525690"/>
       </p:ext>
     </p:extLst>
   </p:cSld>
@@ -2113,7 +4153,7 @@
 </file>
 
 <file path=ppt/slideLayouts/slideLayout7.xml><?xml version="1.0" encoding="utf-8"?>
-<p:sldLayout xmlns:a="http://schemas.openxmlformats.org/drawingml/2006/main" xmlns:r="http://schemas.openxmlformats.org/officeDocument/2006/relationships" xmlns:p="http://schemas.openxmlformats.org/presentationml/2006/main" showMasterSp="0" type="blank" preserve="1">
+<p:sldLayout xmlns:a="http://schemas.openxmlformats.org/drawingml/2006/main" xmlns:r="http://schemas.openxmlformats.org/officeDocument/2006/relationships" xmlns:p="http://schemas.openxmlformats.org/presentationml/2006/main" type="blank" preserve="1">
   <p:cSld name="Blank">
     <p:spTree>
       <p:nvGrpSpPr>
@@ -2146,7 +4186,7 @@
           <a:p>
             <a:fld id="{375FFD08-F7C0-48E6-986B-C0D568938D4A}" type="datetimeFigureOut">
               <a:rPr lang="en-IN" smtClean="0"/>
-              <a:t>24-04-2025</a:t>
+              <a:t>26-04-2025</a:t>
             </a:fld>
             <a:endParaRPr lang="en-IN"/>
           </a:p>
@@ -2197,7 +4237,7 @@
     </p:spTree>
     <p:extLst>
       <p:ext uri="{BB962C8B-B14F-4D97-AF65-F5344CB8AC3E}">
-        <p14:creationId xmlns:p14="http://schemas.microsoft.com/office/powerpoint/2010/main" val="1585506068"/>
+        <p14:creationId xmlns:p14="http://schemas.microsoft.com/office/powerpoint/2010/main" val="2784382686"/>
       </p:ext>
     </p:extLst>
   </p:cSld>
@@ -2226,7 +4266,7 @@
       </p:grpSpPr>
       <p:sp>
         <p:nvSpPr>
-          <p:cNvPr id="8" name="Title 7"/>
+          <p:cNvPr id="2" name="Title 1"/>
           <p:cNvSpPr>
             <a:spLocks noGrp="1"/>
           </p:cNvSpPr>
@@ -2236,76 +4276,75 @@
         </p:nvSpPr>
         <p:spPr>
           <a:xfrm>
-            <a:off x="1024128" y="471509"/>
-            <a:ext cx="4389120" cy="1737360"/>
+            <a:off x="1141411" y="1600200"/>
+            <a:ext cx="3549121" cy="1371600"/>
           </a:xfrm>
         </p:spPr>
         <p:txBody>
-          <a:bodyPr>
-            <a:noAutofit/>
+          <a:bodyPr anchor="b">
+            <a:normAutofit/>
+          </a:bodyPr>
+          <a:lstStyle>
+            <a:lvl1pPr algn="l">
+              <a:defRPr sz="2400" b="0"/>
+            </a:lvl1pPr>
+          </a:lstStyle>
+          <a:p>
+            <a:r>
+              <a:rPr lang="en-US"/>
+              <a:t>Click to edit Master title style</a:t>
+            </a:r>
+            <a:endParaRPr lang="en-US" dirty="0"/>
+          </a:p>
+        </p:txBody>
+      </p:sp>
+      <p:sp>
+        <p:nvSpPr>
+          <p:cNvPr id="3" name="Content Placeholder 2"/>
+          <p:cNvSpPr>
+            <a:spLocks noGrp="1"/>
+          </p:cNvSpPr>
+          <p:nvPr>
+            <p:ph idx="1"/>
+          </p:nvPr>
+        </p:nvSpPr>
+        <p:spPr>
+          <a:xfrm>
+            <a:off x="5103812" y="609601"/>
+            <a:ext cx="5943601" cy="5181600"/>
+          </a:xfrm>
+        </p:spPr>
+        <p:txBody>
+          <a:bodyPr anchor="ctr">
+            <a:normAutofit/>
           </a:bodyPr>
           <a:lstStyle>
             <a:lvl1pPr>
-              <a:lnSpc>
-                <a:spcPct val="80000"/>
-              </a:lnSpc>
-              <a:defRPr sz="4000"/>
-            </a:lvl1pPr>
-          </a:lstStyle>
-          <a:p>
-            <a:r>
-              <a:rPr lang="en-US"/>
-              <a:t>Click to edit Master title style</a:t>
-            </a:r>
-            <a:endParaRPr lang="en-US" dirty="0"/>
-          </a:p>
-        </p:txBody>
-      </p:sp>
-      <p:sp>
-        <p:nvSpPr>
-          <p:cNvPr id="3" name="Content Placeholder 2"/>
-          <p:cNvSpPr>
-            <a:spLocks noGrp="1"/>
-          </p:cNvSpPr>
-          <p:nvPr>
-            <p:ph idx="1"/>
-          </p:nvPr>
-        </p:nvSpPr>
-        <p:spPr>
-          <a:xfrm>
-            <a:off x="5715000" y="822960"/>
-            <a:ext cx="5678424" cy="5184648"/>
-          </a:xfrm>
-        </p:spPr>
-        <p:txBody>
-          <a:bodyPr/>
-          <a:lstStyle>
-            <a:lvl1pPr>
-              <a:defRPr sz="2400"/>
+              <a:defRPr sz="2000"/>
             </a:lvl1pPr>
             <a:lvl2pPr>
-              <a:defRPr sz="2000"/>
+              <a:defRPr sz="1800"/>
             </a:lvl2pPr>
             <a:lvl3pPr>
               <a:defRPr sz="1600"/>
             </a:lvl3pPr>
             <a:lvl4pPr>
-              <a:defRPr sz="1600"/>
+              <a:defRPr sz="1400"/>
             </a:lvl4pPr>
             <a:lvl5pPr>
-              <a:defRPr sz="1600"/>
+              <a:defRPr sz="1400"/>
             </a:lvl5pPr>
             <a:lvl6pPr>
-              <a:defRPr sz="1600"/>
+              <a:defRPr sz="1400"/>
             </a:lvl6pPr>
             <a:lvl7pPr>
-              <a:defRPr sz="1600"/>
+              <a:defRPr sz="1400"/>
             </a:lvl7pPr>
             <a:lvl8pPr>
-              <a:defRPr sz="1600"/>
+              <a:defRPr sz="1400"/>
             </a:lvl8pPr>
             <a:lvl9pPr>
-              <a:defRPr sz="1600"/>
+              <a:defRPr sz="1400"/>
             </a:lvl9pPr>
           </a:lstStyle>
           <a:p>
@@ -2358,22 +4397,16 @@
         </p:nvSpPr>
         <p:spPr>
           <a:xfrm>
-            <a:off x="1024128" y="2257506"/>
-            <a:ext cx="4389120" cy="3762294"/>
+            <a:off x="1141411" y="2971800"/>
+            <a:ext cx="3549121" cy="1828800"/>
           </a:xfrm>
         </p:spPr>
         <p:txBody>
-          <a:bodyPr lIns="91440" rIns="91440">
+          <a:bodyPr>
             <a:normAutofit/>
           </a:bodyPr>
           <a:lstStyle>
             <a:lvl1pPr marL="0" indent="0">
-              <a:lnSpc>
-                <a:spcPct val="108000"/>
-              </a:lnSpc>
-              <a:spcBef>
-                <a:spcPts val="600"/>
-              </a:spcBef>
               <a:buNone/>
               <a:defRPr sz="1600"/>
             </a:lvl1pPr>
@@ -2436,7 +4469,7 @@
           <a:p>
             <a:fld id="{375FFD08-F7C0-48E6-986B-C0D568938D4A}" type="datetimeFigureOut">
               <a:rPr lang="en-IN" smtClean="0"/>
-              <a:t>24-04-2025</a:t>
+              <a:t>26-04-2025</a:t>
             </a:fld>
             <a:endParaRPr lang="en-IN"/>
           </a:p>
@@ -2487,7 +4520,7 @@
     </p:spTree>
     <p:extLst>
       <p:ext uri="{BB962C8B-B14F-4D97-AF65-F5344CB8AC3E}">
-        <p14:creationId xmlns:p14="http://schemas.microsoft.com/office/powerpoint/2010/main" val="3798259536"/>
+        <p14:creationId xmlns:p14="http://schemas.microsoft.com/office/powerpoint/2010/main" val="2037188629"/>
       </p:ext>
     </p:extLst>
   </p:cSld>
@@ -2498,7 +4531,7 @@
 </file>
 
 <file path=ppt/slideLayouts/slideLayout9.xml><?xml version="1.0" encoding="utf-8"?>
-<p:sldLayout xmlns:a="http://schemas.openxmlformats.org/drawingml/2006/main" xmlns:r="http://schemas.openxmlformats.org/officeDocument/2006/relationships" xmlns:p="http://schemas.openxmlformats.org/presentationml/2006/main" showMasterSp="0" type="picTx" preserve="1">
+<p:sldLayout xmlns:a="http://schemas.openxmlformats.org/drawingml/2006/main" xmlns:r="http://schemas.openxmlformats.org/officeDocument/2006/relationships" xmlns:p="http://schemas.openxmlformats.org/presentationml/2006/main" type="picTx" preserve="1">
   <p:cSld name="Picture with Caption">
     <p:spTree>
       <p:nvGrpSpPr>
@@ -2526,17 +4559,17 @@
         </p:nvSpPr>
         <p:spPr>
           <a:xfrm>
-            <a:off x="457200" y="4960138"/>
-            <a:ext cx="7772400" cy="1463040"/>
+            <a:off x="1141411" y="1600200"/>
+            <a:ext cx="5334001" cy="1371600"/>
           </a:xfrm>
         </p:spPr>
         <p:txBody>
-          <a:bodyPr anchor="ctr">
+          <a:bodyPr anchor="b">
             <a:normAutofit/>
           </a:bodyPr>
           <a:lstStyle>
-            <a:lvl1pPr algn="r">
-              <a:defRPr sz="5000" spc="200" baseline="0"/>
+            <a:lvl1pPr algn="l">
+              <a:defRPr sz="2800" b="0"/>
             </a:lvl1pPr>
           </a:lstStyle>
           <a:p>
@@ -2550,7 +4583,7 @@
       </p:sp>
       <p:sp>
         <p:nvSpPr>
-          <p:cNvPr id="3" name="Picture Placeholder 2"/>
+          <p:cNvPr id="14" name="Picture Placeholder 2"/>
           <p:cNvSpPr>
             <a:spLocks noGrp="1" noChangeAspect="1"/>
           </p:cNvSpPr>
@@ -2560,54 +4593,73 @@
         </p:nvSpPr>
         <p:spPr>
           <a:xfrm>
-            <a:off x="0" y="-1"/>
-            <a:ext cx="12188952" cy="4572000"/>
+            <a:off x="7433733" y="-18288"/>
+            <a:ext cx="3276599" cy="6903720"/>
           </a:xfrm>
-          <a:solidFill>
-            <a:schemeClr val="accent2">
-              <a:lumMod val="60000"/>
-              <a:lumOff val="40000"/>
-            </a:schemeClr>
-          </a:solidFill>
+          <a:ln w="38100">
+            <a:gradFill flip="none" rotWithShape="1">
+              <a:gsLst>
+                <a:gs pos="0">
+                  <a:schemeClr val="bg2"/>
+                </a:gs>
+                <a:gs pos="100000">
+                  <a:schemeClr val="bg2">
+                    <a:lumMod val="75000"/>
+                  </a:schemeClr>
+                </a:gs>
+              </a:gsLst>
+              <a:lin ang="5400000" scaled="0"/>
+              <a:tileRect/>
+            </a:gradFill>
+          </a:ln>
+          <a:effectLst>
+            <a:innerShdw blurRad="57150" dist="38100" dir="10800000">
+              <a:srgbClr val="000000">
+                <a:alpha val="70000"/>
+              </a:srgbClr>
+            </a:innerShdw>
+          </a:effectLst>
         </p:spPr>
         <p:txBody>
-          <a:bodyPr lIns="457200" tIns="365760" rIns="45720" bIns="45720" anchor="t"/>
+          <a:bodyPr anchor="t">
+            <a:normAutofit/>
+          </a:bodyPr>
           <a:lstStyle>
-            <a:lvl1pPr marL="0" indent="0">
-              <a:buNone/>
-              <a:defRPr sz="3200"/>
+            <a:lvl1pPr marL="0" indent="0" algn="ctr">
+              <a:buNone/>
+              <a:defRPr sz="1600"/>
             </a:lvl1pPr>
             <a:lvl2pPr marL="457200" indent="0">
               <a:buNone/>
-              <a:defRPr sz="2800"/>
+              <a:defRPr sz="1600"/>
             </a:lvl2pPr>
             <a:lvl3pPr marL="914400" indent="0">
               <a:buNone/>
-              <a:defRPr sz="2400"/>
+              <a:defRPr sz="1600"/>
             </a:lvl3pPr>
             <a:lvl4pPr marL="1371600" indent="0">
               <a:buNone/>
-              <a:defRPr sz="2000"/>
+              <a:defRPr sz="1600"/>
             </a:lvl4pPr>
             <a:lvl5pPr marL="1828800" indent="0">
               <a:buNone/>
-              <a:defRPr sz="2000"/>
+              <a:defRPr sz="1600"/>
             </a:lvl5pPr>
             <a:lvl6pPr marL="2286000" indent="0">
               <a:buNone/>
-              <a:defRPr sz="2000"/>
+              <a:defRPr sz="1600"/>
             </a:lvl6pPr>
             <a:lvl7pPr marL="2743200" indent="0">
               <a:buNone/>
-              <a:defRPr sz="2000"/>
+              <a:defRPr sz="1600"/>
             </a:lvl7pPr>
             <a:lvl8pPr marL="3200400" indent="0">
               <a:buNone/>
-              <a:defRPr sz="2000"/>
+              <a:defRPr sz="1600"/>
             </a:lvl8pPr>
             <a:lvl9pPr marL="3657600" indent="0">
               <a:buNone/>
-              <a:defRPr sz="2000"/>
+              <a:defRPr sz="1600"/>
             </a:lvl9pPr>
           </a:lstStyle>
           <a:p>
@@ -2631,63 +4683,50 @@
         </p:nvSpPr>
         <p:spPr>
           <a:xfrm>
-            <a:off x="8610600" y="4960138"/>
-            <a:ext cx="3200400" cy="1463040"/>
+            <a:off x="1141411" y="2971800"/>
+            <a:ext cx="5334001" cy="1828800"/>
           </a:xfrm>
         </p:spPr>
         <p:txBody>
-          <a:bodyPr lIns="91440" rIns="91440" anchor="ctr">
+          <a:bodyPr>
             <a:normAutofit/>
           </a:bodyPr>
           <a:lstStyle>
             <a:lvl1pPr marL="0" indent="0">
-              <a:lnSpc>
-                <a:spcPct val="100000"/>
-              </a:lnSpc>
-              <a:spcBef>
-                <a:spcPts val="0"/>
-              </a:spcBef>
-              <a:buNone/>
-              <a:defRPr sz="1800">
-                <a:solidFill>
-                  <a:schemeClr val="tx1">
-                    <a:lumMod val="95000"/>
-                    <a:lumOff val="5000"/>
-                  </a:schemeClr>
-                </a:solidFill>
-              </a:defRPr>
+              <a:buNone/>
+              <a:defRPr sz="1800"/>
             </a:lvl1pPr>
             <a:lvl2pPr marL="457200" indent="0">
               <a:buNone/>
-              <a:defRPr sz="1400"/>
+              <a:defRPr sz="1200"/>
             </a:lvl2pPr>
             <a:lvl3pPr marL="914400" indent="0">
               <a:buNone/>
-              <a:defRPr sz="1200"/>
+              <a:defRPr sz="1000"/>
             </a:lvl3pPr>
             <a:lvl4pPr marL="1371600" indent="0">
               <a:buNone/>
-              <a:defRPr sz="1000"/>
+              <a:defRPr sz="900"/>
             </a:lvl4pPr>
             <a:lvl5pPr marL="1828800" indent="0">
               <a:buNone/>
-              <a:defRPr sz="1000"/>
+              <a:defRPr sz="900"/>
             </a:lvl5pPr>
             <a:lvl6pPr marL="2286000" indent="0">
               <a:buNone/>
-              <a:defRPr sz="1000"/>
+              <a:defRPr sz="900"/>
             </a:lvl6pPr>
             <a:lvl7pPr marL="2743200" indent="0">
               <a:buNone/>
-              <a:defRPr sz="1000"/>
+              <a:defRPr sz="900"/>
             </a:lvl7pPr>
             <a:lvl8pPr marL="3200400" indent="0">
               <a:buNone/>
-              <a:defRPr sz="1000"/>
+              <a:defRPr sz="900"/>
             </a:lvl8pPr>
             <a:lvl9pPr marL="3657600" indent="0">
               <a:buNone/>
-              <a:defRPr sz="1000"/>
+              <a:defRPr sz="900"/>
             </a:lvl9pPr>
           </a:lstStyle>
           <a:p>
@@ -2709,14 +4748,19 @@
             <p:ph type="dt" sz="half" idx="10"/>
           </p:nvPr>
         </p:nvSpPr>
-        <p:spPr/>
+        <p:spPr>
+          <a:xfrm>
+            <a:off x="6399212" y="5883275"/>
+            <a:ext cx="914400" cy="365125"/>
+          </a:xfrm>
+        </p:spPr>
         <p:txBody>
           <a:bodyPr/>
           <a:lstStyle/>
           <a:p>
             <a:fld id="{375FFD08-F7C0-48E6-986B-C0D568938D4A}" type="datetimeFigureOut">
               <a:rPr lang="en-IN" smtClean="0"/>
-              <a:t>24-04-2025</a:t>
+              <a:t>26-04-2025</a:t>
             </a:fld>
             <a:endParaRPr lang="en-IN"/>
           </a:p>
@@ -2732,7 +4776,12 @@
             <p:ph type="ftr" sz="quarter" idx="11"/>
           </p:nvPr>
         </p:nvSpPr>
-        <p:spPr/>
+        <p:spPr>
+          <a:xfrm>
+            <a:off x="1141412" y="5883275"/>
+            <a:ext cx="5105400" cy="365125"/>
+          </a:xfrm>
+        </p:spPr>
         <p:txBody>
           <a:bodyPr/>
           <a:lstStyle/>
@@ -2751,7 +4800,12 @@
             <p:ph type="sldNum" sz="quarter" idx="12"/>
           </p:nvPr>
         </p:nvSpPr>
-        <p:spPr/>
+        <p:spPr>
+          <a:xfrm>
+            <a:off x="10742612" y="5883275"/>
+            <a:ext cx="322567" cy="365125"/>
+          </a:xfrm>
+        </p:spPr>
         <p:txBody>
           <a:bodyPr/>
           <a:lstStyle/>
@@ -2764,45 +4818,10 @@
           </a:p>
         </p:txBody>
       </p:sp>
-      <p:cxnSp>
-        <p:nvCxnSpPr>
-          <p:cNvPr id="8" name="Straight Connector 7"/>
-          <p:cNvCxnSpPr/>
-          <p:nvPr/>
-        </p:nvCxnSpPr>
-        <p:spPr>
-          <a:xfrm flipV="1">
-            <a:off x="8386843" y="5264106"/>
-            <a:ext cx="0" cy="914400"/>
-          </a:xfrm>
-          <a:prstGeom prst="line">
-            <a:avLst/>
-          </a:prstGeom>
-          <a:ln w="19050">
-            <a:solidFill>
-              <a:schemeClr val="accent1"/>
-            </a:solidFill>
-          </a:ln>
-        </p:spPr>
-        <p:style>
-          <a:lnRef idx="1">
-            <a:schemeClr val="accent1"/>
-          </a:lnRef>
-          <a:fillRef idx="0">
-            <a:schemeClr val="accent1"/>
-          </a:fillRef>
-          <a:effectRef idx="0">
-            <a:schemeClr val="accent1"/>
-          </a:effectRef>
-          <a:fontRef idx="minor">
-            <a:schemeClr val="tx1"/>
-          </a:fontRef>
-        </p:style>
-      </p:cxnSp>
     </p:spTree>
     <p:extLst>
       <p:ext uri="{BB962C8B-B14F-4D97-AF65-F5344CB8AC3E}">
-        <p14:creationId xmlns:p14="http://schemas.microsoft.com/office/powerpoint/2010/main" val="680241988"/>
+        <p14:creationId xmlns:p14="http://schemas.microsoft.com/office/powerpoint/2010/main" val="2240362984"/>
       </p:ext>
     </p:extLst>
   </p:cSld>
@@ -2816,8 +4835,8 @@
 <p:sldMaster xmlns:a="http://schemas.openxmlformats.org/drawingml/2006/main" xmlns:r="http://schemas.openxmlformats.org/officeDocument/2006/relationships" xmlns:p="http://schemas.openxmlformats.org/presentationml/2006/main">
   <p:cSld>
     <p:bg>
-      <p:bgRef idx="1001">
-        <a:schemeClr val="bg1"/>
+      <p:bgRef idx="1003">
+        <a:schemeClr val="bg2"/>
       </p:bgRef>
     </p:bg>
     <p:spTree>
@@ -2846,8 +4865,8 @@
         </p:nvSpPr>
         <p:spPr>
           <a:xfrm>
-            <a:off x="1024128" y="585216"/>
-            <a:ext cx="9720072" cy="1499616"/>
+            <a:off x="1141413" y="609600"/>
+            <a:ext cx="9905998" cy="1905000"/>
           </a:xfrm>
           <a:prstGeom prst="rect">
             <a:avLst/>
@@ -2879,15 +4898,15 @@
         </p:nvSpPr>
         <p:spPr>
           <a:xfrm>
-            <a:off x="1024128" y="2286000"/>
-            <a:ext cx="9720073" cy="4023360"/>
+            <a:off x="1141413" y="2666999"/>
+            <a:ext cx="9905998" cy="3124201"/>
           </a:xfrm>
           <a:prstGeom prst="rect">
             <a:avLst/>
           </a:prstGeom>
         </p:spPr>
         <p:txBody>
-          <a:bodyPr vert="horz" lIns="45720" tIns="45720" rIns="45720" bIns="45720" rtlCol="0">
+          <a:bodyPr vert="horz" lIns="91440" tIns="45720" rIns="91440" bIns="45720" rtlCol="0" anchor="ctr">
             <a:normAutofit/>
           </a:bodyPr>
           <a:lstStyle/>
@@ -2941,8 +4960,8 @@
         </p:nvSpPr>
         <p:spPr>
           <a:xfrm>
-            <a:off x="1024129" y="6470704"/>
-            <a:ext cx="2154143" cy="274320"/>
+            <a:off x="8837612" y="5883275"/>
+            <a:ext cx="1600200" cy="365125"/>
           </a:xfrm>
           <a:prstGeom prst="rect">
             <a:avLst/>
@@ -2951,22 +4970,28 @@
         <p:txBody>
           <a:bodyPr vert="horz" lIns="91440" tIns="45720" rIns="91440" bIns="45720" rtlCol="0" anchor="ctr"/>
           <a:lstStyle>
-            <a:lvl1pPr algn="l">
-              <a:defRPr sz="1000">
+            <a:lvl1pPr algn="r">
+              <a:defRPr sz="900" b="1" i="0">
                 <a:solidFill>
                   <a:schemeClr val="tx1">
-                    <a:lumMod val="95000"/>
-                    <a:lumOff val="5000"/>
+                    <a:lumMod val="75000"/>
                   </a:schemeClr>
                 </a:solidFill>
-                <a:latin typeface="+mj-lt"/>
+                <a:effectLst>
+                  <a:outerShdw blurRad="50800" dist="38100" dir="2700000" algn="tl" rotWithShape="0">
+                    <a:srgbClr val="000000">
+                      <a:alpha val="43000"/>
+                    </a:srgbClr>
+                  </a:outerShdw>
+                </a:effectLst>
+                <a:latin typeface="+mn-lt"/>
               </a:defRPr>
             </a:lvl1pPr>
           </a:lstStyle>
           <a:p>
             <a:fld id="{375FFD08-F7C0-48E6-986B-C0D568938D4A}" type="datetimeFigureOut">
               <a:rPr lang="en-IN" smtClean="0"/>
-              <a:t>24-04-2025</a:t>
+              <a:t>26-04-2025</a:t>
             </a:fld>
             <a:endParaRPr lang="en-IN"/>
           </a:p>
@@ -2984,8 +5009,8 @@
         </p:nvSpPr>
         <p:spPr>
           <a:xfrm>
-            <a:off x="4842932" y="6470704"/>
-            <a:ext cx="5901459" cy="274320"/>
+            <a:off x="1141412" y="5883275"/>
+            <a:ext cx="7543800" cy="365125"/>
           </a:xfrm>
           <a:prstGeom prst="rect">
             <a:avLst/>
@@ -2994,15 +5019,21 @@
         <p:txBody>
           <a:bodyPr vert="horz" lIns="91440" tIns="45720" rIns="91440" bIns="45720" rtlCol="0" anchor="ctr"/>
           <a:lstStyle>
-            <a:lvl1pPr algn="r">
-              <a:defRPr sz="1000" cap="all" baseline="0">
+            <a:lvl1pPr algn="l">
+              <a:defRPr sz="900" b="1" i="0">
                 <a:solidFill>
                   <a:schemeClr val="tx1">
-                    <a:lumMod val="95000"/>
-                    <a:lumOff val="5000"/>
+                    <a:lumMod val="75000"/>
                   </a:schemeClr>
                 </a:solidFill>
-                <a:latin typeface="+mj-lt"/>
+                <a:effectLst>
+                  <a:outerShdw blurRad="50800" dist="38100" dir="2700000" algn="tl" rotWithShape="0">
+                    <a:srgbClr val="000000">
+                      <a:alpha val="43000"/>
+                    </a:srgbClr>
+                  </a:outerShdw>
+                </a:effectLst>
+                <a:latin typeface="+mn-lt"/>
               </a:defRPr>
             </a:lvl1pPr>
           </a:lstStyle>
@@ -3023,8 +5054,8 @@
         </p:nvSpPr>
         <p:spPr>
           <a:xfrm>
-            <a:off x="10837333" y="6470704"/>
-            <a:ext cx="973667" cy="274320"/>
+            <a:off x="10514012" y="5883275"/>
+            <a:ext cx="551167" cy="365125"/>
           </a:xfrm>
           <a:prstGeom prst="rect">
             <a:avLst/>
@@ -3033,15 +5064,21 @@
         <p:txBody>
           <a:bodyPr vert="horz" lIns="91440" tIns="45720" rIns="91440" bIns="45720" rtlCol="0" anchor="ctr"/>
           <a:lstStyle>
-            <a:lvl1pPr algn="l">
-              <a:defRPr sz="1000">
+            <a:lvl1pPr algn="r">
+              <a:defRPr sz="900" b="1" i="0">
                 <a:solidFill>
                   <a:schemeClr val="tx1">
-                    <a:lumMod val="95000"/>
-                    <a:lumOff val="5000"/>
+                    <a:lumMod val="75000"/>
                   </a:schemeClr>
                 </a:solidFill>
-                <a:latin typeface="+mj-lt"/>
+                <a:effectLst>
+                  <a:outerShdw blurRad="50800" dist="38100" dir="2700000" algn="tl" rotWithShape="0">
+                    <a:srgbClr val="000000">
+                      <a:alpha val="43000"/>
+                    </a:srgbClr>
+                  </a:outerShdw>
+                </a:effectLst>
+                <a:latin typeface="+mn-lt"/>
               </a:defRPr>
             </a:lvl1pPr>
           </a:lstStyle>
@@ -3054,298 +5091,553 @@
           </a:p>
         </p:txBody>
       </p:sp>
-      <p:cxnSp>
-        <p:nvCxnSpPr>
-          <p:cNvPr id="8" name="Straight Connector 7"/>
-          <p:cNvCxnSpPr/>
-          <p:nvPr/>
-        </p:nvCxnSpPr>
-        <p:spPr>
-          <a:xfrm flipV="1">
-            <a:off x="762000" y="826324"/>
-            <a:ext cx="0" cy="914400"/>
-          </a:xfrm>
-          <a:prstGeom prst="line">
-            <a:avLst/>
-          </a:prstGeom>
-          <a:ln w="19050">
-            <a:solidFill>
-              <a:schemeClr val="accent2"/>
-            </a:solidFill>
-          </a:ln>
-        </p:spPr>
-        <p:style>
-          <a:lnRef idx="1">
-            <a:schemeClr val="accent1"/>
-          </a:lnRef>
-          <a:fillRef idx="0">
-            <a:schemeClr val="accent1"/>
-          </a:fillRef>
-          <a:effectRef idx="0">
-            <a:schemeClr val="accent1"/>
-          </a:effectRef>
-          <a:fontRef idx="minor">
-            <a:schemeClr val="tx1"/>
-          </a:fontRef>
-        </p:style>
-      </p:cxnSp>
     </p:spTree>
     <p:extLst>
       <p:ext uri="{BB962C8B-B14F-4D97-AF65-F5344CB8AC3E}">
-        <p14:creationId xmlns:p14="http://schemas.microsoft.com/office/powerpoint/2010/main" val="756908713"/>
+        <p14:creationId xmlns:p14="http://schemas.microsoft.com/office/powerpoint/2010/main" val="3560355595"/>
       </p:ext>
     </p:extLst>
   </p:cSld>
   <p:clrMap bg1="dk1" tx1="lt1" bg2="dk2" tx2="lt2" accent1="accent1" accent2="accent2" accent3="accent3" accent4="accent4" accent5="accent5" accent6="accent6" hlink="hlink" folHlink="folHlink"/>
   <p:sldLayoutIdLst>
-    <p:sldLayoutId id="2147483691" r:id="rId1"/>
-    <p:sldLayoutId id="2147483692" r:id="rId2"/>
-    <p:sldLayoutId id="2147483693" r:id="rId3"/>
-    <p:sldLayoutId id="2147483694" r:id="rId4"/>
-    <p:sldLayoutId id="2147483695" r:id="rId5"/>
-    <p:sldLayoutId id="2147483696" r:id="rId6"/>
-    <p:sldLayoutId id="2147483697" r:id="rId7"/>
-    <p:sldLayoutId id="2147483698" r:id="rId8"/>
-    <p:sldLayoutId id="2147483699" r:id="rId9"/>
-    <p:sldLayoutId id="2147483700" r:id="rId10"/>
-    <p:sldLayoutId id="2147483701" r:id="rId11"/>
+    <p:sldLayoutId id="2147483738" r:id="rId1"/>
+    <p:sldLayoutId id="2147483739" r:id="rId2"/>
+    <p:sldLayoutId id="2147483740" r:id="rId3"/>
+    <p:sldLayoutId id="2147483741" r:id="rId4"/>
+    <p:sldLayoutId id="2147483742" r:id="rId5"/>
+    <p:sldLayoutId id="2147483743" r:id="rId6"/>
+    <p:sldLayoutId id="2147483744" r:id="rId7"/>
+    <p:sldLayoutId id="2147483745" r:id="rId8"/>
+    <p:sldLayoutId id="2147483746" r:id="rId9"/>
+    <p:sldLayoutId id="2147483747" r:id="rId10"/>
+    <p:sldLayoutId id="2147483748" r:id="rId11"/>
+    <p:sldLayoutId id="2147483749" r:id="rId12"/>
+    <p:sldLayoutId id="2147483750" r:id="rId13"/>
+    <p:sldLayoutId id="2147483751" r:id="rId14"/>
+    <p:sldLayoutId id="2147483752" r:id="rId15"/>
+    <p:sldLayoutId id="2147483753" r:id="rId16"/>
+    <p:sldLayoutId id="2147483754" r:id="rId17"/>
   </p:sldLayoutIdLst>
   <p:txStyles>
     <p:titleStyle>
-      <a:lvl1pPr algn="l" defTabSz="914400" rtl="0" eaLnBrk="1" latinLnBrk="0" hangingPunct="1">
-        <a:lnSpc>
-          <a:spcPct val="80000"/>
-        </a:lnSpc>
+      <a:lvl1pPr algn="l" defTabSz="457200" rtl="0" eaLnBrk="1" latinLnBrk="0" hangingPunct="1">
         <a:spcBef>
           <a:spcPct val="0"/>
         </a:spcBef>
         <a:buNone/>
-        <a:defRPr sz="5000" kern="1200" cap="all" spc="100" baseline="0">
-          <a:solidFill>
-            <a:schemeClr val="tx1">
-              <a:lumMod val="95000"/>
-              <a:lumOff val="5000"/>
-            </a:schemeClr>
-          </a:solidFill>
+        <a:defRPr sz="3200" kern="1200" cap="all">
+          <a:ln w="3175" cmpd="sng">
+            <a:noFill/>
+          </a:ln>
+          <a:gradFill flip="none" rotWithShape="1">
+            <a:gsLst>
+              <a:gs pos="0">
+                <a:schemeClr val="tx1"/>
+              </a:gs>
+              <a:gs pos="100000">
+                <a:schemeClr val="tx1">
+                  <a:lumMod val="65000"/>
+                </a:schemeClr>
+              </a:gs>
+            </a:gsLst>
+            <a:lin ang="5580000" scaled="0"/>
+            <a:tileRect/>
+          </a:gradFill>
+          <a:effectLst>
+            <a:glow rad="38100">
+              <a:schemeClr val="bg1">
+                <a:lumMod val="65000"/>
+                <a:lumOff val="35000"/>
+                <a:alpha val="40000"/>
+              </a:schemeClr>
+            </a:glow>
+            <a:outerShdw blurRad="28575" dist="38100" dir="14040000" algn="tl" rotWithShape="0">
+              <a:srgbClr val="000000">
+                <a:alpha val="25000"/>
+              </a:srgbClr>
+            </a:outerShdw>
+          </a:effectLst>
           <a:latin typeface="+mj-lt"/>
           <a:ea typeface="+mj-ea"/>
           <a:cs typeface="+mj-cs"/>
         </a:defRPr>
       </a:lvl1pPr>
+      <a:lvl2pPr eaLnBrk="1" hangingPunct="1">
+        <a:defRPr>
+          <a:solidFill>
+            <a:schemeClr val="tx2"/>
+          </a:solidFill>
+        </a:defRPr>
+      </a:lvl2pPr>
+      <a:lvl3pPr eaLnBrk="1" hangingPunct="1">
+        <a:defRPr>
+          <a:solidFill>
+            <a:schemeClr val="tx2"/>
+          </a:solidFill>
+        </a:defRPr>
+      </a:lvl3pPr>
+      <a:lvl4pPr eaLnBrk="1" hangingPunct="1">
+        <a:defRPr>
+          <a:solidFill>
+            <a:schemeClr val="tx2"/>
+          </a:solidFill>
+        </a:defRPr>
+      </a:lvl4pPr>
+      <a:lvl5pPr eaLnBrk="1" hangingPunct="1">
+        <a:defRPr>
+          <a:solidFill>
+            <a:schemeClr val="tx2"/>
+          </a:solidFill>
+        </a:defRPr>
+      </a:lvl5pPr>
+      <a:lvl6pPr eaLnBrk="1" hangingPunct="1">
+        <a:defRPr>
+          <a:solidFill>
+            <a:schemeClr val="tx2"/>
+          </a:solidFill>
+        </a:defRPr>
+      </a:lvl6pPr>
+      <a:lvl7pPr eaLnBrk="1" hangingPunct="1">
+        <a:defRPr>
+          <a:solidFill>
+            <a:schemeClr val="tx2"/>
+          </a:solidFill>
+        </a:defRPr>
+      </a:lvl7pPr>
+      <a:lvl8pPr eaLnBrk="1" hangingPunct="1">
+        <a:defRPr>
+          <a:solidFill>
+            <a:schemeClr val="tx2"/>
+          </a:solidFill>
+        </a:defRPr>
+      </a:lvl8pPr>
+      <a:lvl9pPr eaLnBrk="1" hangingPunct="1">
+        <a:defRPr>
+          <a:solidFill>
+            <a:schemeClr val="tx2"/>
+          </a:solidFill>
+        </a:defRPr>
+      </a:lvl9pPr>
     </p:titleStyle>
     <p:bodyStyle>
-      <a:lvl1pPr marL="91440" indent="-91440" algn="l" defTabSz="914400" rtl="0" eaLnBrk="1" latinLnBrk="0" hangingPunct="1">
-        <a:lnSpc>
-          <a:spcPct val="90000"/>
-        </a:lnSpc>
+      <a:lvl1pPr marL="285750" indent="-285750" algn="l" defTabSz="457200" rtl="0" eaLnBrk="1" latinLnBrk="0" hangingPunct="1">
         <a:spcBef>
-          <a:spcPts val="1200"/>
+          <a:spcPct val="20000"/>
         </a:spcBef>
         <a:spcAft>
-          <a:spcPts val="200"/>
+          <a:spcPts val="600"/>
         </a:spcAft>
         <a:buClr>
-          <a:schemeClr val="accent2"/>
+          <a:schemeClr val="tx1"/>
         </a:buClr>
         <a:buSzPct val="100000"/>
-        <a:buFont typeface="Tw Cen MT" panose="020B0602020104020603" pitchFamily="34" charset="0"/>
-        <a:buChar char=" "/>
-        <a:defRPr sz="2200" kern="1200">
-          <a:solidFill>
-            <a:schemeClr val="tx1"/>
-          </a:solidFill>
+        <a:buFont typeface="Arial"/>
+        <a:buChar char="•"/>
+        <a:defRPr sz="2000" kern="1200" cap="small">
+          <a:gradFill flip="none" rotWithShape="1">
+            <a:gsLst>
+              <a:gs pos="0">
+                <a:schemeClr val="tx1"/>
+              </a:gs>
+              <a:gs pos="100000">
+                <a:schemeClr val="tx1">
+                  <a:lumMod val="75000"/>
+                </a:schemeClr>
+              </a:gs>
+            </a:gsLst>
+            <a:lin ang="5580000" scaled="0"/>
+            <a:tileRect/>
+          </a:gradFill>
+          <a:effectLst>
+            <a:glow rad="38100">
+              <a:schemeClr val="bg1">
+                <a:lumMod val="50000"/>
+                <a:lumOff val="50000"/>
+                <a:alpha val="20000"/>
+              </a:schemeClr>
+            </a:glow>
+            <a:outerShdw blurRad="44450" dist="12700" dir="13860000" algn="tl" rotWithShape="0">
+              <a:srgbClr val="000000">
+                <a:alpha val="20000"/>
+              </a:srgbClr>
+            </a:outerShdw>
+          </a:effectLst>
           <a:latin typeface="+mn-lt"/>
           <a:ea typeface="+mn-ea"/>
           <a:cs typeface="+mn-cs"/>
         </a:defRPr>
       </a:lvl1pPr>
-      <a:lvl2pPr marL="265176" indent="-137160" algn="l" defTabSz="914400" rtl="0" eaLnBrk="1" latinLnBrk="0" hangingPunct="1">
-        <a:lnSpc>
-          <a:spcPct val="90000"/>
-        </a:lnSpc>
+      <a:lvl2pPr marL="742950" indent="-285750" algn="l" defTabSz="457200" rtl="0" eaLnBrk="1" latinLnBrk="0" hangingPunct="1">
         <a:spcBef>
-          <a:spcPts val="200"/>
+          <a:spcPct val="20000"/>
         </a:spcBef>
         <a:spcAft>
-          <a:spcPts val="400"/>
+          <a:spcPts val="600"/>
         </a:spcAft>
         <a:buClr>
-          <a:schemeClr val="accent2"/>
+          <a:schemeClr val="tx1"/>
         </a:buClr>
-        <a:buFont typeface="Wingdings 3" pitchFamily="18" charset="2"/>
-        <a:buChar char=""/>
-        <a:defRPr sz="1800" kern="1200">
-          <a:solidFill>
-            <a:schemeClr val="tx1"/>
-          </a:solidFill>
+        <a:buSzPct val="100000"/>
+        <a:buFont typeface="Arial"/>
+        <a:buChar char="•"/>
+        <a:defRPr sz="1800" kern="1200" cap="small">
+          <a:gradFill flip="none" rotWithShape="1">
+            <a:gsLst>
+              <a:gs pos="0">
+                <a:schemeClr val="tx1"/>
+              </a:gs>
+              <a:gs pos="100000">
+                <a:schemeClr val="tx1">
+                  <a:lumMod val="75000"/>
+                </a:schemeClr>
+              </a:gs>
+            </a:gsLst>
+            <a:lin ang="5580000" scaled="0"/>
+            <a:tileRect/>
+          </a:gradFill>
+          <a:effectLst>
+            <a:glow rad="38100">
+              <a:schemeClr val="bg1">
+                <a:lumMod val="50000"/>
+                <a:lumOff val="50000"/>
+                <a:alpha val="20000"/>
+              </a:schemeClr>
+            </a:glow>
+            <a:outerShdw blurRad="44450" dist="12700" dir="13860000" algn="tl" rotWithShape="0">
+              <a:srgbClr val="000000">
+                <a:alpha val="20000"/>
+              </a:srgbClr>
+            </a:outerShdw>
+          </a:effectLst>
           <a:latin typeface="+mn-lt"/>
           <a:ea typeface="+mn-ea"/>
           <a:cs typeface="+mn-cs"/>
         </a:defRPr>
       </a:lvl2pPr>
-      <a:lvl3pPr marL="448056" indent="-137160" algn="l" defTabSz="914400" rtl="0" eaLnBrk="1" latinLnBrk="0" hangingPunct="1">
-        <a:lnSpc>
-          <a:spcPct val="90000"/>
-        </a:lnSpc>
+      <a:lvl3pPr marL="1200150" indent="-285750" algn="l" defTabSz="457200" rtl="0" eaLnBrk="1" latinLnBrk="0" hangingPunct="1">
         <a:spcBef>
-          <a:spcPts val="200"/>
+          <a:spcPct val="20000"/>
         </a:spcBef>
         <a:spcAft>
-          <a:spcPts val="400"/>
+          <a:spcPts val="600"/>
         </a:spcAft>
         <a:buClr>
-          <a:schemeClr val="accent2"/>
+          <a:schemeClr val="tx1"/>
         </a:buClr>
-        <a:buFont typeface="Wingdings 3" pitchFamily="18" charset="2"/>
-        <a:buChar char=""/>
-        <a:defRPr sz="1400" kern="1200">
-          <a:solidFill>
-            <a:schemeClr val="tx1"/>
-          </a:solidFill>
+        <a:buSzPct val="100000"/>
+        <a:buFont typeface="Arial"/>
+        <a:buChar char="•"/>
+        <a:defRPr sz="1600" kern="1200" cap="small">
+          <a:gradFill flip="none" rotWithShape="1">
+            <a:gsLst>
+              <a:gs pos="0">
+                <a:schemeClr val="tx1"/>
+              </a:gs>
+              <a:gs pos="100000">
+                <a:schemeClr val="tx1">
+                  <a:lumMod val="75000"/>
+                </a:schemeClr>
+              </a:gs>
+            </a:gsLst>
+            <a:lin ang="5580000" scaled="0"/>
+            <a:tileRect/>
+          </a:gradFill>
+          <a:effectLst>
+            <a:glow rad="38100">
+              <a:schemeClr val="bg1">
+                <a:lumMod val="50000"/>
+                <a:lumOff val="50000"/>
+                <a:alpha val="20000"/>
+              </a:schemeClr>
+            </a:glow>
+            <a:outerShdw blurRad="44450" dist="12700" dir="13860000" algn="tl" rotWithShape="0">
+              <a:srgbClr val="000000">
+                <a:alpha val="20000"/>
+              </a:srgbClr>
+            </a:outerShdw>
+          </a:effectLst>
           <a:latin typeface="+mn-lt"/>
           <a:ea typeface="+mn-ea"/>
           <a:cs typeface="+mn-cs"/>
         </a:defRPr>
       </a:lvl3pPr>
-      <a:lvl4pPr marL="594360" indent="-137160" algn="l" defTabSz="914400" rtl="0" eaLnBrk="1" latinLnBrk="0" hangingPunct="1">
-        <a:lnSpc>
-          <a:spcPct val="90000"/>
-        </a:lnSpc>
+      <a:lvl4pPr marL="1543050" indent="-171450" algn="l" defTabSz="457200" rtl="0" eaLnBrk="1" latinLnBrk="0" hangingPunct="1">
         <a:spcBef>
-          <a:spcPts val="200"/>
+          <a:spcPct val="20000"/>
         </a:spcBef>
         <a:spcAft>
-          <a:spcPts val="400"/>
+          <a:spcPts val="600"/>
         </a:spcAft>
         <a:buClr>
-          <a:schemeClr val="accent2"/>
+          <a:schemeClr val="tx1"/>
         </a:buClr>
-        <a:buFont typeface="Wingdings 3" pitchFamily="18" charset="2"/>
-        <a:buChar char=""/>
-        <a:defRPr sz="1400" kern="1200">
-          <a:solidFill>
-            <a:schemeClr val="tx1"/>
-          </a:solidFill>
+        <a:buSzPct val="100000"/>
+        <a:buFont typeface="Arial"/>
+        <a:buChar char="•"/>
+        <a:defRPr sz="1400" kern="1200" cap="small">
+          <a:gradFill flip="none" rotWithShape="1">
+            <a:gsLst>
+              <a:gs pos="0">
+                <a:schemeClr val="tx1"/>
+              </a:gs>
+              <a:gs pos="100000">
+                <a:schemeClr val="tx1">
+                  <a:lumMod val="75000"/>
+                </a:schemeClr>
+              </a:gs>
+            </a:gsLst>
+            <a:lin ang="5580000" scaled="0"/>
+            <a:tileRect/>
+          </a:gradFill>
+          <a:effectLst>
+            <a:glow rad="38100">
+              <a:schemeClr val="bg1">
+                <a:lumMod val="50000"/>
+                <a:lumOff val="50000"/>
+                <a:alpha val="20000"/>
+              </a:schemeClr>
+            </a:glow>
+            <a:outerShdw blurRad="44450" dist="12700" dir="13860000" algn="tl" rotWithShape="0">
+              <a:srgbClr val="000000">
+                <a:alpha val="20000"/>
+              </a:srgbClr>
+            </a:outerShdw>
+          </a:effectLst>
           <a:latin typeface="+mn-lt"/>
           <a:ea typeface="+mn-ea"/>
           <a:cs typeface="+mn-cs"/>
         </a:defRPr>
       </a:lvl4pPr>
-      <a:lvl5pPr marL="777240" indent="-137160" algn="l" defTabSz="914400" rtl="0" eaLnBrk="1" latinLnBrk="0" hangingPunct="1">
-        <a:lnSpc>
-          <a:spcPct val="90000"/>
-        </a:lnSpc>
+      <a:lvl5pPr marL="2000250" indent="-171450" algn="l" defTabSz="457200" rtl="0" eaLnBrk="1" latinLnBrk="0" hangingPunct="1">
         <a:spcBef>
-          <a:spcPts val="200"/>
+          <a:spcPct val="20000"/>
         </a:spcBef>
         <a:spcAft>
-          <a:spcPts val="400"/>
+          <a:spcPts val="600"/>
         </a:spcAft>
         <a:buClr>
-          <a:schemeClr val="accent2"/>
+          <a:schemeClr val="tx1"/>
         </a:buClr>
-        <a:buFont typeface="Wingdings 3" pitchFamily="18" charset="2"/>
-        <a:buChar char=""/>
-        <a:defRPr sz="1400" kern="1200">
-          <a:solidFill>
-            <a:schemeClr val="tx1"/>
-          </a:solidFill>
+        <a:buSzPct val="100000"/>
+        <a:buFont typeface="Arial"/>
+        <a:buChar char="•"/>
+        <a:defRPr sz="1400" kern="1200" cap="small">
+          <a:gradFill flip="none" rotWithShape="1">
+            <a:gsLst>
+              <a:gs pos="0">
+                <a:schemeClr val="tx1"/>
+              </a:gs>
+              <a:gs pos="100000">
+                <a:schemeClr val="tx1">
+                  <a:lumMod val="75000"/>
+                </a:schemeClr>
+              </a:gs>
+            </a:gsLst>
+            <a:lin ang="5580000" scaled="0"/>
+            <a:tileRect/>
+          </a:gradFill>
+          <a:effectLst>
+            <a:glow rad="38100">
+              <a:schemeClr val="bg1">
+                <a:lumMod val="50000"/>
+                <a:lumOff val="50000"/>
+                <a:alpha val="20000"/>
+              </a:schemeClr>
+            </a:glow>
+            <a:outerShdw blurRad="44450" dist="12700" dir="13860000" algn="tl" rotWithShape="0">
+              <a:srgbClr val="000000">
+                <a:alpha val="20000"/>
+              </a:srgbClr>
+            </a:outerShdw>
+          </a:effectLst>
           <a:latin typeface="+mn-lt"/>
           <a:ea typeface="+mn-ea"/>
           <a:cs typeface="+mn-cs"/>
         </a:defRPr>
       </a:lvl5pPr>
-      <a:lvl6pPr marL="914400" indent="-137160" algn="l" defTabSz="914400" rtl="0" eaLnBrk="1" latinLnBrk="0" hangingPunct="1">
-        <a:lnSpc>
-          <a:spcPct val="90000"/>
-        </a:lnSpc>
+      <a:lvl6pPr marL="2514600" indent="-228600" algn="l" defTabSz="457200" rtl="0" eaLnBrk="1" latinLnBrk="0" hangingPunct="1">
         <a:spcBef>
-          <a:spcPts val="200"/>
+          <a:spcPct val="20000"/>
         </a:spcBef>
         <a:spcAft>
-          <a:spcPts val="400"/>
+          <a:spcPts val="600"/>
         </a:spcAft>
         <a:buClr>
-          <a:schemeClr val="accent2"/>
+          <a:schemeClr val="tx1"/>
         </a:buClr>
-        <a:buFont typeface="Wingdings 3" pitchFamily="18" charset="2"/>
-        <a:buChar char=""/>
-        <a:defRPr sz="1400" kern="1200">
-          <a:solidFill>
-            <a:schemeClr val="tx1"/>
-          </a:solidFill>
+        <a:buSzPct val="100000"/>
+        <a:buFont typeface="Arial"/>
+        <a:buChar char="•"/>
+        <a:defRPr sz="1200" kern="1200" cap="small">
+          <a:gradFill flip="none" rotWithShape="1">
+            <a:gsLst>
+              <a:gs pos="0">
+                <a:schemeClr val="tx1"/>
+              </a:gs>
+              <a:gs pos="100000">
+                <a:schemeClr val="tx1">
+                  <a:lumMod val="75000"/>
+                </a:schemeClr>
+              </a:gs>
+            </a:gsLst>
+            <a:lin ang="5580000" scaled="0"/>
+            <a:tileRect/>
+          </a:gradFill>
+          <a:effectLst>
+            <a:glow rad="38100">
+              <a:schemeClr val="bg1">
+                <a:lumMod val="50000"/>
+                <a:lumOff val="50000"/>
+                <a:alpha val="20000"/>
+              </a:schemeClr>
+            </a:glow>
+            <a:outerShdw blurRad="44450" dist="12700" dir="13860000" algn="tl" rotWithShape="0">
+              <a:srgbClr val="000000">
+                <a:alpha val="20000"/>
+              </a:srgbClr>
+            </a:outerShdw>
+          </a:effectLst>
           <a:latin typeface="+mn-lt"/>
           <a:ea typeface="+mn-ea"/>
           <a:cs typeface="+mn-cs"/>
         </a:defRPr>
       </a:lvl6pPr>
-      <a:lvl7pPr marL="1060704" indent="-137160" algn="l" defTabSz="914400" rtl="0" eaLnBrk="1" latinLnBrk="0" hangingPunct="1">
-        <a:lnSpc>
-          <a:spcPct val="90000"/>
-        </a:lnSpc>
+      <a:lvl7pPr marL="2971800" indent="-228600" algn="l" defTabSz="457200" rtl="0" eaLnBrk="1" latinLnBrk="0" hangingPunct="1">
         <a:spcBef>
-          <a:spcPts val="200"/>
+          <a:spcPct val="20000"/>
         </a:spcBef>
         <a:spcAft>
-          <a:spcPts val="400"/>
+          <a:spcPts val="600"/>
         </a:spcAft>
         <a:buClr>
-          <a:schemeClr val="accent2"/>
+          <a:schemeClr val="tx1"/>
         </a:buClr>
-        <a:buFont typeface="Wingdings 3" pitchFamily="18" charset="2"/>
-        <a:buChar char=""/>
-        <a:defRPr sz="1400" kern="1200">
-          <a:solidFill>
-            <a:schemeClr val="tx1"/>
-          </a:solidFill>
+        <a:buSzPct val="100000"/>
+        <a:buFont typeface="Arial"/>
+        <a:buChar char="•"/>
+        <a:defRPr sz="1200" kern="1200" cap="small">
+          <a:gradFill flip="none" rotWithShape="1">
+            <a:gsLst>
+              <a:gs pos="0">
+                <a:schemeClr val="tx1"/>
+              </a:gs>
+              <a:gs pos="100000">
+                <a:schemeClr val="tx1">
+                  <a:lumMod val="75000"/>
+                </a:schemeClr>
+              </a:gs>
+            </a:gsLst>
+            <a:lin ang="5580000" scaled="0"/>
+            <a:tileRect/>
+          </a:gradFill>
+          <a:effectLst>
+            <a:glow rad="38100">
+              <a:schemeClr val="bg1">
+                <a:lumMod val="50000"/>
+                <a:lumOff val="50000"/>
+                <a:alpha val="20000"/>
+              </a:schemeClr>
+            </a:glow>
+            <a:outerShdw blurRad="44450" dist="12700" dir="13860000" algn="tl" rotWithShape="0">
+              <a:srgbClr val="000000">
+                <a:alpha val="20000"/>
+              </a:srgbClr>
+            </a:outerShdw>
+          </a:effectLst>
           <a:latin typeface="+mn-lt"/>
           <a:ea typeface="+mn-ea"/>
           <a:cs typeface="+mn-cs"/>
         </a:defRPr>
       </a:lvl7pPr>
-      <a:lvl8pPr marL="1216152" indent="-137160" algn="l" defTabSz="914400" rtl="0" eaLnBrk="1" latinLnBrk="0" hangingPunct="1">
-        <a:lnSpc>
-          <a:spcPct val="90000"/>
-        </a:lnSpc>
+      <a:lvl8pPr marL="3429000" indent="-228600" algn="l" defTabSz="457200" rtl="0" eaLnBrk="1" latinLnBrk="0" hangingPunct="1">
         <a:spcBef>
-          <a:spcPts val="200"/>
+          <a:spcPct val="20000"/>
         </a:spcBef>
         <a:spcAft>
-          <a:spcPts val="400"/>
+          <a:spcPts val="600"/>
         </a:spcAft>
         <a:buClr>
-          <a:schemeClr val="accent2"/>
+          <a:schemeClr val="tx1"/>
         </a:buClr>
-        <a:buFont typeface="Wingdings 3" pitchFamily="18" charset="2"/>
-        <a:buChar char=""/>
-        <a:defRPr sz="1400" kern="1200">
-          <a:solidFill>
-            <a:schemeClr val="tx1"/>
-          </a:solidFill>
+        <a:buSzPct val="100000"/>
+        <a:buFont typeface="Arial"/>
+        <a:buChar char="•"/>
+        <a:defRPr sz="1200" kern="1200" cap="small">
+          <a:gradFill flip="none" rotWithShape="1">
+            <a:gsLst>
+              <a:gs pos="0">
+                <a:schemeClr val="tx1"/>
+              </a:gs>
+              <a:gs pos="100000">
+                <a:schemeClr val="tx1">
+                  <a:lumMod val="75000"/>
+                </a:schemeClr>
+              </a:gs>
+            </a:gsLst>
+            <a:lin ang="5580000" scaled="0"/>
+            <a:tileRect/>
+          </a:gradFill>
+          <a:effectLst>
+            <a:glow rad="38100">
+              <a:schemeClr val="bg1">
+                <a:lumMod val="50000"/>
+                <a:lumOff val="50000"/>
+                <a:alpha val="20000"/>
+              </a:schemeClr>
+            </a:glow>
+            <a:outerShdw blurRad="44450" dist="12700" dir="13860000" algn="tl" rotWithShape="0">
+              <a:srgbClr val="000000">
+                <a:alpha val="20000"/>
+              </a:srgbClr>
+            </a:outerShdw>
+          </a:effectLst>
           <a:latin typeface="+mn-lt"/>
           <a:ea typeface="+mn-ea"/>
           <a:cs typeface="+mn-cs"/>
         </a:defRPr>
       </a:lvl8pPr>
-      <a:lvl9pPr marL="1362456" indent="-137160" algn="l" defTabSz="914400" rtl="0" eaLnBrk="1" latinLnBrk="0" hangingPunct="1">
-        <a:lnSpc>
-          <a:spcPct val="90000"/>
-        </a:lnSpc>
+      <a:lvl9pPr marL="3886200" indent="-228600" algn="l" defTabSz="457200" rtl="0" eaLnBrk="1" latinLnBrk="0" hangingPunct="1">
         <a:spcBef>
-          <a:spcPts val="200"/>
+          <a:spcPct val="20000"/>
         </a:spcBef>
         <a:spcAft>
-          <a:spcPts val="400"/>
+          <a:spcPts val="600"/>
         </a:spcAft>
         <a:buClr>
-          <a:schemeClr val="accent2"/>
+          <a:schemeClr val="tx1"/>
         </a:buClr>
-        <a:buFont typeface="Wingdings 3" pitchFamily="18" charset="2"/>
-        <a:buChar char=""/>
-        <a:defRPr sz="1400" kern="1200">
-          <a:solidFill>
-            <a:schemeClr val="tx1"/>
-          </a:solidFill>
+        <a:buSzPct val="100000"/>
+        <a:buFont typeface="Arial"/>
+        <a:buChar char="•"/>
+        <a:defRPr sz="1200" kern="1200" cap="small">
+          <a:gradFill flip="none" rotWithShape="1">
+            <a:gsLst>
+              <a:gs pos="0">
+                <a:schemeClr val="tx1"/>
+              </a:gs>
+              <a:gs pos="100000">
+                <a:schemeClr val="tx1">
+                  <a:lumMod val="75000"/>
+                </a:schemeClr>
+              </a:gs>
+            </a:gsLst>
+            <a:lin ang="5580000" scaled="0"/>
+            <a:tileRect/>
+          </a:gradFill>
+          <a:effectLst>
+            <a:glow rad="38100">
+              <a:schemeClr val="bg1">
+                <a:lumMod val="50000"/>
+                <a:lumOff val="50000"/>
+                <a:alpha val="20000"/>
+              </a:schemeClr>
+            </a:glow>
+            <a:outerShdw blurRad="44450" dist="12700" dir="13860000" algn="tl" rotWithShape="0">
+              <a:srgbClr val="000000">
+                <a:alpha val="20000"/>
+              </a:srgbClr>
+            </a:outerShdw>
+          </a:effectLst>
           <a:latin typeface="+mn-lt"/>
           <a:ea typeface="+mn-ea"/>
           <a:cs typeface="+mn-cs"/>
@@ -3356,7 +5648,7 @@
       <a:defPPr>
         <a:defRPr lang="en-US"/>
       </a:defPPr>
-      <a:lvl1pPr marL="0" algn="l" defTabSz="914400" rtl="0" eaLnBrk="1" latinLnBrk="0" hangingPunct="1">
+      <a:lvl1pPr marL="0" algn="l" defTabSz="457200" rtl="0" eaLnBrk="1" latinLnBrk="0" hangingPunct="1">
         <a:defRPr sz="1800" kern="1200">
           <a:solidFill>
             <a:schemeClr val="tx1"/>
@@ -3366,7 +5658,7 @@
           <a:cs typeface="+mn-cs"/>
         </a:defRPr>
       </a:lvl1pPr>
-      <a:lvl2pPr marL="457200" algn="l" defTabSz="914400" rtl="0" eaLnBrk="1" latinLnBrk="0" hangingPunct="1">
+      <a:lvl2pPr marL="457200" algn="l" defTabSz="457200" rtl="0" eaLnBrk="1" latinLnBrk="0" hangingPunct="1">
         <a:defRPr sz="1800" kern="1200">
           <a:solidFill>
             <a:schemeClr val="tx1"/>
@@ -3376,7 +5668,7 @@
           <a:cs typeface="+mn-cs"/>
         </a:defRPr>
       </a:lvl2pPr>
-      <a:lvl3pPr marL="914400" algn="l" defTabSz="914400" rtl="0" eaLnBrk="1" latinLnBrk="0" hangingPunct="1">
+      <a:lvl3pPr marL="914400" algn="l" defTabSz="457200" rtl="0" eaLnBrk="1" latinLnBrk="0" hangingPunct="1">
         <a:defRPr sz="1800" kern="1200">
           <a:solidFill>
             <a:schemeClr val="tx1"/>
@@ -3386,7 +5678,7 @@
           <a:cs typeface="+mn-cs"/>
         </a:defRPr>
       </a:lvl3pPr>
-      <a:lvl4pPr marL="1371600" algn="l" defTabSz="914400" rtl="0" eaLnBrk="1" latinLnBrk="0" hangingPunct="1">
+      <a:lvl4pPr marL="1371600" algn="l" defTabSz="457200" rtl="0" eaLnBrk="1" latinLnBrk="0" hangingPunct="1">
         <a:defRPr sz="1800" kern="1200">
           <a:solidFill>
             <a:schemeClr val="tx1"/>
@@ -3396,7 +5688,7 @@
           <a:cs typeface="+mn-cs"/>
         </a:defRPr>
       </a:lvl4pPr>
-      <a:lvl5pPr marL="1828800" algn="l" defTabSz="914400" rtl="0" eaLnBrk="1" latinLnBrk="0" hangingPunct="1">
+      <a:lvl5pPr marL="1828800" algn="l" defTabSz="457200" rtl="0" eaLnBrk="1" latinLnBrk="0" hangingPunct="1">
         <a:defRPr sz="1800" kern="1200">
           <a:solidFill>
             <a:schemeClr val="tx1"/>
@@ -3406,7 +5698,7 @@
           <a:cs typeface="+mn-cs"/>
         </a:defRPr>
       </a:lvl5pPr>
-      <a:lvl6pPr marL="2286000" algn="l" defTabSz="914400" rtl="0" eaLnBrk="1" latinLnBrk="0" hangingPunct="1">
+      <a:lvl6pPr marL="2286000" algn="l" defTabSz="457200" rtl="0" eaLnBrk="1" latinLnBrk="0" hangingPunct="1">
         <a:defRPr sz="1800" kern="1200">
           <a:solidFill>
             <a:schemeClr val="tx1"/>
@@ -3416,7 +5708,7 @@
           <a:cs typeface="+mn-cs"/>
         </a:defRPr>
       </a:lvl6pPr>
-      <a:lvl7pPr marL="2743200" algn="l" defTabSz="914400" rtl="0" eaLnBrk="1" latinLnBrk="0" hangingPunct="1">
+      <a:lvl7pPr marL="2743200" algn="l" defTabSz="457200" rtl="0" eaLnBrk="1" latinLnBrk="0" hangingPunct="1">
         <a:defRPr sz="1800" kern="1200">
           <a:solidFill>
             <a:schemeClr val="tx1"/>
@@ -3426,7 +5718,7 @@
           <a:cs typeface="+mn-cs"/>
         </a:defRPr>
       </a:lvl7pPr>
-      <a:lvl8pPr marL="3200400" algn="l" defTabSz="914400" rtl="0" eaLnBrk="1" latinLnBrk="0" hangingPunct="1">
+      <a:lvl8pPr marL="3200400" algn="l" defTabSz="457200" rtl="0" eaLnBrk="1" latinLnBrk="0" hangingPunct="1">
         <a:defRPr sz="1800" kern="1200">
           <a:solidFill>
             <a:schemeClr val="tx1"/>
@@ -3436,7 +5728,7 @@
           <a:cs typeface="+mn-cs"/>
         </a:defRPr>
       </a:lvl8pPr>
-      <a:lvl9pPr marL="3657600" algn="l" defTabSz="914400" rtl="0" eaLnBrk="1" latinLnBrk="0" hangingPunct="1">
+      <a:lvl9pPr marL="3657600" algn="l" defTabSz="457200" rtl="0" eaLnBrk="1" latinLnBrk="0" hangingPunct="1">
         <a:defRPr sz="1800" kern="1200">
           <a:solidFill>
             <a:schemeClr val="tx1"/>
@@ -3609,7 +5901,12 @@
             <p:ph type="subTitle" idx="1"/>
           </p:nvPr>
         </p:nvSpPr>
-        <p:spPr/>
+        <p:spPr>
+          <a:xfrm>
+            <a:off x="7630886" y="3810000"/>
+            <a:ext cx="4038600" cy="1905000"/>
+          </a:xfrm>
+        </p:spPr>
         <p:txBody>
           <a:bodyPr>
             <a:normAutofit fontScale="25000" lnSpcReduction="20000"/>
@@ -3774,8 +6071,8 @@
         </p:blipFill>
         <p:spPr>
           <a:xfrm>
-            <a:off x="7369629" y="1333167"/>
-            <a:ext cx="4441371" cy="1543050"/>
+            <a:off x="6596743" y="1333166"/>
+            <a:ext cx="5214258" cy="2324433"/>
           </a:xfrm>
           <a:prstGeom prst="rect">
             <a:avLst/>
@@ -3843,7 +6140,7 @@
             <a:r>
               <a:rPr lang="en-IN" sz="4400" b="1" dirty="0">
                 <a:solidFill>
-                  <a:schemeClr val="accent1"/>
+                  <a:schemeClr val="accent4"/>
                 </a:solidFill>
                 <a:latin typeface="Arial" panose="020B0604020202020204" pitchFamily="34" charset="0"/>
                 <a:cs typeface="Arial" panose="020B0604020202020204" pitchFamily="34" charset="0"/>
@@ -3852,7 +6149,7 @@
             </a:r>
             <a:endParaRPr lang="en-IN" sz="4400" dirty="0">
               <a:solidFill>
-                <a:schemeClr val="accent1"/>
+                <a:schemeClr val="accent4"/>
               </a:solidFill>
             </a:endParaRPr>
           </a:p>
@@ -3888,8 +6185,8 @@
         </p:blipFill>
         <p:spPr>
           <a:xfrm>
-            <a:off x="5061857" y="1643743"/>
-            <a:ext cx="6781799" cy="4406649"/>
+            <a:off x="5529943" y="1807029"/>
+            <a:ext cx="6281057" cy="4061959"/>
           </a:xfrm>
         </p:spPr>
       </p:pic>
@@ -3911,8 +6208,8 @@
         </p:nvSpPr>
         <p:spPr>
           <a:xfrm>
-            <a:off x="696686" y="1807029"/>
-            <a:ext cx="4245428" cy="4061959"/>
+            <a:off x="696685" y="1807029"/>
+            <a:ext cx="4659085" cy="4061959"/>
           </a:xfrm>
         </p:spPr>
         <p:txBody>
@@ -4085,7 +6382,7 @@
             <a:r>
               <a:rPr lang="en-IN" sz="4400" b="1" dirty="0">
                 <a:solidFill>
-                  <a:schemeClr val="accent1"/>
+                  <a:schemeClr val="accent4"/>
                 </a:solidFill>
                 <a:latin typeface="Arial" panose="020B0604020202020204" pitchFamily="34" charset="0"/>
                 <a:cs typeface="Arial" panose="020B0604020202020204" pitchFamily="34" charset="0"/>
@@ -4094,7 +6391,7 @@
             </a:r>
             <a:endParaRPr lang="en-IN" sz="4400" dirty="0">
               <a:solidFill>
-                <a:schemeClr val="accent1"/>
+                <a:schemeClr val="accent4"/>
               </a:solidFill>
             </a:endParaRPr>
           </a:p>
@@ -4118,7 +6415,7 @@
         </p:nvSpPr>
         <p:spPr>
           <a:xfrm>
-            <a:off x="836612" y="1572306"/>
+            <a:off x="812007" y="1496105"/>
             <a:ext cx="5157787" cy="550408"/>
           </a:xfrm>
         </p:spPr>
@@ -4194,7 +6491,7 @@
         </p:nvSpPr>
         <p:spPr>
           <a:xfrm>
-            <a:off x="6172200" y="1526381"/>
+            <a:off x="6196805" y="1496105"/>
             <a:ext cx="5183188" cy="550408"/>
           </a:xfrm>
         </p:spPr>
@@ -4313,7 +6610,7 @@
             <a:r>
               <a:rPr lang="en-IN" sz="4400" b="1" dirty="0">
                 <a:solidFill>
-                  <a:schemeClr val="accent1"/>
+                  <a:schemeClr val="accent4"/>
                 </a:solidFill>
                 <a:latin typeface="Arial" panose="020B0604020202020204" pitchFamily="34" charset="0"/>
                 <a:cs typeface="Arial" panose="020B0604020202020204" pitchFamily="34" charset="0"/>
@@ -4347,7 +6644,7 @@
         </p:spPr>
         <p:txBody>
           <a:bodyPr>
-            <a:normAutofit/>
+            <a:normAutofit fontScale="77500" lnSpcReduction="20000"/>
           </a:bodyPr>
           <a:lstStyle/>
           <a:p>
@@ -4435,12 +6732,12 @@
         </p:spPr>
         <p:txBody>
           <a:bodyPr>
-            <a:normAutofit/>
+            <a:normAutofit fontScale="77500" lnSpcReduction="20000"/>
           </a:bodyPr>
           <a:lstStyle/>
           <a:p>
             <a:r>
-              <a:rPr lang="en-IN" dirty="0">
+              <a:rPr lang="en-IN" b="1" dirty="0">
                 <a:solidFill>
                   <a:schemeClr val="accent3"/>
                 </a:solidFill>
@@ -4452,7 +6749,7 @@
           </a:p>
           <a:p>
             <a:r>
-              <a:rPr lang="en-IN" dirty="0">
+              <a:rPr lang="en-IN" b="1" dirty="0">
                 <a:solidFill>
                   <a:schemeClr val="accent3"/>
                 </a:solidFill>
@@ -4668,7 +6965,7 @@
             <a:r>
               <a:rPr lang="en-IN" sz="4400" b="1" dirty="0">
                 <a:solidFill>
-                  <a:schemeClr val="accent1"/>
+                  <a:schemeClr val="accent4"/>
                 </a:solidFill>
                 <a:latin typeface="Arial" panose="020B0604020202020204" pitchFamily="34" charset="0"/>
                 <a:cs typeface="Arial" panose="020B0604020202020204" pitchFamily="34" charset="0"/>
@@ -4696,13 +6993,13 @@
         </p:nvSpPr>
         <p:spPr>
           <a:xfrm>
-            <a:off x="838200" y="1328057"/>
-            <a:ext cx="10515600" cy="4848906"/>
+            <a:off x="740228" y="2303008"/>
+            <a:ext cx="10515600" cy="4380820"/>
           </a:xfrm>
         </p:spPr>
         <p:txBody>
           <a:bodyPr>
-            <a:normAutofit lnSpcReduction="10000"/>
+            <a:normAutofit fontScale="92500" lnSpcReduction="20000"/>
           </a:bodyPr>
           <a:lstStyle/>
           <a:p>
@@ -5048,7 +7345,12 @@
             <p:ph type="title"/>
           </p:nvPr>
         </p:nvSpPr>
-        <p:spPr/>
+        <p:spPr>
+          <a:xfrm>
+            <a:off x="1141413" y="609600"/>
+            <a:ext cx="9905998" cy="1153886"/>
+          </a:xfrm>
+        </p:spPr>
         <p:txBody>
           <a:bodyPr>
             <a:normAutofit/>
@@ -5058,7 +7360,7 @@
             <a:r>
               <a:rPr lang="en-IN" sz="4400" b="1" dirty="0">
                 <a:solidFill>
-                  <a:schemeClr val="accent1"/>
+                  <a:schemeClr val="accent4"/>
                 </a:solidFill>
                 <a:latin typeface="Arial" panose="020B0604020202020204" pitchFamily="34" charset="0"/>
                 <a:cs typeface="Arial" panose="020B0604020202020204" pitchFamily="34" charset="0"/>
@@ -5092,7 +7394,7 @@
         </p:spPr>
         <p:txBody>
           <a:bodyPr>
-            <a:normAutofit/>
+            <a:normAutofit fontScale="92500"/>
           </a:bodyPr>
           <a:lstStyle/>
           <a:p>
@@ -5241,6 +7543,77 @@
     <p:extLst>
       <p:ext uri="{BB962C8B-B14F-4D97-AF65-F5344CB8AC3E}">
         <p14:creationId xmlns:p14="http://schemas.microsoft.com/office/powerpoint/2010/main" val="111250885"/>
+      </p:ext>
+    </p:extLst>
+  </p:cSld>
+  <p:clrMapOvr>
+    <a:masterClrMapping/>
+  </p:clrMapOvr>
+</p:sld>
+</file>
+
+<file path=ppt/slides/slide15.xml><?xml version="1.0" encoding="utf-8"?>
+<p:sld xmlns:a="http://schemas.openxmlformats.org/drawingml/2006/main" xmlns:r="http://schemas.openxmlformats.org/officeDocument/2006/relationships" xmlns:p="http://schemas.openxmlformats.org/presentationml/2006/main">
+  <p:cSld>
+    <p:spTree>
+      <p:nvGrpSpPr>
+        <p:cNvPr id="1" name=""/>
+        <p:cNvGrpSpPr/>
+        <p:nvPr/>
+      </p:nvGrpSpPr>
+      <p:grpSpPr>
+        <a:xfrm>
+          <a:off x="0" y="0"/>
+          <a:ext cx="0" cy="0"/>
+          <a:chOff x="0" y="0"/>
+          <a:chExt cx="0" cy="0"/>
+        </a:xfrm>
+      </p:grpSpPr>
+      <p:sp>
+        <p:nvSpPr>
+          <p:cNvPr id="2" name="Title 1">
+            <a:extLst>
+              <a:ext uri="{FF2B5EF4-FFF2-40B4-BE49-F238E27FC236}">
+                <a16:creationId xmlns:a16="http://schemas.microsoft.com/office/drawing/2014/main" id="{1944821F-510E-F1A3-CB71-FD61B66AC47B}"/>
+              </a:ext>
+            </a:extLst>
+          </p:cNvPr>
+          <p:cNvSpPr>
+            <a:spLocks noGrp="1"/>
+          </p:cNvSpPr>
+          <p:nvPr>
+            <p:ph type="title"/>
+          </p:nvPr>
+        </p:nvSpPr>
+        <p:spPr>
+          <a:xfrm>
+            <a:off x="1141413" y="609600"/>
+            <a:ext cx="9905998" cy="5192486"/>
+          </a:xfrm>
+        </p:spPr>
+        <p:txBody>
+          <a:bodyPr>
+            <a:normAutofit/>
+          </a:bodyPr>
+          <a:lstStyle/>
+          <a:p>
+            <a:pPr algn="ctr"/>
+            <a:r>
+              <a:rPr lang="en-IN" sz="8800" dirty="0">
+                <a:solidFill>
+                  <a:schemeClr val="accent4"/>
+                </a:solidFill>
+                <a:latin typeface="Algerian" panose="04020705040A02060702" pitchFamily="82" charset="0"/>
+              </a:rPr>
+              <a:t>thank YOU</a:t>
+            </a:r>
+          </a:p>
+        </p:txBody>
+      </p:sp>
+    </p:spTree>
+    <p:extLst>
+      <p:ext uri="{BB962C8B-B14F-4D97-AF65-F5344CB8AC3E}">
+        <p14:creationId xmlns:p14="http://schemas.microsoft.com/office/powerpoint/2010/main" val="227033438"/>
       </p:ext>
     </p:extLst>
   </p:cSld>
@@ -5298,7 +7671,7 @@
             <a:r>
               <a:rPr lang="en-IN" sz="4400" b="1" dirty="0">
                 <a:solidFill>
-                  <a:schemeClr val="accent1"/>
+                  <a:schemeClr val="accent4"/>
                 </a:solidFill>
                 <a:latin typeface="Arial" panose="020B0604020202020204" pitchFamily="34" charset="0"/>
                 <a:cs typeface="Arial" panose="020B0604020202020204" pitchFamily="34" charset="0"/>
@@ -5332,7 +7705,7 @@
         </p:spPr>
         <p:txBody>
           <a:bodyPr>
-            <a:normAutofit lnSpcReduction="10000"/>
+            <a:normAutofit/>
           </a:bodyPr>
           <a:lstStyle/>
           <a:p>
@@ -5630,7 +8003,7 @@
             <a:r>
               <a:rPr lang="en-IN" sz="4400" b="1" dirty="0">
                 <a:solidFill>
-                  <a:schemeClr val="accent1"/>
+                  <a:schemeClr val="accent4"/>
                 </a:solidFill>
                 <a:latin typeface="Arial" panose="020B0604020202020204" pitchFamily="34" charset="0"/>
                 <a:cs typeface="Arial" panose="020B0604020202020204" pitchFamily="34" charset="0"/>
@@ -5675,6 +8048,18 @@
               <a:buNone/>
             </a:pPr>
             <a:r>
+              <a:rPr lang="en-US" sz="2400" b="1" kern="100" dirty="0">
+                <a:solidFill>
+                  <a:schemeClr val="accent3"/>
+                </a:solidFill>
+                <a:effectLst/>
+                <a:latin typeface="Arial" panose="020B0604020202020204" pitchFamily="34" charset="0"/>
+                <a:ea typeface="Calibri" panose="020F0502020204030204" pitchFamily="34" charset="0"/>
+                <a:cs typeface="Arial" panose="020B0604020202020204" pitchFamily="34" charset="0"/>
+              </a:rPr>
+              <a:t>	</a:t>
+            </a:r>
+            <a:r>
               <a:rPr lang="en-US" sz="2400" b="1" u="sng" kern="100" dirty="0">
                 <a:solidFill>
                   <a:schemeClr val="accent3"/>
@@ -5764,6 +8149,18 @@
               </a:lnSpc>
               <a:buNone/>
             </a:pPr>
+            <a:r>
+              <a:rPr lang="en-US" sz="2400" b="1" kern="100" dirty="0">
+                <a:solidFill>
+                  <a:schemeClr val="accent3"/>
+                </a:solidFill>
+                <a:effectLst/>
+                <a:latin typeface="Arial" panose="020B0604020202020204" pitchFamily="34" charset="0"/>
+                <a:ea typeface="Calibri" panose="020F0502020204030204" pitchFamily="34" charset="0"/>
+                <a:cs typeface="Arial" panose="020B0604020202020204" pitchFamily="34" charset="0"/>
+              </a:rPr>
+              <a:t>	</a:t>
+            </a:r>
             <a:r>
               <a:rPr lang="en-US" sz="2400" b="1" u="sng" kern="100" dirty="0">
                 <a:solidFill>
@@ -5901,7 +8298,7 @@
             <a:r>
               <a:rPr lang="en-IN" sz="4400" b="1" dirty="0">
                 <a:solidFill>
-                  <a:schemeClr val="accent1"/>
+                  <a:schemeClr val="accent4"/>
                 </a:solidFill>
                 <a:latin typeface="Arial" panose="020B0604020202020204" pitchFamily="34" charset="0"/>
                 <a:cs typeface="Arial" panose="020B0604020202020204" pitchFamily="34" charset="0"/>
@@ -5935,7 +8332,7 @@
         </p:spPr>
         <p:txBody>
           <a:bodyPr>
-            <a:normAutofit fontScale="92500"/>
+            <a:normAutofit lnSpcReduction="10000"/>
           </a:bodyPr>
           <a:lstStyle/>
           <a:p>
@@ -6109,8 +8506,8 @@
         </p:blipFill>
         <p:spPr>
           <a:xfrm>
-            <a:off x="0" y="4388252"/>
-            <a:ext cx="12192000" cy="2469748"/>
+            <a:off x="326571" y="4181708"/>
+            <a:ext cx="11571516" cy="2480350"/>
           </a:xfrm>
           <a:prstGeom prst="rect">
             <a:avLst/>
@@ -6178,7 +8575,7 @@
             <a:r>
               <a:rPr lang="en-US" sz="4400" b="1" kern="100" dirty="0">
                 <a:solidFill>
-                  <a:schemeClr val="accent1"/>
+                  <a:schemeClr val="accent4"/>
                 </a:solidFill>
                 <a:effectLst/>
                 <a:latin typeface="Arial" panose="020B0604020202020204" pitchFamily="34" charset="0"/>
@@ -6189,7 +8586,7 @@
             </a:r>
             <a:endParaRPr lang="en-IN" sz="4400" b="1" dirty="0">
               <a:solidFill>
-                <a:schemeClr val="accent1"/>
+                <a:schemeClr val="accent4"/>
               </a:solidFill>
             </a:endParaRPr>
           </a:p>
@@ -6219,7 +8616,7 @@
         </p:spPr>
         <p:txBody>
           <a:bodyPr>
-            <a:normAutofit/>
+            <a:normAutofit lnSpcReduction="10000"/>
           </a:bodyPr>
           <a:lstStyle/>
           <a:p>
@@ -6439,8 +8836,8 @@
         </p:blipFill>
         <p:spPr>
           <a:xfrm>
-            <a:off x="0" y="4738206"/>
-            <a:ext cx="12192000" cy="2119794"/>
+            <a:off x="239486" y="4738206"/>
+            <a:ext cx="11702143" cy="2029693"/>
           </a:xfrm>
           <a:prstGeom prst="rect">
             <a:avLst/>
@@ -6597,7 +8994,7 @@
             <a:r>
               <a:rPr lang="en-IN" sz="4400" b="1" dirty="0">
                 <a:solidFill>
-                  <a:schemeClr val="accent1"/>
+                  <a:schemeClr val="accent4"/>
                 </a:solidFill>
                 <a:latin typeface="Arial" panose="020B0604020202020204" pitchFamily="34" charset="0"/>
                 <a:cs typeface="Arial" panose="020B0604020202020204" pitchFamily="34" charset="0"/>
@@ -6703,7 +9100,7 @@
             <a:r>
               <a:rPr lang="en-IN" sz="4400" b="1" dirty="0">
                 <a:solidFill>
-                  <a:schemeClr val="accent1"/>
+                  <a:schemeClr val="accent4"/>
                 </a:solidFill>
                 <a:latin typeface="Arial" panose="020B0604020202020204" pitchFamily="34" charset="0"/>
                 <a:cs typeface="Arial" panose="020B0604020202020204" pitchFamily="34" charset="0"/>
@@ -6712,7 +9109,7 @@
             </a:r>
             <a:endParaRPr lang="en-IN" sz="4400" dirty="0">
               <a:solidFill>
-                <a:schemeClr val="accent1"/>
+                <a:schemeClr val="accent4"/>
               </a:solidFill>
             </a:endParaRPr>
           </a:p>
@@ -6752,7 +9149,22 @@
                 <a:latin typeface="Arial" panose="020B0604020202020204" pitchFamily="34" charset="0"/>
                 <a:cs typeface="Arial" panose="020B0604020202020204" pitchFamily="34" charset="0"/>
               </a:rPr>
-              <a:t>Convolutional Neural Network (CNN) using TensorFlow and </a:t>
+              <a:t>Convolutional Neural Network (CNN) </a:t>
+            </a:r>
+          </a:p>
+          <a:p>
+            <a:pPr marL="0" indent="0">
+              <a:buNone/>
+            </a:pPr>
+            <a:r>
+              <a:rPr lang="en-US" dirty="0">
+                <a:solidFill>
+                  <a:schemeClr val="accent3"/>
+                </a:solidFill>
+                <a:latin typeface="Arial" panose="020B0604020202020204" pitchFamily="34" charset="0"/>
+                <a:cs typeface="Arial" panose="020B0604020202020204" pitchFamily="34" charset="0"/>
+              </a:rPr>
+              <a:t>using TensorFlow and </a:t>
             </a:r>
             <a:r>
               <a:rPr lang="en-US" dirty="0" err="1">
@@ -6803,21 +9215,7 @@
                 <a:latin typeface="Arial" panose="020B0604020202020204" pitchFamily="34" charset="0"/>
                 <a:cs typeface="Arial" panose="020B0604020202020204" pitchFamily="34" charset="0"/>
               </a:rPr>
-              <a:t> Max pooling (</a:t>
-            </a:r>
-            <a:r>
-              <a:rPr lang="en-US" sz="2000" dirty="0" err="1">
-                <a:latin typeface="Arial" panose="020B0604020202020204" pitchFamily="34" charset="0"/>
-                <a:cs typeface="Arial" panose="020B0604020202020204" pitchFamily="34" charset="0"/>
-              </a:rPr>
-              <a:t>downsampling</a:t>
-            </a:r>
-            <a:r>
-              <a:rPr lang="en-US" sz="2000" dirty="0">
-                <a:latin typeface="Arial" panose="020B0604020202020204" pitchFamily="34" charset="0"/>
-                <a:cs typeface="Arial" panose="020B0604020202020204" pitchFamily="34" charset="0"/>
-              </a:rPr>
-              <a:t>).</a:t>
+              <a:t> Max pooling (down sampling).</a:t>
             </a:r>
           </a:p>
           <a:p>
@@ -6906,8 +9304,8 @@
         </p:blipFill>
         <p:spPr>
           <a:xfrm>
-            <a:off x="5421086" y="1605091"/>
-            <a:ext cx="6574970" cy="4882793"/>
+            <a:off x="6215742" y="1023257"/>
+            <a:ext cx="5780313" cy="5286103"/>
           </a:xfrm>
           <a:prstGeom prst="rect">
             <a:avLst/>
@@ -6975,7 +9373,7 @@
             <a:r>
               <a:rPr lang="en-IN" sz="4400" b="1" dirty="0">
                 <a:solidFill>
-                  <a:schemeClr val="accent1"/>
+                  <a:schemeClr val="accent4"/>
                 </a:solidFill>
                 <a:latin typeface="Arial" panose="020B0604020202020204" pitchFamily="34" charset="0"/>
                 <a:cs typeface="Arial" panose="020B0604020202020204" pitchFamily="34" charset="0"/>
@@ -7003,8 +9401,8 @@
         </p:nvSpPr>
         <p:spPr>
           <a:xfrm>
-            <a:off x="838200" y="1034144"/>
-            <a:ext cx="10515600" cy="5142820"/>
+            <a:off x="717586" y="1556658"/>
+            <a:ext cx="10515600" cy="5050971"/>
           </a:xfrm>
         </p:spPr>
         <p:txBody>
@@ -7345,7 +9743,7 @@
             <a:r>
               <a:rPr lang="en-IN" sz="4400" b="1" dirty="0">
                 <a:solidFill>
-                  <a:schemeClr val="accent1"/>
+                  <a:schemeClr val="accent4"/>
                 </a:solidFill>
                 <a:latin typeface="Arial" panose="020B0604020202020204" pitchFamily="34" charset="0"/>
                 <a:cs typeface="Arial" panose="020B0604020202020204" pitchFamily="34" charset="0"/>
@@ -7354,7 +9752,7 @@
             </a:r>
             <a:endParaRPr lang="en-IN" sz="4400" dirty="0">
               <a:solidFill>
-                <a:schemeClr val="accent1"/>
+                <a:schemeClr val="accent4"/>
               </a:solidFill>
             </a:endParaRPr>
           </a:p>
@@ -7384,7 +9782,7 @@
         </p:spPr>
         <p:txBody>
           <a:bodyPr>
-            <a:normAutofit fontScale="92500" lnSpcReduction="10000"/>
+            <a:normAutofit fontScale="92500" lnSpcReduction="20000"/>
           </a:bodyPr>
           <a:lstStyle/>
           <a:p>
@@ -7604,7 +10002,7 @@
         <p:spPr>
           <a:xfrm>
             <a:off x="9535885" y="491331"/>
-            <a:ext cx="2013858" cy="1091974"/>
+            <a:ext cx="2177144" cy="1544298"/>
           </a:xfrm>
           <a:prstGeom prst="rect">
             <a:avLst/>
@@ -7625,9 +10023,9 @@
 </file>
 
 <file path=ppt/theme/theme1.xml><?xml version="1.0" encoding="utf-8"?>
-<a:theme xmlns:a="http://schemas.openxmlformats.org/drawingml/2006/main" name="Integral">
+<a:theme xmlns:a="http://schemas.openxmlformats.org/drawingml/2006/main" name="Mesh">
   <a:themeElements>
-    <a:clrScheme name="Blue">
+    <a:clrScheme name="Mesh">
       <a:dk1>
         <a:sysClr val="windowText" lastClr="000000"/>
       </a:dk1>
@@ -7635,50 +10033,48 @@
         <a:sysClr val="window" lastClr="FFFFFF"/>
       </a:lt1>
       <a:dk2>
-        <a:srgbClr val="17406D"/>
+        <a:srgbClr val="363D46"/>
       </a:dk2>
       <a:lt2>
-        <a:srgbClr val="DBEFF9"/>
+        <a:srgbClr val="EBEBEB"/>
       </a:lt2>
       <a:accent1>
-        <a:srgbClr val="0F6FC6"/>
+        <a:srgbClr val="6F6F6F"/>
       </a:accent1>
       <a:accent2>
-        <a:srgbClr val="009DD9"/>
+        <a:srgbClr val="BFBFA5"/>
       </a:accent2>
       <a:accent3>
-        <a:srgbClr val="0BD0D9"/>
+        <a:srgbClr val="DCD084"/>
       </a:accent3>
       <a:accent4>
-        <a:srgbClr val="10CF9B"/>
+        <a:srgbClr val="E7BF5F"/>
       </a:accent4>
       <a:accent5>
-        <a:srgbClr val="7CCA62"/>
+        <a:srgbClr val="E9A039"/>
       </a:accent5>
       <a:accent6>
-        <a:srgbClr val="A5C249"/>
+        <a:srgbClr val="CF7133"/>
       </a:accent6>
       <a:hlink>
-        <a:srgbClr val="F49100"/>
+        <a:srgbClr val="F28943"/>
       </a:hlink>
       <a:folHlink>
-        <a:srgbClr val="85DFD0"/>
+        <a:srgbClr val="F1B76C"/>
       </a:folHlink>
     </a:clrScheme>
-    <a:fontScheme name="Integral">
+    <a:fontScheme name="Mesh">
       <a:majorFont>
-        <a:latin typeface="Tw Cen MT Condensed" panose="020B0606020104020203"/>
+        <a:latin typeface="Century Gothic" panose="020B0502020202020204"/>
         <a:ea typeface=""/>
         <a:cs typeface=""/>
-        <a:font script="Grek" typeface="Calibri"/>
-        <a:font script="Cyrl" typeface="Calibri"/>
-        <a:font script="Jpan" typeface="メイリオ"/>
-        <a:font script="Hang" typeface="HY얕은샘물M"/>
-        <a:font script="Hans" typeface="华文仿宋"/>
-        <a:font script="Hant" typeface="微軟正黑體"/>
-        <a:font script="Arab" typeface="Arial"/>
-        <a:font script="Hebr" typeface="Levenim MT"/>
-        <a:font script="Thai" typeface="FreesiaUPC"/>
+        <a:font script="Jpan" typeface="ＭＳ ゴシック"/>
+        <a:font script="Hang" typeface="맑은 고딕"/>
+        <a:font script="Hans" typeface="宋体"/>
+        <a:font script="Hant" typeface="新細明體"/>
+        <a:font script="Arab" typeface="Tahoma"/>
+        <a:font script="Hebr" typeface="Gisha"/>
+        <a:font script="Thai" typeface="DilleniaUPC"/>
         <a:font script="Ethi" typeface="Nyala"/>
         <a:font script="Beng" typeface="Vrinda"/>
         <a:font script="Gujr" typeface="Shruti"/>
@@ -7704,18 +10100,16 @@
         <a:font script="Geor" typeface="Sylfaen"/>
       </a:majorFont>
       <a:minorFont>
-        <a:latin typeface="Tw Cen MT" panose="020B0602020104020603"/>
+        <a:latin typeface="Century Gothic" panose="020B0502020202020204"/>
         <a:ea typeface=""/>
         <a:cs typeface=""/>
-        <a:font script="Grek" typeface="Calibri"/>
-        <a:font script="Cyrl" typeface="Calibri"/>
-        <a:font script="Jpan" typeface="メイリオ"/>
-        <a:font script="Hang" typeface="HY얕은샘물M"/>
-        <a:font script="Hans" typeface="华文仿宋"/>
-        <a:font script="Hant" typeface="微軟正黑體"/>
-        <a:font script="Arab" typeface="Arial"/>
-        <a:font script="Hebr" typeface="Levenim MT"/>
-        <a:font script="Thai" typeface="FreesiaUPC"/>
+        <a:font script="Jpan" typeface="ＭＳ ゴシック"/>
+        <a:font script="Hang" typeface="맑은 고딕"/>
+        <a:font script="Hans" typeface="宋体"/>
+        <a:font script="Hant" typeface="新細明體"/>
+        <a:font script="Arab" typeface="Tahoma"/>
+        <a:font script="Hebr" typeface="Gisha"/>
+        <a:font script="Thai" typeface="DilleniaUPC"/>
         <a:font script="Ethi" typeface="Nyala"/>
         <a:font script="Beng" typeface="Vrinda"/>
         <a:font script="Gujr" typeface="Shruti"/>
@@ -7736,12 +10130,12 @@
         <a:font script="Laoo" typeface="DokChampa"/>
         <a:font script="Sinh" typeface="Iskoola Pota"/>
         <a:font script="Mong" typeface="Mongolian Baiti"/>
-        <a:font script="Viet" typeface="Tahoma"/>
+        <a:font script="Viet" typeface="Verdana"/>
         <a:font script="Uigh" typeface="Microsoft Uighur"/>
         <a:font script="Geor" typeface="Sylfaen"/>
       </a:minorFont>
     </a:fontScheme>
-    <a:fmtScheme name="Integral">
+    <a:fmtScheme name="Mesh">
       <a:fillStyleLst>
         <a:solidFill>
           <a:schemeClr val="phClr"/>
@@ -7750,61 +10144,50 @@
           <a:gsLst>
             <a:gs pos="0">
               <a:schemeClr val="phClr">
-                <a:tint val="83000"/>
-                <a:satMod val="100000"/>
-                <a:lumMod val="100000"/>
+                <a:tint val="60000"/>
+                <a:lumMod val="110000"/>
               </a:schemeClr>
             </a:gs>
             <a:gs pos="100000">
               <a:schemeClr val="phClr">
-                <a:tint val="61000"/>
-                <a:satMod val="150000"/>
-                <a:lumMod val="100000"/>
+                <a:tint val="82000"/>
               </a:schemeClr>
             </a:gs>
           </a:gsLst>
-          <a:path path="circle">
-            <a:fillToRect l="100000" t="100000" r="100000" b="100000"/>
-          </a:path>
+          <a:lin ang="5400000" scaled="0"/>
         </a:gradFill>
         <a:gradFill rotWithShape="1">
           <a:gsLst>
             <a:gs pos="0">
               <a:schemeClr val="phClr">
-                <a:tint val="100000"/>
-                <a:shade val="85000"/>
-                <a:satMod val="100000"/>
-                <a:lumMod val="100000"/>
+                <a:tint val="96000"/>
+                <a:lumMod val="104000"/>
               </a:schemeClr>
             </a:gs>
             <a:gs pos="100000">
               <a:schemeClr val="phClr">
-                <a:tint val="90000"/>
-                <a:shade val="100000"/>
-                <a:satMod val="150000"/>
-                <a:lumMod val="100000"/>
+                <a:shade val="84000"/>
+                <a:lumMod val="84000"/>
               </a:schemeClr>
             </a:gs>
           </a:gsLst>
-          <a:path path="circle">
-            <a:fillToRect l="100000" t="100000" r="100000" b="100000"/>
-          </a:path>
+          <a:lin ang="5400000" scaled="0"/>
         </a:gradFill>
       </a:fillStyleLst>
       <a:lnStyleLst>
-        <a:ln w="9525" cap="flat" cmpd="sng" algn="ctr">
+        <a:ln w="9525" cap="rnd" cmpd="sng" algn="ctr">
           <a:solidFill>
             <a:schemeClr val="phClr"/>
           </a:solidFill>
           <a:prstDash val="solid"/>
         </a:ln>
-        <a:ln w="15875" cap="flat" cmpd="sng" algn="ctr">
+        <a:ln w="19050" cap="rnd" cmpd="sng" algn="ctr">
           <a:solidFill>
             <a:schemeClr val="phClr"/>
           </a:solidFill>
           <a:prstDash val="solid"/>
         </a:ln>
-        <a:ln w="19050" cap="flat" cmpd="sng" algn="ctr">
+        <a:ln w="25400" cap="rnd" cmpd="sng" algn="ctr">
           <a:solidFill>
             <a:schemeClr val="phClr"/>
           </a:solidFill>
@@ -7817,16 +10200,16 @@
         </a:effectStyle>
         <a:effectStyle>
           <a:effectLst>
-            <a:outerShdw blurRad="50800" dist="12700" dir="5400000" algn="ctr" rotWithShape="0">
+            <a:innerShdw blurRad="50800" dist="25400" dir="13500000">
               <a:srgbClr val="000000">
-                <a:alpha val="50000"/>
+                <a:alpha val="55000"/>
               </a:srgbClr>
-            </a:outerShdw>
+            </a:innerShdw>
           </a:effectLst>
         </a:effectStyle>
         <a:effectStyle>
           <a:effectLst>
-            <a:outerShdw blurRad="76200" dist="25400" dir="5400000" algn="ctr" rotWithShape="0">
+            <a:outerShdw blurRad="50800" dist="38100" dir="5400000" rotWithShape="0">
               <a:srgbClr val="000000">
                 <a:alpha val="60000"/>
               </a:srgbClr>
@@ -7836,18 +10219,10 @@
             <a:camera prst="orthographicFront">
               <a:rot lat="0" lon="0" rev="0"/>
             </a:camera>
-            <a:lightRig rig="flat" dir="t">
-              <a:rot lat="0" lon="0" rev="3600000"/>
-            </a:lightRig>
+            <a:lightRig rig="threePt" dir="tl"/>
           </a:scene3d>
-          <a:sp3d contourW="12700" prstMaterial="flat">
-            <a:bevelT w="38100" h="44450" prst="angle"/>
-            <a:contourClr>
-              <a:schemeClr val="phClr">
-                <a:shade val="35000"/>
-                <a:satMod val="160000"/>
-              </a:schemeClr>
-            </a:contourClr>
+          <a:sp3d>
+            <a:bevelT w="25400" h="25400" prst="slope"/>
           </a:sp3d>
         </a:effectStyle>
       </a:effectStyleLst>
@@ -7855,29 +10230,40 @@
         <a:solidFill>
           <a:schemeClr val="phClr"/>
         </a:solidFill>
-        <a:solidFill>
-          <a:schemeClr val="phClr">
-            <a:tint val="95000"/>
-            <a:shade val="85000"/>
-            <a:satMod val="125000"/>
-          </a:schemeClr>
-        </a:solidFill>
+        <a:gradFill rotWithShape="1">
+          <a:gsLst>
+            <a:gs pos="0">
+              <a:schemeClr val="phClr">
+                <a:tint val="90000"/>
+                <a:lumMod val="110000"/>
+              </a:schemeClr>
+            </a:gs>
+            <a:gs pos="100000">
+              <a:schemeClr val="phClr">
+                <a:shade val="64000"/>
+                <a:lumMod val="98000"/>
+              </a:schemeClr>
+            </a:gs>
+          </a:gsLst>
+          <a:lin ang="5400000" scaled="0"/>
+        </a:gradFill>
         <a:blipFill rotWithShape="1">
           <a:blip xmlns:r="http://schemas.openxmlformats.org/officeDocument/2006/relationships" r:embed="rId1">
             <a:duotone>
               <a:schemeClr val="phClr">
-                <a:tint val="95000"/>
-                <a:shade val="74000"/>
-                <a:satMod val="230000"/>
+                <a:shade val="28000"/>
+                <a:satMod val="94000"/>
+                <a:lumMod val="20000"/>
               </a:schemeClr>
               <a:schemeClr val="phClr">
-                <a:tint val="92000"/>
-                <a:shade val="69000"/>
-                <a:satMod val="250000"/>
+                <a:tint val="94000"/>
+                <a:shade val="84000"/>
+                <a:satMod val="148000"/>
+                <a:lumMod val="114000"/>
               </a:schemeClr>
             </a:duotone>
           </a:blip>
-          <a:tile tx="0" ty="0" sx="40000" sy="40000" flip="none" algn="tl"/>
+          <a:stretch/>
         </a:blipFill>
       </a:bgFillStyleLst>
     </a:fmtScheme>
@@ -7886,7 +10272,7 @@
   <a:extraClrSchemeLst/>
   <a:extLst>
     <a:ext uri="{05A4C25C-085E-4340-85A3-A5531E510DB2}">
-      <thm15:themeFamily xmlns:thm15="http://schemas.microsoft.com/office/thememl/2012/main" name="Integral" id="{3577F8C9-A904-41D8-97D2-FD898F53F20E}" vid="{4825F1AF-8DBC-4E3D-9F3D-688338DA83FC}"/>
+      <thm15:themeFamily xmlns:thm15="http://schemas.microsoft.com/office/thememl/2012/main" name="Mesh" id="{789EC3FE-34FD-429C-9918-760025E6C145}" vid="{B8BE45C0-8141-4D58-8C71-A009BC26FBBB}"/>
     </a:ext>
   </a:extLst>
 </a:theme>
